--- a/teaching/2026Summer/5070/Slides/8.pptx
+++ b/teaching/2026Summer/5070/Slides/8.pptx
@@ -58,7 +58,7 @@
 <file path=ppt/revisionInfo.xml><?xml version="1.0" encoding="utf-8"?>
 <p1510:revInfo xmlns:a="http://schemas.openxmlformats.org/drawingml/2006/main" xmlns:r="http://schemas.openxmlformats.org/officeDocument/2006/relationships" xmlns:p1510="http://schemas.microsoft.com/office/powerpoint/2015/10/main">
   <p1510:revLst>
-    <p1510:client id="{D3E5CAAF-2917-E14F-9589-FD7CC68EB0F8}" v="145" dt="2026-06-05T03:02:42.173"/>
+    <p1510:client id="{D3E5CAAF-2917-E14F-9589-FD7CC68EB0F8}" v="198" dt="2026-06-12T16:11:32.895"/>
   </p1510:revLst>
 </p1510:revInfo>
 </file>
@@ -68,7 +68,7 @@
   <pc:docChgLst>
     <pc:chgData name="Kun Suo" userId="41c30799-3a2b-4880-86a3-8488be07954a" providerId="ADAL" clId="{01B90814-4EBE-5562-8795-CE1E7277191D}"/>
     <pc:docChg chg="undo custSel addSld delSld modSld sldOrd">
-      <pc:chgData name="Kun Suo" userId="41c30799-3a2b-4880-86a3-8488be07954a" providerId="ADAL" clId="{01B90814-4EBE-5562-8795-CE1E7277191D}" dt="2026-06-05T03:03:15.164" v="1323" actId="14100"/>
+      <pc:chgData name="Kun Suo" userId="41c30799-3a2b-4880-86a3-8488be07954a" providerId="ADAL" clId="{01B90814-4EBE-5562-8795-CE1E7277191D}" dt="2026-06-12T16:14:36.966" v="1469" actId="1076"/>
       <pc:docMkLst>
         <pc:docMk/>
       </pc:docMkLst>
@@ -101,70 +101,6 @@
             <ac:spMk id="3" creationId="{00000000-0000-0000-0000-000000000000}"/>
           </ac:spMkLst>
         </pc:spChg>
-        <pc:spChg chg="del">
-          <ac:chgData name="Kun Suo" userId="41c30799-3a2b-4880-86a3-8488be07954a" providerId="ADAL" clId="{01B90814-4EBE-5562-8795-CE1E7277191D}" dt="2026-06-04T21:14:40.248" v="229" actId="478"/>
-          <ac:spMkLst>
-            <pc:docMk/>
-            <pc:sldMk cId="0" sldId="257"/>
-            <ac:spMk id="5" creationId="{00000000-0000-0000-0000-000000000000}"/>
-          </ac:spMkLst>
-        </pc:spChg>
-        <pc:spChg chg="del">
-          <ac:chgData name="Kun Suo" userId="41c30799-3a2b-4880-86a3-8488be07954a" providerId="ADAL" clId="{01B90814-4EBE-5562-8795-CE1E7277191D}" dt="2026-06-04T21:14:42.427" v="230" actId="478"/>
-          <ac:spMkLst>
-            <pc:docMk/>
-            <pc:sldMk cId="0" sldId="257"/>
-            <ac:spMk id="9" creationId="{00000000-0000-0000-0000-000000000000}"/>
-          </ac:spMkLst>
-        </pc:spChg>
-        <pc:spChg chg="del">
-          <ac:chgData name="Kun Suo" userId="41c30799-3a2b-4880-86a3-8488be07954a" providerId="ADAL" clId="{01B90814-4EBE-5562-8795-CE1E7277191D}" dt="2026-06-04T21:14:42.427" v="230" actId="478"/>
-          <ac:spMkLst>
-            <pc:docMk/>
-            <pc:sldMk cId="0" sldId="257"/>
-            <ac:spMk id="10" creationId="{00000000-0000-0000-0000-000000000000}"/>
-          </ac:spMkLst>
-        </pc:spChg>
-        <pc:spChg chg="del">
-          <ac:chgData name="Kun Suo" userId="41c30799-3a2b-4880-86a3-8488be07954a" providerId="ADAL" clId="{01B90814-4EBE-5562-8795-CE1E7277191D}" dt="2026-06-04T21:14:42.427" v="230" actId="478"/>
-          <ac:spMkLst>
-            <pc:docMk/>
-            <pc:sldMk cId="0" sldId="257"/>
-            <ac:spMk id="11" creationId="{00000000-0000-0000-0000-000000000000}"/>
-          </ac:spMkLst>
-        </pc:spChg>
-        <pc:spChg chg="del">
-          <ac:chgData name="Kun Suo" userId="41c30799-3a2b-4880-86a3-8488be07954a" providerId="ADAL" clId="{01B90814-4EBE-5562-8795-CE1E7277191D}" dt="2026-06-04T21:14:42.427" v="230" actId="478"/>
-          <ac:spMkLst>
-            <pc:docMk/>
-            <pc:sldMk cId="0" sldId="257"/>
-            <ac:spMk id="12" creationId="{00000000-0000-0000-0000-000000000000}"/>
-          </ac:spMkLst>
-        </pc:spChg>
-        <pc:spChg chg="del">
-          <ac:chgData name="Kun Suo" userId="41c30799-3a2b-4880-86a3-8488be07954a" providerId="ADAL" clId="{01B90814-4EBE-5562-8795-CE1E7277191D}" dt="2026-06-04T21:14:42.427" v="230" actId="478"/>
-          <ac:spMkLst>
-            <pc:docMk/>
-            <pc:sldMk cId="0" sldId="257"/>
-            <ac:spMk id="13" creationId="{00000000-0000-0000-0000-000000000000}"/>
-          </ac:spMkLst>
-        </pc:spChg>
-        <pc:spChg chg="del">
-          <ac:chgData name="Kun Suo" userId="41c30799-3a2b-4880-86a3-8488be07954a" providerId="ADAL" clId="{01B90814-4EBE-5562-8795-CE1E7277191D}" dt="2026-06-04T21:14:42.427" v="230" actId="478"/>
-          <ac:spMkLst>
-            <pc:docMk/>
-            <pc:sldMk cId="0" sldId="257"/>
-            <ac:spMk id="14" creationId="{00000000-0000-0000-0000-000000000000}"/>
-          </ac:spMkLst>
-        </pc:spChg>
-        <pc:spChg chg="add del mod">
-          <ac:chgData name="Kun Suo" userId="41c30799-3a2b-4880-86a3-8488be07954a" providerId="ADAL" clId="{01B90814-4EBE-5562-8795-CE1E7277191D}" dt="2026-06-04T21:14:45.191" v="232" actId="478"/>
-          <ac:spMkLst>
-            <pc:docMk/>
-            <pc:sldMk cId="0" sldId="257"/>
-            <ac:spMk id="15" creationId="{8E5D3424-EA9C-55BD-2718-EA22E044A030}"/>
-          </ac:spMkLst>
-        </pc:spChg>
         <pc:graphicFrameChg chg="add mod modGraphic">
           <ac:chgData name="Kun Suo" userId="41c30799-3a2b-4880-86a3-8488be07954a" providerId="ADAL" clId="{01B90814-4EBE-5562-8795-CE1E7277191D}" dt="2026-06-04T21:16:45.039" v="254" actId="113"/>
           <ac:graphicFrameMkLst>
@@ -173,45 +109,6 @@
             <ac:graphicFrameMk id="16" creationId="{DB046037-568A-3569-6952-00B7C4BA3C2C}"/>
           </ac:graphicFrameMkLst>
         </pc:graphicFrameChg>
-        <pc:picChg chg="del">
-          <ac:chgData name="Kun Suo" userId="41c30799-3a2b-4880-86a3-8488be07954a" providerId="ADAL" clId="{01B90814-4EBE-5562-8795-CE1E7277191D}" dt="2026-06-04T21:14:42.427" v="230" actId="478"/>
-          <ac:picMkLst>
-            <pc:docMk/>
-            <pc:sldMk cId="0" sldId="257"/>
-            <ac:picMk id="4" creationId="{00000000-0000-0000-0000-000000000000}"/>
-          </ac:picMkLst>
-        </pc:picChg>
-        <pc:picChg chg="del">
-          <ac:chgData name="Kun Suo" userId="41c30799-3a2b-4880-86a3-8488be07954a" providerId="ADAL" clId="{01B90814-4EBE-5562-8795-CE1E7277191D}" dt="2026-06-04T21:14:42.427" v="230" actId="478"/>
-          <ac:picMkLst>
-            <pc:docMk/>
-            <pc:sldMk cId="0" sldId="257"/>
-            <ac:picMk id="6" creationId="{00000000-0000-0000-0000-000000000000}"/>
-          </ac:picMkLst>
-        </pc:picChg>
-        <pc:picChg chg="del">
-          <ac:chgData name="Kun Suo" userId="41c30799-3a2b-4880-86a3-8488be07954a" providerId="ADAL" clId="{01B90814-4EBE-5562-8795-CE1E7277191D}" dt="2026-06-04T21:14:42.427" v="230" actId="478"/>
-          <ac:picMkLst>
-            <pc:docMk/>
-            <pc:sldMk cId="0" sldId="257"/>
-            <ac:picMk id="7" creationId="{00000000-0000-0000-0000-000000000000}"/>
-          </ac:picMkLst>
-        </pc:picChg>
-        <pc:picChg chg="del">
-          <ac:chgData name="Kun Suo" userId="41c30799-3a2b-4880-86a3-8488be07954a" providerId="ADAL" clId="{01B90814-4EBE-5562-8795-CE1E7277191D}" dt="2026-06-04T21:14:42.427" v="230" actId="478"/>
-          <ac:picMkLst>
-            <pc:docMk/>
-            <pc:sldMk cId="0" sldId="257"/>
-            <ac:picMk id="8" creationId="{00000000-0000-0000-0000-000000000000}"/>
-          </ac:picMkLst>
-        </pc:picChg>
-      </pc:sldChg>
-      <pc:sldChg chg="del">
-        <pc:chgData name="Kun Suo" userId="41c30799-3a2b-4880-86a3-8488be07954a" providerId="ADAL" clId="{01B90814-4EBE-5562-8795-CE1E7277191D}" dt="2026-06-04T21:12:31.955" v="204" actId="2696"/>
-        <pc:sldMkLst>
-          <pc:docMk/>
-          <pc:sldMk cId="0" sldId="258"/>
-        </pc:sldMkLst>
       </pc:sldChg>
       <pc:sldChg chg="addSp delSp modSp add mod">
         <pc:chgData name="Kun Suo" userId="41c30799-3a2b-4880-86a3-8488be07954a" providerId="ADAL" clId="{01B90814-4EBE-5562-8795-CE1E7277191D}" dt="2026-06-04T21:51:15.227" v="477" actId="207"/>
@@ -227,188 +124,12 @@
             <ac:spMk id="3" creationId="{6DF5FC8A-FD35-342A-3A69-F211C0A22CDD}"/>
           </ac:spMkLst>
         </pc:spChg>
-        <pc:spChg chg="del">
-          <ac:chgData name="Kun Suo" userId="41c30799-3a2b-4880-86a3-8488be07954a" providerId="ADAL" clId="{01B90814-4EBE-5562-8795-CE1E7277191D}" dt="2026-06-04T21:22:20.963" v="258" actId="478"/>
-          <ac:spMkLst>
-            <pc:docMk/>
-            <pc:sldMk cId="746091037" sldId="258"/>
-            <ac:spMk id="5" creationId="{45FFA4E0-AAB5-D5C1-EB40-56E2BE91F723}"/>
-          </ac:spMkLst>
-        </pc:spChg>
-        <pc:spChg chg="del">
-          <ac:chgData name="Kun Suo" userId="41c30799-3a2b-4880-86a3-8488be07954a" providerId="ADAL" clId="{01B90814-4EBE-5562-8795-CE1E7277191D}" dt="2026-06-04T21:22:20.963" v="258" actId="478"/>
-          <ac:spMkLst>
-            <pc:docMk/>
-            <pc:sldMk cId="746091037" sldId="258"/>
-            <ac:spMk id="9" creationId="{FBDBC8A4-6733-3E5F-E42C-8DF816E37800}"/>
-          </ac:spMkLst>
-        </pc:spChg>
-        <pc:spChg chg="del">
-          <ac:chgData name="Kun Suo" userId="41c30799-3a2b-4880-86a3-8488be07954a" providerId="ADAL" clId="{01B90814-4EBE-5562-8795-CE1E7277191D}" dt="2026-06-04T21:22:20.963" v="258" actId="478"/>
-          <ac:spMkLst>
-            <pc:docMk/>
-            <pc:sldMk cId="746091037" sldId="258"/>
-            <ac:spMk id="10" creationId="{CBE36B5E-CE8C-700D-B9AF-FEFCB0C2BC49}"/>
-          </ac:spMkLst>
-        </pc:spChg>
-        <pc:spChg chg="del">
-          <ac:chgData name="Kun Suo" userId="41c30799-3a2b-4880-86a3-8488be07954a" providerId="ADAL" clId="{01B90814-4EBE-5562-8795-CE1E7277191D}" dt="2026-06-04T21:22:20.963" v="258" actId="478"/>
-          <ac:spMkLst>
-            <pc:docMk/>
-            <pc:sldMk cId="746091037" sldId="258"/>
-            <ac:spMk id="11" creationId="{4E355C12-00DD-59CC-9CC4-1DF2A88B77FF}"/>
-          </ac:spMkLst>
-        </pc:spChg>
-        <pc:spChg chg="del">
-          <ac:chgData name="Kun Suo" userId="41c30799-3a2b-4880-86a3-8488be07954a" providerId="ADAL" clId="{01B90814-4EBE-5562-8795-CE1E7277191D}" dt="2026-06-04T21:22:20.963" v="258" actId="478"/>
-          <ac:spMkLst>
-            <pc:docMk/>
-            <pc:sldMk cId="746091037" sldId="258"/>
-            <ac:spMk id="12" creationId="{35DDE6AE-CDF8-E511-B123-994E4CE0EB5C}"/>
-          </ac:spMkLst>
-        </pc:spChg>
-        <pc:spChg chg="del">
-          <ac:chgData name="Kun Suo" userId="41c30799-3a2b-4880-86a3-8488be07954a" providerId="ADAL" clId="{01B90814-4EBE-5562-8795-CE1E7277191D}" dt="2026-06-04T21:22:20.963" v="258" actId="478"/>
-          <ac:spMkLst>
-            <pc:docMk/>
-            <pc:sldMk cId="746091037" sldId="258"/>
-            <ac:spMk id="13" creationId="{697E7B25-DD6F-D448-4DCF-118AD7B0711A}"/>
-          </ac:spMkLst>
-        </pc:spChg>
-        <pc:spChg chg="del">
-          <ac:chgData name="Kun Suo" userId="41c30799-3a2b-4880-86a3-8488be07954a" providerId="ADAL" clId="{01B90814-4EBE-5562-8795-CE1E7277191D}" dt="2026-06-04T21:22:20.963" v="258" actId="478"/>
-          <ac:spMkLst>
-            <pc:docMk/>
-            <pc:sldMk cId="746091037" sldId="258"/>
-            <ac:spMk id="14" creationId="{A0EABB55-2048-133D-F8C9-AFFC24B90C61}"/>
-          </ac:spMkLst>
-        </pc:spChg>
-        <pc:spChg chg="add mod">
-          <ac:chgData name="Kun Suo" userId="41c30799-3a2b-4880-86a3-8488be07954a" providerId="ADAL" clId="{01B90814-4EBE-5562-8795-CE1E7277191D}" dt="2026-06-04T21:22:27.137" v="259"/>
-          <ac:spMkLst>
-            <pc:docMk/>
-            <pc:sldMk cId="746091037" sldId="258"/>
-            <ac:spMk id="15" creationId="{2D594517-CC18-96F6-0A9B-EBF00D47FFCC}"/>
-          </ac:spMkLst>
-        </pc:spChg>
-        <pc:spChg chg="add mod">
-          <ac:chgData name="Kun Suo" userId="41c30799-3a2b-4880-86a3-8488be07954a" providerId="ADAL" clId="{01B90814-4EBE-5562-8795-CE1E7277191D}" dt="2026-06-04T21:22:27.137" v="259"/>
-          <ac:spMkLst>
-            <pc:docMk/>
-            <pc:sldMk cId="746091037" sldId="258"/>
-            <ac:spMk id="16" creationId="{85C82968-FE68-EED5-44DC-6D166FF3900B}"/>
-          </ac:spMkLst>
-        </pc:spChg>
-        <pc:spChg chg="add mod">
-          <ac:chgData name="Kun Suo" userId="41c30799-3a2b-4880-86a3-8488be07954a" providerId="ADAL" clId="{01B90814-4EBE-5562-8795-CE1E7277191D}" dt="2026-06-04T21:22:27.137" v="259"/>
-          <ac:spMkLst>
-            <pc:docMk/>
-            <pc:sldMk cId="746091037" sldId="258"/>
-            <ac:spMk id="17" creationId="{0F1CBEEC-C1A2-05B9-2904-CBD5C631EDF2}"/>
-          </ac:spMkLst>
-        </pc:spChg>
-        <pc:spChg chg="add mod">
-          <ac:chgData name="Kun Suo" userId="41c30799-3a2b-4880-86a3-8488be07954a" providerId="ADAL" clId="{01B90814-4EBE-5562-8795-CE1E7277191D}" dt="2026-06-04T21:22:27.137" v="259"/>
-          <ac:spMkLst>
-            <pc:docMk/>
-            <pc:sldMk cId="746091037" sldId="258"/>
-            <ac:spMk id="18" creationId="{525E7E45-D114-2939-6DFD-8DD966A383AB}"/>
-          </ac:spMkLst>
-        </pc:spChg>
-        <pc:spChg chg="add mod">
-          <ac:chgData name="Kun Suo" userId="41c30799-3a2b-4880-86a3-8488be07954a" providerId="ADAL" clId="{01B90814-4EBE-5562-8795-CE1E7277191D}" dt="2026-06-04T21:22:27.137" v="259"/>
-          <ac:spMkLst>
-            <pc:docMk/>
-            <pc:sldMk cId="746091037" sldId="258"/>
-            <ac:spMk id="19" creationId="{C9699B5C-486E-1912-4BB1-297DD5E838FC}"/>
-          </ac:spMkLst>
-        </pc:spChg>
-        <pc:spChg chg="add mod">
-          <ac:chgData name="Kun Suo" userId="41c30799-3a2b-4880-86a3-8488be07954a" providerId="ADAL" clId="{01B90814-4EBE-5562-8795-CE1E7277191D}" dt="2026-06-04T21:22:27.137" v="259"/>
-          <ac:spMkLst>
-            <pc:docMk/>
-            <pc:sldMk cId="746091037" sldId="258"/>
-            <ac:spMk id="20" creationId="{C907B269-EB2D-6633-D32E-D09522E876FB}"/>
-          </ac:spMkLst>
-        </pc:spChg>
-        <pc:spChg chg="add mod">
-          <ac:chgData name="Kun Suo" userId="41c30799-3a2b-4880-86a3-8488be07954a" providerId="ADAL" clId="{01B90814-4EBE-5562-8795-CE1E7277191D}" dt="2026-06-04T21:22:34.104" v="263"/>
-          <ac:spMkLst>
-            <pc:docMk/>
-            <pc:sldMk cId="746091037" sldId="258"/>
-            <ac:spMk id="21" creationId="{A1E37617-6FA6-8EE2-17AA-467EB1120142}"/>
-          </ac:spMkLst>
-        </pc:spChg>
-        <pc:spChg chg="add mod">
-          <ac:chgData name="Kun Suo" userId="41c30799-3a2b-4880-86a3-8488be07954a" providerId="ADAL" clId="{01B90814-4EBE-5562-8795-CE1E7277191D}" dt="2026-06-04T21:22:27.137" v="259"/>
-          <ac:spMkLst>
-            <pc:docMk/>
-            <pc:sldMk cId="746091037" sldId="258"/>
-            <ac:spMk id="22" creationId="{F72A3E35-9751-F82D-AC4D-017F3ACD7BEB}"/>
-          </ac:spMkLst>
-        </pc:spChg>
-        <pc:spChg chg="add mod">
-          <ac:chgData name="Kun Suo" userId="41c30799-3a2b-4880-86a3-8488be07954a" providerId="ADAL" clId="{01B90814-4EBE-5562-8795-CE1E7277191D}" dt="2026-06-04T21:22:27.137" v="259"/>
-          <ac:spMkLst>
-            <pc:docMk/>
-            <pc:sldMk cId="746091037" sldId="258"/>
-            <ac:spMk id="23" creationId="{6DB6151B-1FA0-EBFA-A542-5E8782236C52}"/>
-          </ac:spMkLst>
-        </pc:spChg>
-        <pc:spChg chg="add mod">
-          <ac:chgData name="Kun Suo" userId="41c30799-3a2b-4880-86a3-8488be07954a" providerId="ADAL" clId="{01B90814-4EBE-5562-8795-CE1E7277191D}" dt="2026-06-04T21:22:34.104" v="263"/>
-          <ac:spMkLst>
-            <pc:docMk/>
-            <pc:sldMk cId="746091037" sldId="258"/>
-            <ac:spMk id="24" creationId="{1D4A34F7-CADF-A3BA-1AE0-53C9917E24F2}"/>
-          </ac:spMkLst>
-        </pc:spChg>
-        <pc:spChg chg="add mod">
-          <ac:chgData name="Kun Suo" userId="41c30799-3a2b-4880-86a3-8488be07954a" providerId="ADAL" clId="{01B90814-4EBE-5562-8795-CE1E7277191D}" dt="2026-06-04T21:22:41.187" v="264"/>
-          <ac:spMkLst>
-            <pc:docMk/>
-            <pc:sldMk cId="746091037" sldId="258"/>
-            <ac:spMk id="25" creationId="{D64BE9B7-E0F1-D801-0F48-77765011C7C1}"/>
-          </ac:spMkLst>
-        </pc:spChg>
-        <pc:spChg chg="add del mod">
-          <ac:chgData name="Kun Suo" userId="41c30799-3a2b-4880-86a3-8488be07954a" providerId="ADAL" clId="{01B90814-4EBE-5562-8795-CE1E7277191D}" dt="2026-06-04T21:24:48.677" v="269" actId="478"/>
-          <ac:spMkLst>
-            <pc:docMk/>
-            <pc:sldMk cId="746091037" sldId="258"/>
-            <ac:spMk id="26" creationId="{04F3E51E-431E-F9DF-F921-8B619EE3C55F}"/>
-          </ac:spMkLst>
-        </pc:spChg>
-        <pc:spChg chg="add del mod">
-          <ac:chgData name="Kun Suo" userId="41c30799-3a2b-4880-86a3-8488be07954a" providerId="ADAL" clId="{01B90814-4EBE-5562-8795-CE1E7277191D}" dt="2026-06-04T21:24:48.677" v="269" actId="478"/>
-          <ac:spMkLst>
-            <pc:docMk/>
-            <pc:sldMk cId="746091037" sldId="258"/>
-            <ac:spMk id="27" creationId="{6BA516C8-3904-EC28-066E-ED7ECB2D1110}"/>
-          </ac:spMkLst>
-        </pc:spChg>
-        <pc:spChg chg="add del mod">
-          <ac:chgData name="Kun Suo" userId="41c30799-3a2b-4880-86a3-8488be07954a" providerId="ADAL" clId="{01B90814-4EBE-5562-8795-CE1E7277191D}" dt="2026-06-04T21:24:48.677" v="269" actId="478"/>
-          <ac:spMkLst>
-            <pc:docMk/>
-            <pc:sldMk cId="746091037" sldId="258"/>
-            <ac:spMk id="28" creationId="{EFC7537C-653A-B9D3-368C-6B17AFBB9BDA}"/>
-          </ac:spMkLst>
-        </pc:spChg>
         <pc:spChg chg="add mod">
           <ac:chgData name="Kun Suo" userId="41c30799-3a2b-4880-86a3-8488be07954a" providerId="ADAL" clId="{01B90814-4EBE-5562-8795-CE1E7277191D}" dt="2026-06-04T21:51:03.965" v="476" actId="207"/>
           <ac:spMkLst>
             <pc:docMk/>
             <pc:sldMk cId="746091037" sldId="258"/>
             <ac:spMk id="29" creationId="{7AA2800C-A29D-7BC8-B437-D580AF9958E1}"/>
-          </ac:spMkLst>
-        </pc:spChg>
-        <pc:spChg chg="add del mod">
-          <ac:chgData name="Kun Suo" userId="41c30799-3a2b-4880-86a3-8488be07954a" providerId="ADAL" clId="{01B90814-4EBE-5562-8795-CE1E7277191D}" dt="2026-06-04T21:25:56.734" v="285" actId="478"/>
-          <ac:spMkLst>
-            <pc:docMk/>
-            <pc:sldMk cId="746091037" sldId="258"/>
-            <ac:spMk id="30" creationId="{28955E40-717A-D088-665B-DF7D13320939}"/>
           </ac:spMkLst>
         </pc:spChg>
         <pc:spChg chg="add mod">
@@ -436,22 +157,6 @@
           </ac:spMkLst>
         </pc:spChg>
         <pc:spChg chg="add mod">
-          <ac:chgData name="Kun Suo" userId="41c30799-3a2b-4880-86a3-8488be07954a" providerId="ADAL" clId="{01B90814-4EBE-5562-8795-CE1E7277191D}" dt="2026-06-04T21:29:18.474" v="317"/>
-          <ac:spMkLst>
-            <pc:docMk/>
-            <pc:sldMk cId="746091037" sldId="258"/>
-            <ac:spMk id="35" creationId="{EF169AE0-010D-BD3D-AB71-F9C7A11FFA16}"/>
-          </ac:spMkLst>
-        </pc:spChg>
-        <pc:spChg chg="add mod">
-          <ac:chgData name="Kun Suo" userId="41c30799-3a2b-4880-86a3-8488be07954a" providerId="ADAL" clId="{01B90814-4EBE-5562-8795-CE1E7277191D}" dt="2026-06-04T21:29:18.474" v="317"/>
-          <ac:spMkLst>
-            <pc:docMk/>
-            <pc:sldMk cId="746091037" sldId="258"/>
-            <ac:spMk id="36" creationId="{FAB6A731-5D4E-74A8-BBDE-96631CD0AB55}"/>
-          </ac:spMkLst>
-        </pc:spChg>
-        <pc:spChg chg="add mod">
           <ac:chgData name="Kun Suo" userId="41c30799-3a2b-4880-86a3-8488be07954a" providerId="ADAL" clId="{01B90814-4EBE-5562-8795-CE1E7277191D}" dt="2026-06-04T21:29:32.982" v="323" actId="1076"/>
           <ac:spMkLst>
             <pc:docMk/>
@@ -467,47 +172,9 @@
             <ac:spMk id="38" creationId="{38784D25-8880-56AF-C507-DA0503521333}"/>
           </ac:spMkLst>
         </pc:spChg>
-        <pc:picChg chg="del">
-          <ac:chgData name="Kun Suo" userId="41c30799-3a2b-4880-86a3-8488be07954a" providerId="ADAL" clId="{01B90814-4EBE-5562-8795-CE1E7277191D}" dt="2026-06-04T21:22:20.963" v="258" actId="478"/>
-          <ac:picMkLst>
-            <pc:docMk/>
-            <pc:sldMk cId="746091037" sldId="258"/>
-            <ac:picMk id="4" creationId="{56B6A6C7-930B-A722-1646-7648377C81F8}"/>
-          </ac:picMkLst>
-        </pc:picChg>
-        <pc:picChg chg="del">
-          <ac:chgData name="Kun Suo" userId="41c30799-3a2b-4880-86a3-8488be07954a" providerId="ADAL" clId="{01B90814-4EBE-5562-8795-CE1E7277191D}" dt="2026-06-04T21:22:20.963" v="258" actId="478"/>
-          <ac:picMkLst>
-            <pc:docMk/>
-            <pc:sldMk cId="746091037" sldId="258"/>
-            <ac:picMk id="7" creationId="{A247FFFE-280E-FFE9-EE48-B2E36333F9C1}"/>
-          </ac:picMkLst>
-        </pc:picChg>
-        <pc:picChg chg="del">
-          <ac:chgData name="Kun Suo" userId="41c30799-3a2b-4880-86a3-8488be07954a" providerId="ADAL" clId="{01B90814-4EBE-5562-8795-CE1E7277191D}" dt="2026-06-04T21:22:20.963" v="258" actId="478"/>
-          <ac:picMkLst>
-            <pc:docMk/>
-            <pc:sldMk cId="746091037" sldId="258"/>
-            <ac:picMk id="8" creationId="{E269609D-EF43-A2C9-6C64-3EE1D6566BB2}"/>
-          </ac:picMkLst>
-        </pc:picChg>
-      </pc:sldChg>
-      <pc:sldChg chg="new del ord">
-        <pc:chgData name="Kun Suo" userId="41c30799-3a2b-4880-86a3-8488be07954a" providerId="ADAL" clId="{01B90814-4EBE-5562-8795-CE1E7277191D}" dt="2026-06-04T21:14:16.870" v="224" actId="2696"/>
-        <pc:sldMkLst>
-          <pc:docMk/>
-          <pc:sldMk cId="1276259618" sldId="258"/>
-        </pc:sldMkLst>
-      </pc:sldChg>
-      <pc:sldChg chg="modSp del mod">
-        <pc:chgData name="Kun Suo" userId="41c30799-3a2b-4880-86a3-8488be07954a" providerId="ADAL" clId="{01B90814-4EBE-5562-8795-CE1E7277191D}" dt="2026-06-04T21:12:31.955" v="204" actId="2696"/>
-        <pc:sldMkLst>
-          <pc:docMk/>
-          <pc:sldMk cId="0" sldId="259"/>
-        </pc:sldMkLst>
       </pc:sldChg>
       <pc:sldChg chg="addSp delSp modSp add mod">
-        <pc:chgData name="Kun Suo" userId="41c30799-3a2b-4880-86a3-8488be07954a" providerId="ADAL" clId="{01B90814-4EBE-5562-8795-CE1E7277191D}" dt="2026-06-04T22:21:31.726" v="673" actId="20577"/>
+        <pc:chgData name="Kun Suo" userId="41c30799-3a2b-4880-86a3-8488be07954a" providerId="ADAL" clId="{01B90814-4EBE-5562-8795-CE1E7277191D}" dt="2026-06-12T14:57:22.726" v="1333" actId="20577"/>
         <pc:sldMkLst>
           <pc:docMk/>
           <pc:sldMk cId="1270976543" sldId="259"/>
@@ -521,67 +188,11 @@
           </ac:spMkLst>
         </pc:spChg>
         <pc:spChg chg="mod">
-          <ac:chgData name="Kun Suo" userId="41c30799-3a2b-4880-86a3-8488be07954a" providerId="ADAL" clId="{01B90814-4EBE-5562-8795-CE1E7277191D}" dt="2026-06-04T22:21:31.726" v="673" actId="20577"/>
+          <ac:chgData name="Kun Suo" userId="41c30799-3a2b-4880-86a3-8488be07954a" providerId="ADAL" clId="{01B90814-4EBE-5562-8795-CE1E7277191D}" dt="2026-06-12T14:57:22.726" v="1333" actId="20577"/>
           <ac:spMkLst>
             <pc:docMk/>
             <pc:sldMk cId="1270976543" sldId="259"/>
             <ac:spMk id="5" creationId="{E979642E-709F-5D90-B196-47468F9CBD3C}"/>
-          </ac:spMkLst>
-        </pc:spChg>
-        <pc:spChg chg="del">
-          <ac:chgData name="Kun Suo" userId="41c30799-3a2b-4880-86a3-8488be07954a" providerId="ADAL" clId="{01B90814-4EBE-5562-8795-CE1E7277191D}" dt="2026-06-04T21:41:06.995" v="411" actId="478"/>
-          <ac:spMkLst>
-            <pc:docMk/>
-            <pc:sldMk cId="1270976543" sldId="259"/>
-            <ac:spMk id="9" creationId="{8E2F7F86-9F08-A417-495B-4AD74D274835}"/>
-          </ac:spMkLst>
-        </pc:spChg>
-        <pc:spChg chg="del">
-          <ac:chgData name="Kun Suo" userId="41c30799-3a2b-4880-86a3-8488be07954a" providerId="ADAL" clId="{01B90814-4EBE-5562-8795-CE1E7277191D}" dt="2026-06-04T21:41:06.995" v="411" actId="478"/>
-          <ac:spMkLst>
-            <pc:docMk/>
-            <pc:sldMk cId="1270976543" sldId="259"/>
-            <ac:spMk id="10" creationId="{B78A3D2C-B642-CB4D-5A16-05C2752B6E9F}"/>
-          </ac:spMkLst>
-        </pc:spChg>
-        <pc:spChg chg="del">
-          <ac:chgData name="Kun Suo" userId="41c30799-3a2b-4880-86a3-8488be07954a" providerId="ADAL" clId="{01B90814-4EBE-5562-8795-CE1E7277191D}" dt="2026-06-04T21:41:06.995" v="411" actId="478"/>
-          <ac:spMkLst>
-            <pc:docMk/>
-            <pc:sldMk cId="1270976543" sldId="259"/>
-            <ac:spMk id="11" creationId="{B4A3AB59-7AA6-D813-1C57-BB1F3B091693}"/>
-          </ac:spMkLst>
-        </pc:spChg>
-        <pc:spChg chg="del">
-          <ac:chgData name="Kun Suo" userId="41c30799-3a2b-4880-86a3-8488be07954a" providerId="ADAL" clId="{01B90814-4EBE-5562-8795-CE1E7277191D}" dt="2026-06-04T21:41:06.995" v="411" actId="478"/>
-          <ac:spMkLst>
-            <pc:docMk/>
-            <pc:sldMk cId="1270976543" sldId="259"/>
-            <ac:spMk id="12" creationId="{0FBD1AA6-FB95-3E00-AB06-EB93CB35A807}"/>
-          </ac:spMkLst>
-        </pc:spChg>
-        <pc:spChg chg="del">
-          <ac:chgData name="Kun Suo" userId="41c30799-3a2b-4880-86a3-8488be07954a" providerId="ADAL" clId="{01B90814-4EBE-5562-8795-CE1E7277191D}" dt="2026-06-04T21:41:06.995" v="411" actId="478"/>
-          <ac:spMkLst>
-            <pc:docMk/>
-            <pc:sldMk cId="1270976543" sldId="259"/>
-            <ac:spMk id="13" creationId="{33209417-D16B-6688-98BC-93241F5B0DFA}"/>
-          </ac:spMkLst>
-        </pc:spChg>
-        <pc:spChg chg="del">
-          <ac:chgData name="Kun Suo" userId="41c30799-3a2b-4880-86a3-8488be07954a" providerId="ADAL" clId="{01B90814-4EBE-5562-8795-CE1E7277191D}" dt="2026-06-04T21:41:04.481" v="410" actId="478"/>
-          <ac:spMkLst>
-            <pc:docMk/>
-            <pc:sldMk cId="1270976543" sldId="259"/>
-            <ac:spMk id="14" creationId="{74C205CD-8857-342E-638E-8F04929DE987}"/>
-          </ac:spMkLst>
-        </pc:spChg>
-        <pc:spChg chg="add del mod">
-          <ac:chgData name="Kun Suo" userId="41c30799-3a2b-4880-86a3-8488be07954a" providerId="ADAL" clId="{01B90814-4EBE-5562-8795-CE1E7277191D}" dt="2026-06-04T21:44:32.095" v="440"/>
-          <ac:spMkLst>
-            <pc:docMk/>
-            <pc:sldMk cId="1270976543" sldId="259"/>
-            <ac:spMk id="16" creationId="{88571CAE-7D2C-3C49-9C40-059882017E3B}"/>
           </ac:spMkLst>
         </pc:spChg>
         <pc:spChg chg="add mod">
@@ -606,14 +217,6 @@
             <pc:docMk/>
             <pc:sldMk cId="1270976543" sldId="259"/>
             <ac:picMk id="4" creationId="{0A82A184-31A2-4B3E-DEBB-82BF1E346E18}"/>
-          </ac:picMkLst>
-        </pc:picChg>
-        <pc:picChg chg="del">
-          <ac:chgData name="Kun Suo" userId="41c30799-3a2b-4880-86a3-8488be07954a" providerId="ADAL" clId="{01B90814-4EBE-5562-8795-CE1E7277191D}" dt="2026-06-04T21:41:21.028" v="416" actId="478"/>
-          <ac:picMkLst>
-            <pc:docMk/>
-            <pc:sldMk cId="1270976543" sldId="259"/>
-            <ac:picMk id="6" creationId="{DF3B520C-3BA7-6B2B-5B7A-C14721B09A26}"/>
           </ac:picMkLst>
         </pc:picChg>
         <pc:picChg chg="mod">
@@ -641,15 +244,8 @@
           </ac:picMkLst>
         </pc:picChg>
       </pc:sldChg>
-      <pc:sldChg chg="del">
-        <pc:chgData name="Kun Suo" userId="41c30799-3a2b-4880-86a3-8488be07954a" providerId="ADAL" clId="{01B90814-4EBE-5562-8795-CE1E7277191D}" dt="2026-06-04T21:12:31.955" v="204" actId="2696"/>
-        <pc:sldMkLst>
-          <pc:docMk/>
-          <pc:sldMk cId="0" sldId="260"/>
-        </pc:sldMkLst>
-      </pc:sldChg>
       <pc:sldChg chg="addSp delSp modSp add mod">
-        <pc:chgData name="Kun Suo" userId="41c30799-3a2b-4880-86a3-8488be07954a" providerId="ADAL" clId="{01B90814-4EBE-5562-8795-CE1E7277191D}" dt="2026-06-04T21:44:53.709" v="444"/>
+        <pc:chgData name="Kun Suo" userId="41c30799-3a2b-4880-86a3-8488be07954a" providerId="ADAL" clId="{01B90814-4EBE-5562-8795-CE1E7277191D}" dt="2026-06-12T14:43:09.482" v="1329" actId="20577"/>
         <pc:sldMkLst>
           <pc:docMk/>
           <pc:sldMk cId="1977322455" sldId="260"/>
@@ -662,64 +258,8 @@
             <ac:spMk id="3" creationId="{C7118FF0-184C-81AE-DDF0-9ADAE6EDD844}"/>
           </ac:spMkLst>
         </pc:spChg>
-        <pc:spChg chg="del">
-          <ac:chgData name="Kun Suo" userId="41c30799-3a2b-4880-86a3-8488be07954a" providerId="ADAL" clId="{01B90814-4EBE-5562-8795-CE1E7277191D}" dt="2026-06-04T21:30:19.980" v="328" actId="478"/>
-          <ac:spMkLst>
-            <pc:docMk/>
-            <pc:sldMk cId="1977322455" sldId="260"/>
-            <ac:spMk id="29" creationId="{B0CD8C50-9F5F-7777-D4D3-AF7764E50EAE}"/>
-          </ac:spMkLst>
-        </pc:spChg>
-        <pc:spChg chg="del">
-          <ac:chgData name="Kun Suo" userId="41c30799-3a2b-4880-86a3-8488be07954a" providerId="ADAL" clId="{01B90814-4EBE-5562-8795-CE1E7277191D}" dt="2026-06-04T21:30:19.980" v="328" actId="478"/>
-          <ac:spMkLst>
-            <pc:docMk/>
-            <pc:sldMk cId="1977322455" sldId="260"/>
-            <ac:spMk id="31" creationId="{09E9E74A-CC5F-3F01-FF2A-11757BC4B56D}"/>
-          </ac:spMkLst>
-        </pc:spChg>
-        <pc:spChg chg="del">
-          <ac:chgData name="Kun Suo" userId="41c30799-3a2b-4880-86a3-8488be07954a" providerId="ADAL" clId="{01B90814-4EBE-5562-8795-CE1E7277191D}" dt="2026-06-04T21:30:19.980" v="328" actId="478"/>
-          <ac:spMkLst>
-            <pc:docMk/>
-            <pc:sldMk cId="1977322455" sldId="260"/>
-            <ac:spMk id="33" creationId="{6896A9CF-56F0-CE80-ABD3-7832E1EE5A01}"/>
-          </ac:spMkLst>
-        </pc:spChg>
-        <pc:spChg chg="del">
-          <ac:chgData name="Kun Suo" userId="41c30799-3a2b-4880-86a3-8488be07954a" providerId="ADAL" clId="{01B90814-4EBE-5562-8795-CE1E7277191D}" dt="2026-06-04T21:30:19.980" v="328" actId="478"/>
-          <ac:spMkLst>
-            <pc:docMk/>
-            <pc:sldMk cId="1977322455" sldId="260"/>
-            <ac:spMk id="34" creationId="{F2F66B3E-6188-733A-8854-FDB88B3BC93B}"/>
-          </ac:spMkLst>
-        </pc:spChg>
-        <pc:spChg chg="del">
-          <ac:chgData name="Kun Suo" userId="41c30799-3a2b-4880-86a3-8488be07954a" providerId="ADAL" clId="{01B90814-4EBE-5562-8795-CE1E7277191D}" dt="2026-06-04T21:30:19.980" v="328" actId="478"/>
-          <ac:spMkLst>
-            <pc:docMk/>
-            <pc:sldMk cId="1977322455" sldId="260"/>
-            <ac:spMk id="37" creationId="{C625A635-1024-C633-96CA-776E048891BB}"/>
-          </ac:spMkLst>
-        </pc:spChg>
-        <pc:spChg chg="del">
-          <ac:chgData name="Kun Suo" userId="41c30799-3a2b-4880-86a3-8488be07954a" providerId="ADAL" clId="{01B90814-4EBE-5562-8795-CE1E7277191D}" dt="2026-06-04T21:30:19.980" v="328" actId="478"/>
-          <ac:spMkLst>
-            <pc:docMk/>
-            <pc:sldMk cId="1977322455" sldId="260"/>
-            <ac:spMk id="38" creationId="{F8FD2507-6724-9C9A-DE40-653D717E3416}"/>
-          </ac:spMkLst>
-        </pc:spChg>
-        <pc:graphicFrameChg chg="add del mod modGraphic">
-          <ac:chgData name="Kun Suo" userId="41c30799-3a2b-4880-86a3-8488be07954a" providerId="ADAL" clId="{01B90814-4EBE-5562-8795-CE1E7277191D}" dt="2026-06-04T21:33:14.228" v="352" actId="478"/>
-          <ac:graphicFrameMkLst>
-            <pc:docMk/>
-            <pc:sldMk cId="1977322455" sldId="260"/>
-            <ac:graphicFrameMk id="4" creationId="{812732CC-3369-81F5-9944-D75C71D99189}"/>
-          </ac:graphicFrameMkLst>
-        </pc:graphicFrameChg>
         <pc:graphicFrameChg chg="add mod modGraphic">
-          <ac:chgData name="Kun Suo" userId="41c30799-3a2b-4880-86a3-8488be07954a" providerId="ADAL" clId="{01B90814-4EBE-5562-8795-CE1E7277191D}" dt="2026-06-04T21:44:53.709" v="444"/>
+          <ac:chgData name="Kun Suo" userId="41c30799-3a2b-4880-86a3-8488be07954a" providerId="ADAL" clId="{01B90814-4EBE-5562-8795-CE1E7277191D}" dt="2026-06-12T14:43:09.482" v="1329" actId="20577"/>
           <ac:graphicFrameMkLst>
             <pc:docMk/>
             <pc:sldMk cId="1977322455" sldId="260"/>
@@ -727,15 +267,8 @@
           </ac:graphicFrameMkLst>
         </pc:graphicFrameChg>
       </pc:sldChg>
-      <pc:sldChg chg="addSp delSp modSp del mod">
-        <pc:chgData name="Kun Suo" userId="41c30799-3a2b-4880-86a3-8488be07954a" providerId="ADAL" clId="{01B90814-4EBE-5562-8795-CE1E7277191D}" dt="2026-06-04T21:12:31.955" v="204" actId="2696"/>
-        <pc:sldMkLst>
-          <pc:docMk/>
-          <pc:sldMk cId="0" sldId="261"/>
-        </pc:sldMkLst>
-      </pc:sldChg>
       <pc:sldChg chg="delSp modSp add mod">
-        <pc:chgData name="Kun Suo" userId="41c30799-3a2b-4880-86a3-8488be07954a" providerId="ADAL" clId="{01B90814-4EBE-5562-8795-CE1E7277191D}" dt="2026-06-04T21:51:27.247" v="480" actId="207"/>
+        <pc:chgData name="Kun Suo" userId="41c30799-3a2b-4880-86a3-8488be07954a" providerId="ADAL" clId="{01B90814-4EBE-5562-8795-CE1E7277191D}" dt="2026-06-12T14:50:27.258" v="1330" actId="14100"/>
         <pc:sldMkLst>
           <pc:docMk/>
           <pc:sldMk cId="4220046724" sldId="261"/>
@@ -765,7 +298,7 @@
           </ac:spMkLst>
         </pc:spChg>
         <pc:spChg chg="mod">
-          <ac:chgData name="Kun Suo" userId="41c30799-3a2b-4880-86a3-8488be07954a" providerId="ADAL" clId="{01B90814-4EBE-5562-8795-CE1E7277191D}" dt="2026-06-04T21:45:01.374" v="447" actId="108"/>
+          <ac:chgData name="Kun Suo" userId="41c30799-3a2b-4880-86a3-8488be07954a" providerId="ADAL" clId="{01B90814-4EBE-5562-8795-CE1E7277191D}" dt="2026-06-12T14:50:27.258" v="1330" actId="14100"/>
           <ac:spMkLst>
             <pc:docMk/>
             <pc:sldMk cId="4220046724" sldId="261"/>
@@ -780,29 +313,6 @@
             <ac:spMk id="34" creationId="{94EC4AEB-369D-DFC2-05B0-7B650776DEDC}"/>
           </ac:spMkLst>
         </pc:spChg>
-        <pc:spChg chg="del">
-          <ac:chgData name="Kun Suo" userId="41c30799-3a2b-4880-86a3-8488be07954a" providerId="ADAL" clId="{01B90814-4EBE-5562-8795-CE1E7277191D}" dt="2026-06-04T21:37:22.562" v="381" actId="478"/>
-          <ac:spMkLst>
-            <pc:docMk/>
-            <pc:sldMk cId="4220046724" sldId="261"/>
-            <ac:spMk id="37" creationId="{FA52D3E1-1C96-86EA-91D8-219A12BA2053}"/>
-          </ac:spMkLst>
-        </pc:spChg>
-        <pc:spChg chg="del">
-          <ac:chgData name="Kun Suo" userId="41c30799-3a2b-4880-86a3-8488be07954a" providerId="ADAL" clId="{01B90814-4EBE-5562-8795-CE1E7277191D}" dt="2026-06-04T21:37:22.562" v="381" actId="478"/>
-          <ac:spMkLst>
-            <pc:docMk/>
-            <pc:sldMk cId="4220046724" sldId="261"/>
-            <ac:spMk id="38" creationId="{A266566E-EC49-8EF6-1724-CE8C722C21FA}"/>
-          </ac:spMkLst>
-        </pc:spChg>
-      </pc:sldChg>
-      <pc:sldChg chg="del">
-        <pc:chgData name="Kun Suo" userId="41c30799-3a2b-4880-86a3-8488be07954a" providerId="ADAL" clId="{01B90814-4EBE-5562-8795-CE1E7277191D}" dt="2026-06-04T21:12:31.955" v="204" actId="2696"/>
-        <pc:sldMkLst>
-          <pc:docMk/>
-          <pc:sldMk cId="0" sldId="262"/>
-        </pc:sldMkLst>
       </pc:sldChg>
       <pc:sldChg chg="addSp delSp modSp add mod">
         <pc:chgData name="Kun Suo" userId="41c30799-3a2b-4880-86a3-8488be07954a" providerId="ADAL" clId="{01B90814-4EBE-5562-8795-CE1E7277191D}" dt="2026-06-04T21:56:55.039" v="547" actId="20577"/>
@@ -824,54 +334,6 @@
             <pc:docMk/>
             <pc:sldMk cId="2082143027" sldId="262"/>
             <ac:spMk id="5" creationId="{695C13A3-3DEB-014E-5654-B38B4B9279C2}"/>
-          </ac:spMkLst>
-        </pc:spChg>
-        <pc:spChg chg="del">
-          <ac:chgData name="Kun Suo" userId="41c30799-3a2b-4880-86a3-8488be07954a" providerId="ADAL" clId="{01B90814-4EBE-5562-8795-CE1E7277191D}" dt="2026-06-04T21:49:48.624" v="471" actId="478"/>
-          <ac:spMkLst>
-            <pc:docMk/>
-            <pc:sldMk cId="2082143027" sldId="262"/>
-            <ac:spMk id="9" creationId="{D8E66F2F-7227-C72F-FEAE-890DD7ABDFF1}"/>
-          </ac:spMkLst>
-        </pc:spChg>
-        <pc:spChg chg="del">
-          <ac:chgData name="Kun Suo" userId="41c30799-3a2b-4880-86a3-8488be07954a" providerId="ADAL" clId="{01B90814-4EBE-5562-8795-CE1E7277191D}" dt="2026-06-04T21:49:48.624" v="471" actId="478"/>
-          <ac:spMkLst>
-            <pc:docMk/>
-            <pc:sldMk cId="2082143027" sldId="262"/>
-            <ac:spMk id="10" creationId="{80194D3E-51F1-1C33-C8BE-BD4FC4C9DDBF}"/>
-          </ac:spMkLst>
-        </pc:spChg>
-        <pc:spChg chg="del">
-          <ac:chgData name="Kun Suo" userId="41c30799-3a2b-4880-86a3-8488be07954a" providerId="ADAL" clId="{01B90814-4EBE-5562-8795-CE1E7277191D}" dt="2026-06-04T21:49:48.624" v="471" actId="478"/>
-          <ac:spMkLst>
-            <pc:docMk/>
-            <pc:sldMk cId="2082143027" sldId="262"/>
-            <ac:spMk id="11" creationId="{E47EE2E3-11D9-B95A-2B93-D9DB0F69EA16}"/>
-          </ac:spMkLst>
-        </pc:spChg>
-        <pc:spChg chg="del">
-          <ac:chgData name="Kun Suo" userId="41c30799-3a2b-4880-86a3-8488be07954a" providerId="ADAL" clId="{01B90814-4EBE-5562-8795-CE1E7277191D}" dt="2026-06-04T21:49:48.624" v="471" actId="478"/>
-          <ac:spMkLst>
-            <pc:docMk/>
-            <pc:sldMk cId="2082143027" sldId="262"/>
-            <ac:spMk id="12" creationId="{828A9BD3-7E83-55CC-364E-4157E237E417}"/>
-          </ac:spMkLst>
-        </pc:spChg>
-        <pc:spChg chg="del">
-          <ac:chgData name="Kun Suo" userId="41c30799-3a2b-4880-86a3-8488be07954a" providerId="ADAL" clId="{01B90814-4EBE-5562-8795-CE1E7277191D}" dt="2026-06-04T21:49:48.624" v="471" actId="478"/>
-          <ac:spMkLst>
-            <pc:docMk/>
-            <pc:sldMk cId="2082143027" sldId="262"/>
-            <ac:spMk id="13" creationId="{E16C6989-4C0A-D760-6600-126F0F9D9F71}"/>
-          </ac:spMkLst>
-        </pc:spChg>
-        <pc:spChg chg="del">
-          <ac:chgData name="Kun Suo" userId="41c30799-3a2b-4880-86a3-8488be07954a" providerId="ADAL" clId="{01B90814-4EBE-5562-8795-CE1E7277191D}" dt="2026-06-04T21:49:47.085" v="470" actId="478"/>
-          <ac:spMkLst>
-            <pc:docMk/>
-            <pc:sldMk cId="2082143027" sldId="262"/>
-            <ac:spMk id="14" creationId="{BE8C894A-8807-979E-2FA0-8CAA9E0BB80C}"/>
           </ac:spMkLst>
         </pc:spChg>
         <pc:spChg chg="add mod">
@@ -896,14 +358,6 @@
             <pc:docMk/>
             <pc:sldMk cId="2082143027" sldId="262"/>
             <ac:spMk id="17" creationId="{D4A395CB-0403-6047-4C88-CBBEB4191394}"/>
-          </ac:spMkLst>
-        </pc:spChg>
-        <pc:spChg chg="add del mod">
-          <ac:chgData name="Kun Suo" userId="41c30799-3a2b-4880-86a3-8488be07954a" providerId="ADAL" clId="{01B90814-4EBE-5562-8795-CE1E7277191D}" dt="2026-06-04T21:55:01.879" v="508" actId="478"/>
-          <ac:spMkLst>
-            <pc:docMk/>
-            <pc:sldMk cId="2082143027" sldId="262"/>
-            <ac:spMk id="18" creationId="{26DA8790-F090-EFB1-BD57-25993D812572}"/>
           </ac:spMkLst>
         </pc:spChg>
         <pc:spChg chg="add mod">
@@ -938,40 +392,9 @@
             <ac:picMk id="4" creationId="{5B1A4CFC-D940-1DDF-3BFE-A43875696F98}"/>
           </ac:picMkLst>
         </pc:picChg>
-        <pc:picChg chg="del">
-          <ac:chgData name="Kun Suo" userId="41c30799-3a2b-4880-86a3-8488be07954a" providerId="ADAL" clId="{01B90814-4EBE-5562-8795-CE1E7277191D}" dt="2026-06-04T21:49:57.507" v="473" actId="478"/>
-          <ac:picMkLst>
-            <pc:docMk/>
-            <pc:sldMk cId="2082143027" sldId="262"/>
-            <ac:picMk id="6" creationId="{B071F776-BFE2-61A8-BD1E-7CB11E1FB16A}"/>
-          </ac:picMkLst>
-        </pc:picChg>
-        <pc:picChg chg="del">
-          <ac:chgData name="Kun Suo" userId="41c30799-3a2b-4880-86a3-8488be07954a" providerId="ADAL" clId="{01B90814-4EBE-5562-8795-CE1E7277191D}" dt="2026-06-04T21:49:57.507" v="473" actId="478"/>
-          <ac:picMkLst>
-            <pc:docMk/>
-            <pc:sldMk cId="2082143027" sldId="262"/>
-            <ac:picMk id="7" creationId="{BA680843-CFE2-665F-749E-A4F309C49491}"/>
-          </ac:picMkLst>
-        </pc:picChg>
-        <pc:picChg chg="del">
-          <ac:chgData name="Kun Suo" userId="41c30799-3a2b-4880-86a3-8488be07954a" providerId="ADAL" clId="{01B90814-4EBE-5562-8795-CE1E7277191D}" dt="2026-06-04T21:49:57.507" v="473" actId="478"/>
-          <ac:picMkLst>
-            <pc:docMk/>
-            <pc:sldMk cId="2082143027" sldId="262"/>
-            <ac:picMk id="8" creationId="{E11E7FA9-1EAA-FE26-4E93-E441FCE2129C}"/>
-          </ac:picMkLst>
-        </pc:picChg>
       </pc:sldChg>
-      <pc:sldChg chg="addSp delSp modSp del mod">
-        <pc:chgData name="Kun Suo" userId="41c30799-3a2b-4880-86a3-8488be07954a" providerId="ADAL" clId="{01B90814-4EBE-5562-8795-CE1E7277191D}" dt="2026-06-04T21:12:31.955" v="204" actId="2696"/>
-        <pc:sldMkLst>
-          <pc:docMk/>
-          <pc:sldMk cId="0" sldId="263"/>
-        </pc:sldMkLst>
-      </pc:sldChg>
-      <pc:sldChg chg="addSp delSp modSp add mod">
-        <pc:chgData name="Kun Suo" userId="41c30799-3a2b-4880-86a3-8488be07954a" providerId="ADAL" clId="{01B90814-4EBE-5562-8795-CE1E7277191D}" dt="2026-06-05T02:33:04.281" v="1021"/>
+      <pc:sldChg chg="addSp delSp modSp add mod modNotesTx">
+        <pc:chgData name="Kun Suo" userId="41c30799-3a2b-4880-86a3-8488be07954a" providerId="ADAL" clId="{01B90814-4EBE-5562-8795-CE1E7277191D}" dt="2026-06-12T15:36:09.763" v="1399" actId="20577"/>
         <pc:sldMkLst>
           <pc:docMk/>
           <pc:sldMk cId="2531015647" sldId="263"/>
@@ -992,54 +415,6 @@
             <ac:spMk id="5" creationId="{8AF5B7D9-1404-76A7-2863-58D6C7261C0F}"/>
           </ac:spMkLst>
         </pc:spChg>
-        <pc:spChg chg="del">
-          <ac:chgData name="Kun Suo" userId="41c30799-3a2b-4880-86a3-8488be07954a" providerId="ADAL" clId="{01B90814-4EBE-5562-8795-CE1E7277191D}" dt="2026-06-05T02:10:13.587" v="730" actId="478"/>
-          <ac:spMkLst>
-            <pc:docMk/>
-            <pc:sldMk cId="2531015647" sldId="263"/>
-            <ac:spMk id="9" creationId="{5A37CB8A-A575-3175-504E-5719202AE88D}"/>
-          </ac:spMkLst>
-        </pc:spChg>
-        <pc:spChg chg="del">
-          <ac:chgData name="Kun Suo" userId="41c30799-3a2b-4880-86a3-8488be07954a" providerId="ADAL" clId="{01B90814-4EBE-5562-8795-CE1E7277191D}" dt="2026-06-05T02:10:13.587" v="730" actId="478"/>
-          <ac:spMkLst>
-            <pc:docMk/>
-            <pc:sldMk cId="2531015647" sldId="263"/>
-            <ac:spMk id="10" creationId="{0CBEE505-6730-71ED-3144-A8208932A967}"/>
-          </ac:spMkLst>
-        </pc:spChg>
-        <pc:spChg chg="del">
-          <ac:chgData name="Kun Suo" userId="41c30799-3a2b-4880-86a3-8488be07954a" providerId="ADAL" clId="{01B90814-4EBE-5562-8795-CE1E7277191D}" dt="2026-06-05T02:10:13.587" v="730" actId="478"/>
-          <ac:spMkLst>
-            <pc:docMk/>
-            <pc:sldMk cId="2531015647" sldId="263"/>
-            <ac:spMk id="11" creationId="{8DAFE959-606B-B92D-2D32-F434C62D2DCB}"/>
-          </ac:spMkLst>
-        </pc:spChg>
-        <pc:spChg chg="del">
-          <ac:chgData name="Kun Suo" userId="41c30799-3a2b-4880-86a3-8488be07954a" providerId="ADAL" clId="{01B90814-4EBE-5562-8795-CE1E7277191D}" dt="2026-06-05T02:10:13.587" v="730" actId="478"/>
-          <ac:spMkLst>
-            <pc:docMk/>
-            <pc:sldMk cId="2531015647" sldId="263"/>
-            <ac:spMk id="12" creationId="{1710205A-7797-24D9-8A99-21B9C061B89E}"/>
-          </ac:spMkLst>
-        </pc:spChg>
-        <pc:spChg chg="del">
-          <ac:chgData name="Kun Suo" userId="41c30799-3a2b-4880-86a3-8488be07954a" providerId="ADAL" clId="{01B90814-4EBE-5562-8795-CE1E7277191D}" dt="2026-06-05T02:10:13.587" v="730" actId="478"/>
-          <ac:spMkLst>
-            <pc:docMk/>
-            <pc:sldMk cId="2531015647" sldId="263"/>
-            <ac:spMk id="13" creationId="{CA636286-838F-999A-7613-8FD03F0F5002}"/>
-          </ac:spMkLst>
-        </pc:spChg>
-        <pc:spChg chg="del">
-          <ac:chgData name="Kun Suo" userId="41c30799-3a2b-4880-86a3-8488be07954a" providerId="ADAL" clId="{01B90814-4EBE-5562-8795-CE1E7277191D}" dt="2026-06-05T02:10:11.757" v="729" actId="478"/>
-          <ac:spMkLst>
-            <pc:docMk/>
-            <pc:sldMk cId="2531015647" sldId="263"/>
-            <ac:spMk id="14" creationId="{8ADD84BB-9D52-E364-28B4-34BCBF95E8D1}"/>
-          </ac:spMkLst>
-        </pc:spChg>
         <pc:spChg chg="add mod">
           <ac:chgData name="Kun Suo" userId="41c30799-3a2b-4880-86a3-8488be07954a" providerId="ADAL" clId="{01B90814-4EBE-5562-8795-CE1E7277191D}" dt="2026-06-05T02:16:46.942" v="838" actId="403"/>
           <ac:spMkLst>
@@ -1049,7 +424,7 @@
           </ac:spMkLst>
         </pc:spChg>
         <pc:spChg chg="add mod">
-          <ac:chgData name="Kun Suo" userId="41c30799-3a2b-4880-86a3-8488be07954a" providerId="ADAL" clId="{01B90814-4EBE-5562-8795-CE1E7277191D}" dt="2026-06-05T02:17:48.328" v="855" actId="404"/>
+          <ac:chgData name="Kun Suo" userId="41c30799-3a2b-4880-86a3-8488be07954a" providerId="ADAL" clId="{01B90814-4EBE-5562-8795-CE1E7277191D}" dt="2026-06-12T15:35:01.990" v="1396" actId="1076"/>
           <ac:spMkLst>
             <pc:docMk/>
             <pc:sldMk cId="2531015647" sldId="263"/>
@@ -1088,37 +463,6 @@
             <ac:picMk id="4" creationId="{48934F09-A14C-CB95-10C5-310AF25ABA20}"/>
           </ac:picMkLst>
         </pc:picChg>
-        <pc:picChg chg="del">
-          <ac:chgData name="Kun Suo" userId="41c30799-3a2b-4880-86a3-8488be07954a" providerId="ADAL" clId="{01B90814-4EBE-5562-8795-CE1E7277191D}" dt="2026-06-05T02:12:00.260" v="738" actId="478"/>
-          <ac:picMkLst>
-            <pc:docMk/>
-            <pc:sldMk cId="2531015647" sldId="263"/>
-            <ac:picMk id="6" creationId="{754922FA-9E94-E140-51FA-F887B55DC9A9}"/>
-          </ac:picMkLst>
-        </pc:picChg>
-        <pc:picChg chg="del">
-          <ac:chgData name="Kun Suo" userId="41c30799-3a2b-4880-86a3-8488be07954a" providerId="ADAL" clId="{01B90814-4EBE-5562-8795-CE1E7277191D}" dt="2026-06-05T02:12:01.511" v="739" actId="478"/>
-          <ac:picMkLst>
-            <pc:docMk/>
-            <pc:sldMk cId="2531015647" sldId="263"/>
-            <ac:picMk id="7" creationId="{A70C993D-2582-BB6E-7AE7-2B61F36BB712}"/>
-          </ac:picMkLst>
-        </pc:picChg>
-        <pc:picChg chg="del">
-          <ac:chgData name="Kun Suo" userId="41c30799-3a2b-4880-86a3-8488be07954a" providerId="ADAL" clId="{01B90814-4EBE-5562-8795-CE1E7277191D}" dt="2026-06-05T02:12:01.511" v="739" actId="478"/>
-          <ac:picMkLst>
-            <pc:docMk/>
-            <pc:sldMk cId="2531015647" sldId="263"/>
-            <ac:picMk id="8" creationId="{AA6525F4-F508-C9B1-245D-268469D5906B}"/>
-          </ac:picMkLst>
-        </pc:picChg>
-      </pc:sldChg>
-      <pc:sldChg chg="addSp delSp modSp del mod">
-        <pc:chgData name="Kun Suo" userId="41c30799-3a2b-4880-86a3-8488be07954a" providerId="ADAL" clId="{01B90814-4EBE-5562-8795-CE1E7277191D}" dt="2026-06-04T21:12:31.955" v="204" actId="2696"/>
-        <pc:sldMkLst>
-          <pc:docMk/>
-          <pc:sldMk cId="0" sldId="264"/>
-        </pc:sldMkLst>
       </pc:sldChg>
       <pc:sldChg chg="addSp delSp modSp add mod">
         <pc:chgData name="Kun Suo" userId="41c30799-3a2b-4880-86a3-8488be07954a" providerId="ADAL" clId="{01B90814-4EBE-5562-8795-CE1E7277191D}" dt="2026-06-04T22:01:34.073" v="572" actId="1076"/>
@@ -1142,54 +486,6 @@
             <ac:spMk id="5" creationId="{C269A892-BDFD-6282-8E8F-E6F0CB9157DD}"/>
           </ac:spMkLst>
         </pc:spChg>
-        <pc:spChg chg="add del mod">
-          <ac:chgData name="Kun Suo" userId="41c30799-3a2b-4880-86a3-8488be07954a" providerId="ADAL" clId="{01B90814-4EBE-5562-8795-CE1E7277191D}" dt="2026-06-04T22:01:12.840" v="567"/>
-          <ac:spMkLst>
-            <pc:docMk/>
-            <pc:sldMk cId="910287547" sldId="264"/>
-            <ac:spMk id="10" creationId="{16A9F3A6-5649-9D53-477B-D607B2109F8B}"/>
-          </ac:spMkLst>
-        </pc:spChg>
-        <pc:spChg chg="del">
-          <ac:chgData name="Kun Suo" userId="41c30799-3a2b-4880-86a3-8488be07954a" providerId="ADAL" clId="{01B90814-4EBE-5562-8795-CE1E7277191D}" dt="2026-06-04T21:58:14.478" v="552" actId="478"/>
-          <ac:spMkLst>
-            <pc:docMk/>
-            <pc:sldMk cId="910287547" sldId="264"/>
-            <ac:spMk id="18" creationId="{1B3E29AA-8442-468A-DD25-A9F82CC7116C}"/>
-          </ac:spMkLst>
-        </pc:spChg>
-        <pc:spChg chg="del">
-          <ac:chgData name="Kun Suo" userId="41c30799-3a2b-4880-86a3-8488be07954a" providerId="ADAL" clId="{01B90814-4EBE-5562-8795-CE1E7277191D}" dt="2026-06-04T21:58:14.478" v="552" actId="478"/>
-          <ac:spMkLst>
-            <pc:docMk/>
-            <pc:sldMk cId="910287547" sldId="264"/>
-            <ac:spMk id="20" creationId="{329784A1-83C9-DFDA-0719-66B5C6697DFD}"/>
-          </ac:spMkLst>
-        </pc:spChg>
-        <pc:picChg chg="add del mod">
-          <ac:chgData name="Kun Suo" userId="41c30799-3a2b-4880-86a3-8488be07954a" providerId="ADAL" clId="{01B90814-4EBE-5562-8795-CE1E7277191D}" dt="2026-06-04T22:01:02.639" v="562" actId="478"/>
-          <ac:picMkLst>
-            <pc:docMk/>
-            <pc:sldMk cId="910287547" sldId="264"/>
-            <ac:picMk id="6" creationId="{6CB96EFA-93AA-BD25-76AB-370B13BBC325}"/>
-          </ac:picMkLst>
-        </pc:picChg>
-        <pc:picChg chg="del">
-          <ac:chgData name="Kun Suo" userId="41c30799-3a2b-4880-86a3-8488be07954a" providerId="ADAL" clId="{01B90814-4EBE-5562-8795-CE1E7277191D}" dt="2026-06-04T21:58:29.163" v="554" actId="478"/>
-          <ac:picMkLst>
-            <pc:docMk/>
-            <pc:sldMk cId="910287547" sldId="264"/>
-            <ac:picMk id="7" creationId="{F97B541E-893A-01FB-B9D3-E2AF759D9B0B}"/>
-          </ac:picMkLst>
-        </pc:picChg>
-        <pc:picChg chg="del">
-          <ac:chgData name="Kun Suo" userId="41c30799-3a2b-4880-86a3-8488be07954a" providerId="ADAL" clId="{01B90814-4EBE-5562-8795-CE1E7277191D}" dt="2026-06-04T21:58:29.163" v="554" actId="478"/>
-          <ac:picMkLst>
-            <pc:docMk/>
-            <pc:sldMk cId="910287547" sldId="264"/>
-            <ac:picMk id="8" creationId="{1B3F136C-8057-BB05-9FB8-EC985A2E44FE}"/>
-          </ac:picMkLst>
-        </pc:picChg>
         <pc:picChg chg="add mod">
           <ac:chgData name="Kun Suo" userId="41c30799-3a2b-4880-86a3-8488be07954a" providerId="ADAL" clId="{01B90814-4EBE-5562-8795-CE1E7277191D}" dt="2026-06-04T22:01:09.886" v="565" actId="1076"/>
           <ac:picMkLst>
@@ -1215,15 +511,8 @@
           </ac:picMkLst>
         </pc:picChg>
       </pc:sldChg>
-      <pc:sldChg chg="addSp delSp modSp del mod">
-        <pc:chgData name="Kun Suo" userId="41c30799-3a2b-4880-86a3-8488be07954a" providerId="ADAL" clId="{01B90814-4EBE-5562-8795-CE1E7277191D}" dt="2026-06-04T21:12:31.955" v="204" actId="2696"/>
-        <pc:sldMkLst>
-          <pc:docMk/>
-          <pc:sldMk cId="0" sldId="265"/>
-        </pc:sldMkLst>
-      </pc:sldChg>
       <pc:sldChg chg="addSp delSp modSp add mod">
-        <pc:chgData name="Kun Suo" userId="41c30799-3a2b-4880-86a3-8488be07954a" providerId="ADAL" clId="{01B90814-4EBE-5562-8795-CE1E7277191D}" dt="2026-06-04T22:06:27.006" v="608" actId="1076"/>
+        <pc:chgData name="Kun Suo" userId="41c30799-3a2b-4880-86a3-8488be07954a" providerId="ADAL" clId="{01B90814-4EBE-5562-8795-CE1E7277191D}" dt="2026-06-12T15:12:17.302" v="1369"/>
         <pc:sldMkLst>
           <pc:docMk/>
           <pc:sldMk cId="2955307060" sldId="265"/>
@@ -1237,155 +526,19 @@
           </ac:spMkLst>
         </pc:spChg>
         <pc:spChg chg="mod">
-          <ac:chgData name="Kun Suo" userId="41c30799-3a2b-4880-86a3-8488be07954a" providerId="ADAL" clId="{01B90814-4EBE-5562-8795-CE1E7277191D}" dt="2026-06-04T22:05:59.952" v="605" actId="20577"/>
+          <ac:chgData name="Kun Suo" userId="41c30799-3a2b-4880-86a3-8488be07954a" providerId="ADAL" clId="{01B90814-4EBE-5562-8795-CE1E7277191D}" dt="2026-06-12T15:10:25.370" v="1334" actId="20577"/>
           <ac:spMkLst>
             <pc:docMk/>
             <pc:sldMk cId="2955307060" sldId="265"/>
             <ac:spMk id="5" creationId="{BAF59AF5-D550-99BA-0817-76D652E18369}"/>
           </ac:spMkLst>
         </pc:spChg>
-        <pc:spChg chg="add mod">
-          <ac:chgData name="Kun Suo" userId="41c30799-3a2b-4880-86a3-8488be07954a" providerId="ADAL" clId="{01B90814-4EBE-5562-8795-CE1E7277191D}" dt="2026-06-04T22:03:35.966" v="580"/>
-          <ac:spMkLst>
-            <pc:docMk/>
-            <pc:sldMk cId="2955307060" sldId="265"/>
-            <ac:spMk id="6" creationId="{8F76F7F5-0427-8E85-3FA3-AAC0AFE1C56D}"/>
-          </ac:spMkLst>
-        </pc:spChg>
-        <pc:spChg chg="add mod">
-          <ac:chgData name="Kun Suo" userId="41c30799-3a2b-4880-86a3-8488be07954a" providerId="ADAL" clId="{01B90814-4EBE-5562-8795-CE1E7277191D}" dt="2026-06-04T22:03:35.966" v="580"/>
-          <ac:spMkLst>
-            <pc:docMk/>
-            <pc:sldMk cId="2955307060" sldId="265"/>
-            <ac:spMk id="11" creationId="{5771B640-4279-9800-58D5-A58D374B4552}"/>
-          </ac:spMkLst>
-        </pc:spChg>
-        <pc:spChg chg="del">
-          <ac:chgData name="Kun Suo" userId="41c30799-3a2b-4880-86a3-8488be07954a" providerId="ADAL" clId="{01B90814-4EBE-5562-8795-CE1E7277191D}" dt="2026-06-04T22:02:05.111" v="573" actId="478"/>
-          <ac:spMkLst>
-            <pc:docMk/>
-            <pc:sldMk cId="2955307060" sldId="265"/>
-            <ac:spMk id="18" creationId="{F8D8F990-F595-649D-9072-4C4F47612A5C}"/>
-          </ac:spMkLst>
-        </pc:spChg>
-        <pc:spChg chg="del">
-          <ac:chgData name="Kun Suo" userId="41c30799-3a2b-4880-86a3-8488be07954a" providerId="ADAL" clId="{01B90814-4EBE-5562-8795-CE1E7277191D}" dt="2026-06-04T22:02:05.111" v="573" actId="478"/>
-          <ac:spMkLst>
-            <pc:docMk/>
-            <pc:sldMk cId="2955307060" sldId="265"/>
-            <ac:spMk id="20" creationId="{7E0C853E-3AD4-B090-7032-23D545803ED1}"/>
-          </ac:spMkLst>
-        </pc:spChg>
-        <pc:spChg chg="add mod">
-          <ac:chgData name="Kun Suo" userId="41c30799-3a2b-4880-86a3-8488be07954a" providerId="ADAL" clId="{01B90814-4EBE-5562-8795-CE1E7277191D}" dt="2026-06-04T22:03:35.966" v="580"/>
-          <ac:spMkLst>
-            <pc:docMk/>
-            <pc:sldMk cId="2955307060" sldId="265"/>
-            <ac:spMk id="21" creationId="{4FBB178A-B5A2-EA45-A245-0CBC61DB1890}"/>
-          </ac:spMkLst>
-        </pc:spChg>
-        <pc:spChg chg="add mod">
-          <ac:chgData name="Kun Suo" userId="41c30799-3a2b-4880-86a3-8488be07954a" providerId="ADAL" clId="{01B90814-4EBE-5562-8795-CE1E7277191D}" dt="2026-06-04T22:03:35.966" v="580"/>
-          <ac:spMkLst>
-            <pc:docMk/>
-            <pc:sldMk cId="2955307060" sldId="265"/>
-            <ac:spMk id="22" creationId="{5E6AE2AA-31C2-2B12-83AB-245B28291E51}"/>
-          </ac:spMkLst>
-        </pc:spChg>
-        <pc:spChg chg="add mod">
-          <ac:chgData name="Kun Suo" userId="41c30799-3a2b-4880-86a3-8488be07954a" providerId="ADAL" clId="{01B90814-4EBE-5562-8795-CE1E7277191D}" dt="2026-06-04T22:03:35.966" v="580"/>
-          <ac:spMkLst>
-            <pc:docMk/>
-            <pc:sldMk cId="2955307060" sldId="265"/>
-            <ac:spMk id="26" creationId="{FAC9E629-1380-2960-468D-C9E2FACCEFB8}"/>
-          </ac:spMkLst>
-        </pc:spChg>
-        <pc:spChg chg="add mod">
-          <ac:chgData name="Kun Suo" userId="41c30799-3a2b-4880-86a3-8488be07954a" providerId="ADAL" clId="{01B90814-4EBE-5562-8795-CE1E7277191D}" dt="2026-06-04T22:03:35.966" v="580"/>
-          <ac:spMkLst>
-            <pc:docMk/>
-            <pc:sldMk cId="2955307060" sldId="265"/>
-            <ac:spMk id="28" creationId="{5B0FC487-8EF2-87FE-D7A8-D4DCE291F1A1}"/>
-          </ac:spMkLst>
-        </pc:spChg>
-        <pc:spChg chg="add mod">
-          <ac:chgData name="Kun Suo" userId="41c30799-3a2b-4880-86a3-8488be07954a" providerId="ADAL" clId="{01B90814-4EBE-5562-8795-CE1E7277191D}" dt="2026-06-04T22:03:35.966" v="580"/>
-          <ac:spMkLst>
-            <pc:docMk/>
-            <pc:sldMk cId="2955307060" sldId="265"/>
-            <ac:spMk id="32" creationId="{D77F4A4C-17E0-E274-C3EA-9163A1CD07D2}"/>
-          </ac:spMkLst>
-        </pc:spChg>
-        <pc:spChg chg="add mod">
-          <ac:chgData name="Kun Suo" userId="41c30799-3a2b-4880-86a3-8488be07954a" providerId="ADAL" clId="{01B90814-4EBE-5562-8795-CE1E7277191D}" dt="2026-06-04T22:03:35.966" v="580"/>
-          <ac:spMkLst>
-            <pc:docMk/>
-            <pc:sldMk cId="2955307060" sldId="265"/>
-            <ac:spMk id="35" creationId="{848542BE-CE53-8553-BDF1-8B5EE513DB07}"/>
-          </ac:spMkLst>
-        </pc:spChg>
-        <pc:spChg chg="add mod">
-          <ac:chgData name="Kun Suo" userId="41c30799-3a2b-4880-86a3-8488be07954a" providerId="ADAL" clId="{01B90814-4EBE-5562-8795-CE1E7277191D}" dt="2026-06-04T22:03:35.966" v="580"/>
-          <ac:spMkLst>
-            <pc:docMk/>
-            <pc:sldMk cId="2955307060" sldId="265"/>
-            <ac:spMk id="44" creationId="{ED3C9124-F285-6F33-F6AC-8FC4C8B1BEE1}"/>
-          </ac:spMkLst>
-        </pc:spChg>
-        <pc:spChg chg="add mod">
-          <ac:chgData name="Kun Suo" userId="41c30799-3a2b-4880-86a3-8488be07954a" providerId="ADAL" clId="{01B90814-4EBE-5562-8795-CE1E7277191D}" dt="2026-06-04T22:03:35.966" v="580"/>
-          <ac:spMkLst>
-            <pc:docMk/>
-            <pc:sldMk cId="2955307060" sldId="265"/>
-            <ac:spMk id="54" creationId="{F7552222-D4F7-9D18-A1A8-C4ACB07E988E}"/>
-          </ac:spMkLst>
-        </pc:spChg>
-        <pc:spChg chg="add del mod">
-          <ac:chgData name="Kun Suo" userId="41c30799-3a2b-4880-86a3-8488be07954a" providerId="ADAL" clId="{01B90814-4EBE-5562-8795-CE1E7277191D}" dt="2026-06-04T22:04:05.915" v="589" actId="478"/>
-          <ac:spMkLst>
-            <pc:docMk/>
-            <pc:sldMk cId="2955307060" sldId="265"/>
-            <ac:spMk id="59" creationId="{4341A711-D118-2F2D-FD7A-48CDB190A4A6}"/>
-          </ac:spMkLst>
-        </pc:spChg>
-        <pc:picChg chg="del">
-          <ac:chgData name="Kun Suo" userId="41c30799-3a2b-4880-86a3-8488be07954a" providerId="ADAL" clId="{01B90814-4EBE-5562-8795-CE1E7277191D}" dt="2026-06-04T22:03:11.850" v="579" actId="478"/>
-          <ac:picMkLst>
-            <pc:docMk/>
-            <pc:sldMk cId="2955307060" sldId="265"/>
-            <ac:picMk id="7" creationId="{5FB0D6AA-1082-FD9B-6B98-BB0F6A8D7057}"/>
-          </ac:picMkLst>
-        </pc:picChg>
-        <pc:picChg chg="del">
-          <ac:chgData name="Kun Suo" userId="41c30799-3a2b-4880-86a3-8488be07954a" providerId="ADAL" clId="{01B90814-4EBE-5562-8795-CE1E7277191D}" dt="2026-06-04T22:03:11.850" v="579" actId="478"/>
-          <ac:picMkLst>
-            <pc:docMk/>
-            <pc:sldMk cId="2955307060" sldId="265"/>
-            <ac:picMk id="8" creationId="{5FFD5F95-B83D-8561-60E5-D267F3B3D54F}"/>
-          </ac:picMkLst>
-        </pc:picChg>
-        <pc:picChg chg="del">
-          <ac:chgData name="Kun Suo" userId="41c30799-3a2b-4880-86a3-8488be07954a" providerId="ADAL" clId="{01B90814-4EBE-5562-8795-CE1E7277191D}" dt="2026-06-04T22:03:11.850" v="579" actId="478"/>
-          <ac:picMkLst>
-            <pc:docMk/>
-            <pc:sldMk cId="2955307060" sldId="265"/>
-            <ac:picMk id="15" creationId="{2F6B0115-03B6-4309-9D1D-CB7C43B14265}"/>
-          </ac:picMkLst>
-        </pc:picChg>
         <pc:picChg chg="add mod">
           <ac:chgData name="Kun Suo" userId="41c30799-3a2b-4880-86a3-8488be07954a" providerId="ADAL" clId="{01B90814-4EBE-5562-8795-CE1E7277191D}" dt="2026-06-04T22:05:17.073" v="597" actId="1036"/>
           <ac:picMkLst>
             <pc:docMk/>
             <pc:sldMk cId="2955307060" sldId="265"/>
             <ac:picMk id="60" creationId="{9D77A751-0A80-D19B-DBCE-A3CC0BAE57B5}"/>
-          </ac:picMkLst>
-        </pc:picChg>
-        <pc:picChg chg="add mod">
-          <ac:chgData name="Kun Suo" userId="41c30799-3a2b-4880-86a3-8488be07954a" providerId="ADAL" clId="{01B90814-4EBE-5562-8795-CE1E7277191D}" dt="2026-06-04T22:05:08.436" v="594"/>
-          <ac:picMkLst>
-            <pc:docMk/>
-            <pc:sldMk cId="2955307060" sldId="265"/>
-            <ac:picMk id="61" creationId="{4337A256-3865-68D9-0EF4-9519134958E8}"/>
           </ac:picMkLst>
         </pc:picChg>
         <pc:picChg chg="add mod">
@@ -1396,16 +549,161 @@
             <ac:picMk id="3074" creationId="{3A3A87FE-97B9-7533-50B7-B79AF0B2B7C5}"/>
           </ac:picMkLst>
         </pc:picChg>
-      </pc:sldChg>
-      <pc:sldChg chg="del">
-        <pc:chgData name="Kun Suo" userId="41c30799-3a2b-4880-86a3-8488be07954a" providerId="ADAL" clId="{01B90814-4EBE-5562-8795-CE1E7277191D}" dt="2026-06-04T21:12:31.955" v="204" actId="2696"/>
-        <pc:sldMkLst>
-          <pc:docMk/>
-          <pc:sldMk cId="0" sldId="266"/>
-        </pc:sldMkLst>
+        <pc:inkChg chg="add del">
+          <ac:chgData name="Kun Suo" userId="41c30799-3a2b-4880-86a3-8488be07954a" providerId="ADAL" clId="{01B90814-4EBE-5562-8795-CE1E7277191D}" dt="2026-06-12T15:12:17.302" v="1367"/>
+          <ac:inkMkLst>
+            <pc:docMk/>
+            <pc:sldMk cId="2955307060" sldId="265"/>
+            <ac:inkMk id="6" creationId="{7DD884D8-6612-EB8F-21AE-FF30C36A90DC}"/>
+          </ac:inkMkLst>
+        </pc:inkChg>
+        <pc:inkChg chg="add del">
+          <ac:chgData name="Kun Suo" userId="41c30799-3a2b-4880-86a3-8488be07954a" providerId="ADAL" clId="{01B90814-4EBE-5562-8795-CE1E7277191D}" dt="2026-06-12T15:12:17.299" v="1356"/>
+          <ac:inkMkLst>
+            <pc:docMk/>
+            <pc:sldMk cId="2955307060" sldId="265"/>
+            <ac:inkMk id="7" creationId="{CDB99C47-AEFC-DC98-5E7F-F1CA9F0A23D8}"/>
+          </ac:inkMkLst>
+        </pc:inkChg>
+        <pc:inkChg chg="add del">
+          <ac:chgData name="Kun Suo" userId="41c30799-3a2b-4880-86a3-8488be07954a" providerId="ADAL" clId="{01B90814-4EBE-5562-8795-CE1E7277191D}" dt="2026-06-12T15:12:17.300" v="1357"/>
+          <ac:inkMkLst>
+            <pc:docMk/>
+            <pc:sldMk cId="2955307060" sldId="265"/>
+            <ac:inkMk id="8" creationId="{80A67227-E453-6371-DB32-E00F2F79793E}"/>
+          </ac:inkMkLst>
+        </pc:inkChg>
+        <pc:inkChg chg="add del">
+          <ac:chgData name="Kun Suo" userId="41c30799-3a2b-4880-86a3-8488be07954a" providerId="ADAL" clId="{01B90814-4EBE-5562-8795-CE1E7277191D}" dt="2026-06-12T15:12:17.302" v="1366"/>
+          <ac:inkMkLst>
+            <pc:docMk/>
+            <pc:sldMk cId="2955307060" sldId="265"/>
+            <ac:inkMk id="9" creationId="{AB365A25-B7A7-0475-936A-CE0BFF86A83B}"/>
+          </ac:inkMkLst>
+        </pc:inkChg>
+        <pc:inkChg chg="add">
+          <ac:chgData name="Kun Suo" userId="41c30799-3a2b-4880-86a3-8488be07954a" providerId="ADAL" clId="{01B90814-4EBE-5562-8795-CE1E7277191D}" dt="2026-06-12T15:11:03.534" v="1339" actId="9405"/>
+          <ac:inkMkLst>
+            <pc:docMk/>
+            <pc:sldMk cId="2955307060" sldId="265"/>
+            <ac:inkMk id="10" creationId="{88BC1BF6-83D8-FA3C-6BA1-56A4A45E3F49}"/>
+          </ac:inkMkLst>
+        </pc:inkChg>
+        <pc:inkChg chg="add del">
+          <ac:chgData name="Kun Suo" userId="41c30799-3a2b-4880-86a3-8488be07954a" providerId="ADAL" clId="{01B90814-4EBE-5562-8795-CE1E7277191D}" dt="2026-06-12T15:12:17.301" v="1363"/>
+          <ac:inkMkLst>
+            <pc:docMk/>
+            <pc:sldMk cId="2955307060" sldId="265"/>
+            <ac:inkMk id="11" creationId="{E7345092-D5F1-751D-444E-C953B234E714}"/>
+          </ac:inkMkLst>
+        </pc:inkChg>
+        <pc:inkChg chg="add del">
+          <ac:chgData name="Kun Suo" userId="41c30799-3a2b-4880-86a3-8488be07954a" providerId="ADAL" clId="{01B90814-4EBE-5562-8795-CE1E7277191D}" dt="2026-06-12T15:12:17.299" v="1355"/>
+          <ac:inkMkLst>
+            <pc:docMk/>
+            <pc:sldMk cId="2955307060" sldId="265"/>
+            <ac:inkMk id="12" creationId="{7EA01DAD-23C2-24E9-6341-C47461EFFB11}"/>
+          </ac:inkMkLst>
+        </pc:inkChg>
+        <pc:inkChg chg="add del">
+          <ac:chgData name="Kun Suo" userId="41c30799-3a2b-4880-86a3-8488be07954a" providerId="ADAL" clId="{01B90814-4EBE-5562-8795-CE1E7277191D}" dt="2026-06-12T15:12:17.301" v="1362"/>
+          <ac:inkMkLst>
+            <pc:docMk/>
+            <pc:sldMk cId="2955307060" sldId="265"/>
+            <ac:inkMk id="13" creationId="{E3E6A305-0450-3EE1-8AA0-3361CAF5FB60}"/>
+          </ac:inkMkLst>
+        </pc:inkChg>
+        <pc:inkChg chg="add del">
+          <ac:chgData name="Kun Suo" userId="41c30799-3a2b-4880-86a3-8488be07954a" providerId="ADAL" clId="{01B90814-4EBE-5562-8795-CE1E7277191D}" dt="2026-06-12T15:12:17.297" v="1354"/>
+          <ac:inkMkLst>
+            <pc:docMk/>
+            <pc:sldMk cId="2955307060" sldId="265"/>
+            <ac:inkMk id="14" creationId="{8A39860C-D933-E474-E882-5C60373147ED}"/>
+          </ac:inkMkLst>
+        </pc:inkChg>
+        <pc:inkChg chg="add del">
+          <ac:chgData name="Kun Suo" userId="41c30799-3a2b-4880-86a3-8488be07954a" providerId="ADAL" clId="{01B90814-4EBE-5562-8795-CE1E7277191D}" dt="2026-06-12T15:12:17.301" v="1360"/>
+          <ac:inkMkLst>
+            <pc:docMk/>
+            <pc:sldMk cId="2955307060" sldId="265"/>
+            <ac:inkMk id="15" creationId="{2712AA2C-B5A5-DD99-891F-41732D76169C}"/>
+          </ac:inkMkLst>
+        </pc:inkChg>
+        <pc:inkChg chg="add del">
+          <ac:chgData name="Kun Suo" userId="41c30799-3a2b-4880-86a3-8488be07954a" providerId="ADAL" clId="{01B90814-4EBE-5562-8795-CE1E7277191D}" dt="2026-06-12T15:12:17.302" v="1365"/>
+          <ac:inkMkLst>
+            <pc:docMk/>
+            <pc:sldMk cId="2955307060" sldId="265"/>
+            <ac:inkMk id="16" creationId="{E94F4A31-51C9-28A8-4B17-CD1D99B24F53}"/>
+          </ac:inkMkLst>
+        </pc:inkChg>
+        <pc:inkChg chg="add">
+          <ac:chgData name="Kun Suo" userId="41c30799-3a2b-4880-86a3-8488be07954a" providerId="ADAL" clId="{01B90814-4EBE-5562-8795-CE1E7277191D}" dt="2026-06-12T15:11:34" v="1346" actId="9405"/>
+          <ac:inkMkLst>
+            <pc:docMk/>
+            <pc:sldMk cId="2955307060" sldId="265"/>
+            <ac:inkMk id="17" creationId="{18D30610-E357-E61B-A34B-CE7518F170E3}"/>
+          </ac:inkMkLst>
+        </pc:inkChg>
+        <pc:inkChg chg="add">
+          <ac:chgData name="Kun Suo" userId="41c30799-3a2b-4880-86a3-8488be07954a" providerId="ADAL" clId="{01B90814-4EBE-5562-8795-CE1E7277191D}" dt="2026-06-12T15:11:34.498" v="1347" actId="9405"/>
+          <ac:inkMkLst>
+            <pc:docMk/>
+            <pc:sldMk cId="2955307060" sldId="265"/>
+            <ac:inkMk id="18" creationId="{7CDB8258-7028-513D-8F41-D01C6755540A}"/>
+          </ac:inkMkLst>
+        </pc:inkChg>
+        <pc:inkChg chg="add del">
+          <ac:chgData name="Kun Suo" userId="41c30799-3a2b-4880-86a3-8488be07954a" providerId="ADAL" clId="{01B90814-4EBE-5562-8795-CE1E7277191D}" dt="2026-06-12T15:12:17.300" v="1359"/>
+          <ac:inkMkLst>
+            <pc:docMk/>
+            <pc:sldMk cId="2955307060" sldId="265"/>
+            <ac:inkMk id="19" creationId="{759E3C4F-0215-9CA3-5C8B-3009203952F6}"/>
+          </ac:inkMkLst>
+        </pc:inkChg>
+        <pc:inkChg chg="add del">
+          <ac:chgData name="Kun Suo" userId="41c30799-3a2b-4880-86a3-8488be07954a" providerId="ADAL" clId="{01B90814-4EBE-5562-8795-CE1E7277191D}" dt="2026-06-12T15:12:17.302" v="1368"/>
+          <ac:inkMkLst>
+            <pc:docMk/>
+            <pc:sldMk cId="2955307060" sldId="265"/>
+            <ac:inkMk id="20" creationId="{772B1710-1AD8-5FD1-BC66-773AD346A00D}"/>
+          </ac:inkMkLst>
+        </pc:inkChg>
+        <pc:inkChg chg="add del">
+          <ac:chgData name="Kun Suo" userId="41c30799-3a2b-4880-86a3-8488be07954a" providerId="ADAL" clId="{01B90814-4EBE-5562-8795-CE1E7277191D}" dt="2026-06-12T15:12:17.301" v="1361"/>
+          <ac:inkMkLst>
+            <pc:docMk/>
+            <pc:sldMk cId="2955307060" sldId="265"/>
+            <ac:inkMk id="21" creationId="{DADDF2CB-8F3F-CA53-66A3-13D630F6725A}"/>
+          </ac:inkMkLst>
+        </pc:inkChg>
+        <pc:inkChg chg="add del">
+          <ac:chgData name="Kun Suo" userId="41c30799-3a2b-4880-86a3-8488be07954a" providerId="ADAL" clId="{01B90814-4EBE-5562-8795-CE1E7277191D}" dt="2026-06-12T15:12:17.300" v="1358"/>
+          <ac:inkMkLst>
+            <pc:docMk/>
+            <pc:sldMk cId="2955307060" sldId="265"/>
+            <ac:inkMk id="22" creationId="{EB1B6254-FC84-7A4D-9BA8-4FE295B27A71}"/>
+          </ac:inkMkLst>
+        </pc:inkChg>
+        <pc:inkChg chg="add del">
+          <ac:chgData name="Kun Suo" userId="41c30799-3a2b-4880-86a3-8488be07954a" providerId="ADAL" clId="{01B90814-4EBE-5562-8795-CE1E7277191D}" dt="2026-06-12T15:12:17.302" v="1369"/>
+          <ac:inkMkLst>
+            <pc:docMk/>
+            <pc:sldMk cId="2955307060" sldId="265"/>
+            <ac:inkMk id="23" creationId="{C3E21613-E9F3-8BC7-F7E0-4A351E805205}"/>
+          </ac:inkMkLst>
+        </pc:inkChg>
+        <pc:inkChg chg="add del">
+          <ac:chgData name="Kun Suo" userId="41c30799-3a2b-4880-86a3-8488be07954a" providerId="ADAL" clId="{01B90814-4EBE-5562-8795-CE1E7277191D}" dt="2026-06-12T15:12:17.301" v="1364"/>
+          <ac:inkMkLst>
+            <pc:docMk/>
+            <pc:sldMk cId="2955307060" sldId="265"/>
+            <ac:inkMk id="24" creationId="{F631401F-08AD-DD64-910F-B60B422C2D39}"/>
+          </ac:inkMkLst>
+        </pc:inkChg>
       </pc:sldChg>
       <pc:sldChg chg="addSp delSp modSp add mod ord">
-        <pc:chgData name="Kun Suo" userId="41c30799-3a2b-4880-86a3-8488be07954a" providerId="ADAL" clId="{01B90814-4EBE-5562-8795-CE1E7277191D}" dt="2026-06-04T22:28:39.863" v="728" actId="20577"/>
+        <pc:chgData name="Kun Suo" userId="41c30799-3a2b-4880-86a3-8488be07954a" providerId="ADAL" clId="{01B90814-4EBE-5562-8795-CE1E7277191D}" dt="2026-06-12T15:19:05.868" v="1384"/>
         <pc:sldMkLst>
           <pc:docMk/>
           <pc:sldMk cId="4282987760" sldId="266"/>
@@ -1416,14 +714,6 @@
             <pc:docMk/>
             <pc:sldMk cId="4282987760" sldId="266"/>
             <ac:spMk id="3" creationId="{8E5F8E45-D5D3-33E1-D3AF-70A572B80487}"/>
-          </ac:spMkLst>
-        </pc:spChg>
-        <pc:spChg chg="del">
-          <ac:chgData name="Kun Suo" userId="41c30799-3a2b-4880-86a3-8488be07954a" providerId="ADAL" clId="{01B90814-4EBE-5562-8795-CE1E7277191D}" dt="2026-06-04T22:24:57.472" v="676" actId="478"/>
-          <ac:spMkLst>
-            <pc:docMk/>
-            <pc:sldMk cId="4282987760" sldId="266"/>
-            <ac:spMk id="5" creationId="{90E81E69-061C-3C85-FD09-98D075AB1113}"/>
           </ac:spMkLst>
         </pc:spChg>
         <pc:spChg chg="add mod">
@@ -1440,14 +730,6 @@
             <pc:docMk/>
             <pc:sldMk cId="4282987760" sldId="266"/>
             <ac:spMk id="9" creationId="{8AA9B114-52E1-7C94-3D97-538A9ECD4545}"/>
-          </ac:spMkLst>
-        </pc:spChg>
-        <pc:spChg chg="add del mod">
-          <ac:chgData name="Kun Suo" userId="41c30799-3a2b-4880-86a3-8488be07954a" providerId="ADAL" clId="{01B90814-4EBE-5562-8795-CE1E7277191D}" dt="2026-06-04T22:25:14.984" v="680" actId="478"/>
-          <ac:spMkLst>
-            <pc:docMk/>
-            <pc:sldMk cId="4282987760" sldId="266"/>
-            <ac:spMk id="10" creationId="{BD0EFBF6-2661-9EEE-13AB-ED91CE899170}"/>
           </ac:spMkLst>
         </pc:spChg>
         <pc:spChg chg="add mod">
@@ -1467,54 +749,6 @@
           </ac:spMkLst>
         </pc:spChg>
         <pc:spChg chg="add mod">
-          <ac:chgData name="Kun Suo" userId="41c30799-3a2b-4880-86a3-8488be07954a" providerId="ADAL" clId="{01B90814-4EBE-5562-8795-CE1E7277191D}" dt="2026-06-04T22:27:05.825" v="705" actId="255"/>
-          <ac:spMkLst>
-            <pc:docMk/>
-            <pc:sldMk cId="4282987760" sldId="266"/>
-            <ac:spMk id="13" creationId="{54D02045-5EA4-211C-154E-615E4D2EF8D0}"/>
-          </ac:spMkLst>
-        </pc:spChg>
-        <pc:spChg chg="add mod">
-          <ac:chgData name="Kun Suo" userId="41c30799-3a2b-4880-86a3-8488be07954a" providerId="ADAL" clId="{01B90814-4EBE-5562-8795-CE1E7277191D}" dt="2026-06-04T22:27:05.825" v="705" actId="255"/>
-          <ac:spMkLst>
-            <pc:docMk/>
-            <pc:sldMk cId="4282987760" sldId="266"/>
-            <ac:spMk id="14" creationId="{F690897D-DEE2-FE56-C5B5-19CA50FEAFD6}"/>
-          </ac:spMkLst>
-        </pc:spChg>
-        <pc:spChg chg="add mod">
-          <ac:chgData name="Kun Suo" userId="41c30799-3a2b-4880-86a3-8488be07954a" providerId="ADAL" clId="{01B90814-4EBE-5562-8795-CE1E7277191D}" dt="2026-06-04T22:27:05.825" v="705" actId="255"/>
-          <ac:spMkLst>
-            <pc:docMk/>
-            <pc:sldMk cId="4282987760" sldId="266"/>
-            <ac:spMk id="16" creationId="{EB1D685A-6E6D-2C5C-DD96-2253ED263342}"/>
-          </ac:spMkLst>
-        </pc:spChg>
-        <pc:spChg chg="add mod">
-          <ac:chgData name="Kun Suo" userId="41c30799-3a2b-4880-86a3-8488be07954a" providerId="ADAL" clId="{01B90814-4EBE-5562-8795-CE1E7277191D}" dt="2026-06-04T22:27:05.825" v="705" actId="255"/>
-          <ac:spMkLst>
-            <pc:docMk/>
-            <pc:sldMk cId="4282987760" sldId="266"/>
-            <ac:spMk id="17" creationId="{AD3DF5FE-8D47-F02C-78A7-61279AA3E004}"/>
-          </ac:spMkLst>
-        </pc:spChg>
-        <pc:spChg chg="del">
-          <ac:chgData name="Kun Suo" userId="41c30799-3a2b-4880-86a3-8488be07954a" providerId="ADAL" clId="{01B90814-4EBE-5562-8795-CE1E7277191D}" dt="2026-06-04T22:24:57.472" v="676" actId="478"/>
-          <ac:spMkLst>
-            <pc:docMk/>
-            <pc:sldMk cId="4282987760" sldId="266"/>
-            <ac:spMk id="18" creationId="{5AB90CA8-CEDE-C9BB-09A7-0D2671AE8351}"/>
-          </ac:spMkLst>
-        </pc:spChg>
-        <pc:spChg chg="del">
-          <ac:chgData name="Kun Suo" userId="41c30799-3a2b-4880-86a3-8488be07954a" providerId="ADAL" clId="{01B90814-4EBE-5562-8795-CE1E7277191D}" dt="2026-06-04T22:24:57.472" v="676" actId="478"/>
-          <ac:spMkLst>
-            <pc:docMk/>
-            <pc:sldMk cId="4282987760" sldId="266"/>
-            <ac:spMk id="20" creationId="{247ED914-E8DC-9C36-8F12-2C58EFF48B39}"/>
-          </ac:spMkLst>
-        </pc:spChg>
-        <pc:spChg chg="add mod">
           <ac:chgData name="Kun Suo" userId="41c30799-3a2b-4880-86a3-8488be07954a" providerId="ADAL" clId="{01B90814-4EBE-5562-8795-CE1E7277191D}" dt="2026-06-04T22:28:01.511" v="719" actId="20577"/>
           <ac:spMkLst>
             <pc:docMk/>
@@ -1522,52 +756,60 @@
             <ac:spMk id="21" creationId="{4498BE56-E55C-467A-75AC-63F3E97FB985}"/>
           </ac:spMkLst>
         </pc:spChg>
-        <pc:picChg chg="del">
-          <ac:chgData name="Kun Suo" userId="41c30799-3a2b-4880-86a3-8488be07954a" providerId="ADAL" clId="{01B90814-4EBE-5562-8795-CE1E7277191D}" dt="2026-06-04T22:24:57.472" v="676" actId="478"/>
-          <ac:picMkLst>
+        <pc:grpChg chg="del mod">
+          <ac:chgData name="Kun Suo" userId="41c30799-3a2b-4880-86a3-8488be07954a" providerId="ADAL" clId="{01B90814-4EBE-5562-8795-CE1E7277191D}" dt="2026-06-12T15:18:47.863" v="1372"/>
+          <ac:grpSpMkLst>
             <pc:docMk/>
             <pc:sldMk cId="4282987760" sldId="266"/>
-            <ac:picMk id="4" creationId="{05315247-23B5-02CF-C6E5-5BFBF89595CA}"/>
-          </ac:picMkLst>
-        </pc:picChg>
-        <pc:picChg chg="del">
-          <ac:chgData name="Kun Suo" userId="41c30799-3a2b-4880-86a3-8488be07954a" providerId="ADAL" clId="{01B90814-4EBE-5562-8795-CE1E7277191D}" dt="2026-06-04T22:24:57.472" v="676" actId="478"/>
-          <ac:picMkLst>
+            <ac:grpSpMk id="7" creationId="{99A16D55-55A9-3AD2-5520-180D6660D672}"/>
+          </ac:grpSpMkLst>
+        </pc:grpChg>
+        <pc:grpChg chg="del mod">
+          <ac:chgData name="Kun Suo" userId="41c30799-3a2b-4880-86a3-8488be07954a" providerId="ADAL" clId="{01B90814-4EBE-5562-8795-CE1E7277191D}" dt="2026-06-12T15:18:52.443" v="1374"/>
+          <ac:grpSpMkLst>
             <pc:docMk/>
             <pc:sldMk cId="4282987760" sldId="266"/>
-            <ac:picMk id="7" creationId="{51B73D26-6BB4-C192-0BC2-CD68E28A0768}"/>
-          </ac:picMkLst>
-        </pc:picChg>
-        <pc:picChg chg="del">
-          <ac:chgData name="Kun Suo" userId="41c30799-3a2b-4880-86a3-8488be07954a" providerId="ADAL" clId="{01B90814-4EBE-5562-8795-CE1E7277191D}" dt="2026-06-04T22:24:57.472" v="676" actId="478"/>
-          <ac:picMkLst>
+            <ac:grpSpMk id="8" creationId="{30C4D58E-25EC-8031-AADD-659991790D0B}"/>
+          </ac:grpSpMkLst>
+        </pc:grpChg>
+        <pc:grpChg chg="del mod">
+          <ac:chgData name="Kun Suo" userId="41c30799-3a2b-4880-86a3-8488be07954a" providerId="ADAL" clId="{01B90814-4EBE-5562-8795-CE1E7277191D}" dt="2026-06-12T15:18:52.443" v="1374"/>
+          <ac:grpSpMkLst>
             <pc:docMk/>
             <pc:sldMk cId="4282987760" sldId="266"/>
-            <ac:picMk id="8" creationId="{9769C805-953E-EDF5-1239-03288F1EA2C2}"/>
-          </ac:picMkLst>
-        </pc:picChg>
-        <pc:picChg chg="del">
-          <ac:chgData name="Kun Suo" userId="41c30799-3a2b-4880-86a3-8488be07954a" providerId="ADAL" clId="{01B90814-4EBE-5562-8795-CE1E7277191D}" dt="2026-06-04T22:24:57.472" v="676" actId="478"/>
-          <ac:picMkLst>
+            <ac:grpSpMk id="13" creationId="{12330AA9-CDC6-C7FB-DAB1-4FEF72509F81}"/>
+          </ac:grpSpMkLst>
+        </pc:grpChg>
+        <pc:grpChg chg="del mod">
+          <ac:chgData name="Kun Suo" userId="41c30799-3a2b-4880-86a3-8488be07954a" providerId="ADAL" clId="{01B90814-4EBE-5562-8795-CE1E7277191D}" dt="2026-06-12T15:19:05.867" v="1382"/>
+          <ac:grpSpMkLst>
             <pc:docMk/>
             <pc:sldMk cId="4282987760" sldId="266"/>
-            <ac:picMk id="15" creationId="{D685BB62-810E-DC8C-6993-C0AEEA7E5DAC}"/>
-          </ac:picMkLst>
-        </pc:picChg>
+            <ac:grpSpMk id="14" creationId="{0F401AA6-7278-C44F-D2B8-2DDA8EFECBFA}"/>
+          </ac:grpSpMkLst>
+        </pc:grpChg>
+        <pc:grpChg chg="del mod">
+          <ac:chgData name="Kun Suo" userId="41c30799-3a2b-4880-86a3-8488be07954a" providerId="ADAL" clId="{01B90814-4EBE-5562-8795-CE1E7277191D}" dt="2026-06-12T15:19:01.144" v="1378"/>
+          <ac:grpSpMkLst>
+            <pc:docMk/>
+            <pc:sldMk cId="4282987760" sldId="266"/>
+            <ac:grpSpMk id="18" creationId="{04E86645-6FEC-143A-9B6B-8A2CB0882AE6}"/>
+          </ac:grpSpMkLst>
+        </pc:grpChg>
+        <pc:grpChg chg="del mod">
+          <ac:chgData name="Kun Suo" userId="41c30799-3a2b-4880-86a3-8488be07954a" providerId="ADAL" clId="{01B90814-4EBE-5562-8795-CE1E7277191D}" dt="2026-06-12T15:19:05.866" v="1380"/>
+          <ac:grpSpMkLst>
+            <pc:docMk/>
+            <pc:sldMk cId="4282987760" sldId="266"/>
+            <ac:grpSpMk id="20" creationId="{C49C987E-27E7-6848-2EFD-F6B9103FE073}"/>
+          </ac:grpSpMkLst>
+        </pc:grpChg>
         <pc:picChg chg="add mod">
           <ac:chgData name="Kun Suo" userId="41c30799-3a2b-4880-86a3-8488be07954a" providerId="ADAL" clId="{01B90814-4EBE-5562-8795-CE1E7277191D}" dt="2026-06-04T22:27:38.597" v="712" actId="1035"/>
           <ac:picMkLst>
             <pc:docMk/>
             <pc:sldMk cId="4282987760" sldId="266"/>
             <ac:picMk id="19" creationId="{EA433F59-3A02-8A1E-1877-B5A33D9A89EE}"/>
-          </ac:picMkLst>
-        </pc:picChg>
-        <pc:picChg chg="add del mod">
-          <ac:chgData name="Kun Suo" userId="41c30799-3a2b-4880-86a3-8488be07954a" providerId="ADAL" clId="{01B90814-4EBE-5562-8795-CE1E7277191D}" dt="2026-06-04T22:27:34.122" v="709" actId="478"/>
-          <ac:picMkLst>
-            <pc:docMk/>
-            <pc:sldMk cId="4282987760" sldId="266"/>
-            <ac:picMk id="22" creationId="{D7AA77F8-99CD-9808-C0BA-9CA7844AE7AC}"/>
           </ac:picMkLst>
         </pc:picChg>
         <pc:picChg chg="add mod">
@@ -1578,9 +820,57 @@
             <ac:picMk id="23" creationId="{78017793-A995-9C13-E003-B129BACFB8DA}"/>
           </ac:picMkLst>
         </pc:picChg>
+        <pc:inkChg chg="add del mod">
+          <ac:chgData name="Kun Suo" userId="41c30799-3a2b-4880-86a3-8488be07954a" providerId="ADAL" clId="{01B90814-4EBE-5562-8795-CE1E7277191D}" dt="2026-06-12T15:19:05.866" v="1379"/>
+          <ac:inkMkLst>
+            <pc:docMk/>
+            <pc:sldMk cId="4282987760" sldId="266"/>
+            <ac:inkMk id="4" creationId="{1D5E89C3-2D4C-F6A7-9322-80431973DFAE}"/>
+          </ac:inkMkLst>
+        </pc:inkChg>
+        <pc:inkChg chg="add del mod">
+          <ac:chgData name="Kun Suo" userId="41c30799-3a2b-4880-86a3-8488be07954a" providerId="ADAL" clId="{01B90814-4EBE-5562-8795-CE1E7277191D}" dt="2026-06-12T15:19:05.867" v="1383"/>
+          <ac:inkMkLst>
+            <pc:docMk/>
+            <pc:sldMk cId="4282987760" sldId="266"/>
+            <ac:inkMk id="5" creationId="{F8534148-5B37-3934-5A01-82FCEBEDB593}"/>
+          </ac:inkMkLst>
+        </pc:inkChg>
+        <pc:inkChg chg="add del mod">
+          <ac:chgData name="Kun Suo" userId="41c30799-3a2b-4880-86a3-8488be07954a" providerId="ADAL" clId="{01B90814-4EBE-5562-8795-CE1E7277191D}" dt="2026-06-12T15:19:05.867" v="1382"/>
+          <ac:inkMkLst>
+            <pc:docMk/>
+            <pc:sldMk cId="4282987760" sldId="266"/>
+            <ac:inkMk id="10" creationId="{BD882499-9691-2AC1-C753-53980364B722}"/>
+          </ac:inkMkLst>
+        </pc:inkChg>
+        <pc:inkChg chg="add del">
+          <ac:chgData name="Kun Suo" userId="41c30799-3a2b-4880-86a3-8488be07954a" providerId="ADAL" clId="{01B90814-4EBE-5562-8795-CE1E7277191D}" dt="2026-06-12T15:19:05.867" v="1381"/>
+          <ac:inkMkLst>
+            <pc:docMk/>
+            <pc:sldMk cId="4282987760" sldId="266"/>
+            <ac:inkMk id="15" creationId="{3C1EB63A-C09D-4C36-BDC8-D77F1B6BD981}"/>
+          </ac:inkMkLst>
+        </pc:inkChg>
+        <pc:inkChg chg="add del mod">
+          <ac:chgData name="Kun Suo" userId="41c30799-3a2b-4880-86a3-8488be07954a" providerId="ADAL" clId="{01B90814-4EBE-5562-8795-CE1E7277191D}" dt="2026-06-12T15:19:05.866" v="1380"/>
+          <ac:inkMkLst>
+            <pc:docMk/>
+            <pc:sldMk cId="4282987760" sldId="266"/>
+            <ac:inkMk id="16" creationId="{88CBAA67-1E8F-FF37-FAF4-12E47F3C1343}"/>
+          </ac:inkMkLst>
+        </pc:inkChg>
+        <pc:inkChg chg="add del mod">
+          <ac:chgData name="Kun Suo" userId="41c30799-3a2b-4880-86a3-8488be07954a" providerId="ADAL" clId="{01B90814-4EBE-5562-8795-CE1E7277191D}" dt="2026-06-12T15:19:05.868" v="1384"/>
+          <ac:inkMkLst>
+            <pc:docMk/>
+            <pc:sldMk cId="4282987760" sldId="266"/>
+            <ac:inkMk id="17" creationId="{EF71604B-A639-4966-6285-CA67AE406BF4}"/>
+          </ac:inkMkLst>
+        </pc:inkChg>
       </pc:sldChg>
       <pc:sldChg chg="addSp delSp modSp add mod">
-        <pc:chgData name="Kun Suo" userId="41c30799-3a2b-4880-86a3-8488be07954a" providerId="ADAL" clId="{01B90814-4EBE-5562-8795-CE1E7277191D}" dt="2026-06-04T22:19:29.216" v="669" actId="1076"/>
+        <pc:chgData name="Kun Suo" userId="41c30799-3a2b-4880-86a3-8488be07954a" providerId="ADAL" clId="{01B90814-4EBE-5562-8795-CE1E7277191D}" dt="2026-06-12T15:23:22.686" v="1394"/>
         <pc:sldMkLst>
           <pc:docMk/>
           <pc:sldMk cId="228590867" sldId="267"/>
@@ -1601,14 +891,6 @@
             <ac:spMk id="5" creationId="{DFCA85E8-749F-F68B-5DBF-D66BF64D515B}"/>
           </ac:spMkLst>
         </pc:spChg>
-        <pc:spChg chg="add del mod">
-          <ac:chgData name="Kun Suo" userId="41c30799-3a2b-4880-86a3-8488be07954a" providerId="ADAL" clId="{01B90814-4EBE-5562-8795-CE1E7277191D}" dt="2026-06-04T22:12:35.951" v="642"/>
-          <ac:spMkLst>
-            <pc:docMk/>
-            <pc:sldMk cId="228590867" sldId="267"/>
-            <ac:spMk id="7" creationId="{403C7C02-3E29-9BF8-282A-C8844B60AB46}"/>
-          </ac:spMkLst>
-        </pc:spChg>
         <pc:spChg chg="add mod">
           <ac:chgData name="Kun Suo" userId="41c30799-3a2b-4880-86a3-8488be07954a" providerId="ADAL" clId="{01B90814-4EBE-5562-8795-CE1E7277191D}" dt="2026-06-04T22:13:03.562" v="666" actId="1076"/>
           <ac:spMkLst>
@@ -1617,6 +899,38 @@
             <ac:spMk id="9" creationId="{EB2EC227-8D78-62D5-0314-CC53CE131501}"/>
           </ac:spMkLst>
         </pc:spChg>
+        <pc:grpChg chg="del mod">
+          <ac:chgData name="Kun Suo" userId="41c30799-3a2b-4880-86a3-8488be07954a" providerId="ADAL" clId="{01B90814-4EBE-5562-8795-CE1E7277191D}" dt="2026-06-12T15:23:07.796" v="1387"/>
+          <ac:grpSpMkLst>
+            <pc:docMk/>
+            <pc:sldMk cId="228590867" sldId="267"/>
+            <ac:grpSpMk id="10" creationId="{BED72CD7-8044-299A-80F5-3A766478A9A9}"/>
+          </ac:grpSpMkLst>
+        </pc:grpChg>
+        <pc:grpChg chg="del mod">
+          <ac:chgData name="Kun Suo" userId="41c30799-3a2b-4880-86a3-8488be07954a" providerId="ADAL" clId="{01B90814-4EBE-5562-8795-CE1E7277191D}" dt="2026-06-12T15:23:14.806" v="1390"/>
+          <ac:grpSpMkLst>
+            <pc:docMk/>
+            <pc:sldMk cId="228590867" sldId="267"/>
+            <ac:grpSpMk id="11" creationId="{A57B751B-CECA-98D0-CED6-6794E3457A8D}"/>
+          </ac:grpSpMkLst>
+        </pc:grpChg>
+        <pc:grpChg chg="del mod">
+          <ac:chgData name="Kun Suo" userId="41c30799-3a2b-4880-86a3-8488be07954a" providerId="ADAL" clId="{01B90814-4EBE-5562-8795-CE1E7277191D}" dt="2026-06-12T15:23:14.806" v="1390"/>
+          <ac:grpSpMkLst>
+            <pc:docMk/>
+            <pc:sldMk cId="228590867" sldId="267"/>
+            <ac:grpSpMk id="14" creationId="{38FB001E-92DF-22D9-E70A-A052C73F932B}"/>
+          </ac:grpSpMkLst>
+        </pc:grpChg>
+        <pc:grpChg chg="del mod">
+          <ac:chgData name="Kun Suo" userId="41c30799-3a2b-4880-86a3-8488be07954a" providerId="ADAL" clId="{01B90814-4EBE-5562-8795-CE1E7277191D}" dt="2026-06-12T15:23:22.686" v="1393"/>
+          <ac:grpSpMkLst>
+            <pc:docMk/>
+            <pc:sldMk cId="228590867" sldId="267"/>
+            <ac:grpSpMk id="15" creationId="{BC3B40A3-8688-ED58-D022-D00CF4CAF1A0}"/>
+          </ac:grpSpMkLst>
+        </pc:grpChg>
         <pc:picChg chg="add mod">
           <ac:chgData name="Kun Suo" userId="41c30799-3a2b-4880-86a3-8488be07954a" providerId="ADAL" clId="{01B90814-4EBE-5562-8795-CE1E7277191D}" dt="2026-06-04T22:12:14.588" v="638" actId="1076"/>
           <ac:picMkLst>
@@ -1633,6 +947,38 @@
             <ac:picMk id="3074" creationId="{68E99A68-28C2-659E-4C45-9C1D4532D60A}"/>
           </ac:picMkLst>
         </pc:picChg>
+        <pc:inkChg chg="add del mod">
+          <ac:chgData name="Kun Suo" userId="41c30799-3a2b-4880-86a3-8488be07954a" providerId="ADAL" clId="{01B90814-4EBE-5562-8795-CE1E7277191D}" dt="2026-06-12T15:23:22.684" v="1391"/>
+          <ac:inkMkLst>
+            <pc:docMk/>
+            <pc:sldMk cId="228590867" sldId="267"/>
+            <ac:inkMk id="7" creationId="{1FB19768-9FC6-B350-AB7B-FB6EC4ADB876}"/>
+          </ac:inkMkLst>
+        </pc:inkChg>
+        <pc:inkChg chg="add del mod">
+          <ac:chgData name="Kun Suo" userId="41c30799-3a2b-4880-86a3-8488be07954a" providerId="ADAL" clId="{01B90814-4EBE-5562-8795-CE1E7277191D}" dt="2026-06-12T15:23:22.686" v="1393"/>
+          <ac:inkMkLst>
+            <pc:docMk/>
+            <pc:sldMk cId="228590867" sldId="267"/>
+            <ac:inkMk id="8" creationId="{63BBD9EE-1C32-E1AD-8B9A-037CC39EE89F}"/>
+          </ac:inkMkLst>
+        </pc:inkChg>
+        <pc:inkChg chg="add del mod">
+          <ac:chgData name="Kun Suo" userId="41c30799-3a2b-4880-86a3-8488be07954a" providerId="ADAL" clId="{01B90814-4EBE-5562-8795-CE1E7277191D}" dt="2026-06-12T15:23:22.686" v="1394"/>
+          <ac:inkMkLst>
+            <pc:docMk/>
+            <pc:sldMk cId="228590867" sldId="267"/>
+            <ac:inkMk id="12" creationId="{30C35469-0EAC-B10F-D04A-E3AA52A89D59}"/>
+          </ac:inkMkLst>
+        </pc:inkChg>
+        <pc:inkChg chg="add del mod">
+          <ac:chgData name="Kun Suo" userId="41c30799-3a2b-4880-86a3-8488be07954a" providerId="ADAL" clId="{01B90814-4EBE-5562-8795-CE1E7277191D}" dt="2026-06-12T15:23:22.685" v="1392"/>
+          <ac:inkMkLst>
+            <pc:docMk/>
+            <pc:sldMk cId="228590867" sldId="267"/>
+            <ac:inkMk id="13" creationId="{DEC31F81-FDB7-7396-ECFA-BBD1DE8DBEC1}"/>
+          </ac:inkMkLst>
+        </pc:inkChg>
       </pc:sldChg>
       <pc:sldChg chg="addSp delSp modSp add mod">
         <pc:chgData name="Kun Suo" userId="41c30799-3a2b-4880-86a3-8488be07954a" providerId="ADAL" clId="{01B90814-4EBE-5562-8795-CE1E7277191D}" dt="2026-06-05T02:26:07.812" v="959" actId="1076"/>
@@ -1670,14 +1016,6 @@
             <pc:docMk/>
             <pc:sldMk cId="2240075495" sldId="268"/>
             <ac:spMk id="11" creationId="{C2B0EB33-8F6F-5DDC-1E5C-F991BEA3D8DF}"/>
-          </ac:spMkLst>
-        </pc:spChg>
-        <pc:spChg chg="add mod">
-          <ac:chgData name="Kun Suo" userId="41c30799-3a2b-4880-86a3-8488be07954a" providerId="ADAL" clId="{01B90814-4EBE-5562-8795-CE1E7277191D}" dt="2026-06-05T02:21:38.498" v="882"/>
-          <ac:spMkLst>
-            <pc:docMk/>
-            <pc:sldMk cId="2240075495" sldId="268"/>
-            <ac:spMk id="12" creationId="{9CD71A6C-9950-852E-CD50-ABDAA0272356}"/>
           </ac:spMkLst>
         </pc:spChg>
         <pc:spChg chg="add mod">
@@ -1736,17 +1074,9 @@
             <ac:picMk id="7" creationId="{431F557A-5129-1BE8-7561-B80C4F47A5A8}"/>
           </ac:picMkLst>
         </pc:picChg>
-        <pc:picChg chg="del">
-          <ac:chgData name="Kun Suo" userId="41c30799-3a2b-4880-86a3-8488be07954a" providerId="ADAL" clId="{01B90814-4EBE-5562-8795-CE1E7277191D}" dt="2026-06-05T02:20:35.203" v="865" actId="478"/>
-          <ac:picMkLst>
-            <pc:docMk/>
-            <pc:sldMk cId="2240075495" sldId="268"/>
-            <ac:picMk id="8" creationId="{A55D2A56-C0E6-4C7D-637A-C9AE9D942554}"/>
-          </ac:picMkLst>
-        </pc:picChg>
       </pc:sldChg>
       <pc:sldChg chg="addSp delSp modSp add mod">
-        <pc:chgData name="Kun Suo" userId="41c30799-3a2b-4880-86a3-8488be07954a" providerId="ADAL" clId="{01B90814-4EBE-5562-8795-CE1E7277191D}" dt="2026-06-05T02:35:14.865" v="1059" actId="1076"/>
+        <pc:chgData name="Kun Suo" userId="41c30799-3a2b-4880-86a3-8488be07954a" providerId="ADAL" clId="{01B90814-4EBE-5562-8795-CE1E7277191D}" dt="2026-06-12T15:56:47.824" v="1443" actId="20577"/>
         <pc:sldMkLst>
           <pc:docMk/>
           <pc:sldMk cId="3328247933" sldId="269"/>
@@ -1759,16 +1089,8 @@
             <ac:spMk id="3" creationId="{F8F84971-8A9C-D67D-D26E-3B90D5BCE8F9}"/>
           </ac:spMkLst>
         </pc:spChg>
-        <pc:spChg chg="del">
-          <ac:chgData name="Kun Suo" userId="41c30799-3a2b-4880-86a3-8488be07954a" providerId="ADAL" clId="{01B90814-4EBE-5562-8795-CE1E7277191D}" dt="2026-06-05T02:32:55.458" v="1017" actId="478"/>
-          <ac:spMkLst>
-            <pc:docMk/>
-            <pc:sldMk cId="3328247933" sldId="269"/>
-            <ac:spMk id="5" creationId="{A5985340-26E8-8005-346F-A5C63DCDF3D0}"/>
-          </ac:spMkLst>
-        </pc:spChg>
         <pc:spChg chg="add mod">
-          <ac:chgData name="Kun Suo" userId="41c30799-3a2b-4880-86a3-8488be07954a" providerId="ADAL" clId="{01B90814-4EBE-5562-8795-CE1E7277191D}" dt="2026-06-05T02:35:14.865" v="1059" actId="1076"/>
+          <ac:chgData name="Kun Suo" userId="41c30799-3a2b-4880-86a3-8488be07954a" providerId="ADAL" clId="{01B90814-4EBE-5562-8795-CE1E7277191D}" dt="2026-06-12T15:55:45.472" v="1439" actId="1076"/>
           <ac:spMkLst>
             <pc:docMk/>
             <pc:sldMk cId="3328247933" sldId="269"/>
@@ -1776,48 +1098,16 @@
           </ac:spMkLst>
         </pc:spChg>
         <pc:graphicFrameChg chg="add mod modGraphic">
-          <ac:chgData name="Kun Suo" userId="41c30799-3a2b-4880-86a3-8488be07954a" providerId="ADAL" clId="{01B90814-4EBE-5562-8795-CE1E7277191D}" dt="2026-06-05T02:34:28.860" v="1050" actId="20577"/>
+          <ac:chgData name="Kun Suo" userId="41c30799-3a2b-4880-86a3-8488be07954a" providerId="ADAL" clId="{01B90814-4EBE-5562-8795-CE1E7277191D}" dt="2026-06-12T15:56:47.824" v="1443" actId="20577"/>
           <ac:graphicFrameMkLst>
             <pc:docMk/>
             <pc:sldMk cId="3328247933" sldId="269"/>
             <ac:graphicFrameMk id="9" creationId="{5D078214-E98A-479E-C999-F130C06FDAE4}"/>
           </ac:graphicFrameMkLst>
         </pc:graphicFrameChg>
-        <pc:picChg chg="del">
-          <ac:chgData name="Kun Suo" userId="41c30799-3a2b-4880-86a3-8488be07954a" providerId="ADAL" clId="{01B90814-4EBE-5562-8795-CE1E7277191D}" dt="2026-06-05T02:32:55.458" v="1017" actId="478"/>
-          <ac:picMkLst>
-            <pc:docMk/>
-            <pc:sldMk cId="3328247933" sldId="269"/>
-            <ac:picMk id="4" creationId="{40D21EE8-E565-B913-DD6F-49F52C75E1F7}"/>
-          </ac:picMkLst>
-        </pc:picChg>
-        <pc:picChg chg="del">
-          <ac:chgData name="Kun Suo" userId="41c30799-3a2b-4880-86a3-8488be07954a" providerId="ADAL" clId="{01B90814-4EBE-5562-8795-CE1E7277191D}" dt="2026-06-05T02:32:55.458" v="1017" actId="478"/>
-          <ac:picMkLst>
-            <pc:docMk/>
-            <pc:sldMk cId="3328247933" sldId="269"/>
-            <ac:picMk id="6" creationId="{810D21BB-BAA1-7782-341A-25E49A59CD5E}"/>
-          </ac:picMkLst>
-        </pc:picChg>
-        <pc:picChg chg="del">
-          <ac:chgData name="Kun Suo" userId="41c30799-3a2b-4880-86a3-8488be07954a" providerId="ADAL" clId="{01B90814-4EBE-5562-8795-CE1E7277191D}" dt="2026-06-05T02:32:55.458" v="1017" actId="478"/>
-          <ac:picMkLst>
-            <pc:docMk/>
-            <pc:sldMk cId="3328247933" sldId="269"/>
-            <ac:picMk id="7" creationId="{2E051625-5D23-F443-D07C-A28039A7CEED}"/>
-          </ac:picMkLst>
-        </pc:picChg>
-        <pc:picChg chg="del">
-          <ac:chgData name="Kun Suo" userId="41c30799-3a2b-4880-86a3-8488be07954a" providerId="ADAL" clId="{01B90814-4EBE-5562-8795-CE1E7277191D}" dt="2026-06-05T02:32:55.458" v="1017" actId="478"/>
-          <ac:picMkLst>
-            <pc:docMk/>
-            <pc:sldMk cId="3328247933" sldId="269"/>
-            <ac:picMk id="8" creationId="{B93FA88A-D649-C3D7-7871-7051B1425EC2}"/>
-          </ac:picMkLst>
-        </pc:picChg>
       </pc:sldChg>
       <pc:sldChg chg="addSp delSp modSp add mod">
-        <pc:chgData name="Kun Suo" userId="41c30799-3a2b-4880-86a3-8488be07954a" providerId="ADAL" clId="{01B90814-4EBE-5562-8795-CE1E7277191D}" dt="2026-06-05T02:42:59.532" v="1137"/>
+        <pc:chgData name="Kun Suo" userId="41c30799-3a2b-4880-86a3-8488be07954a" providerId="ADAL" clId="{01B90814-4EBE-5562-8795-CE1E7277191D}" dt="2026-06-12T15:51:06.701" v="1415" actId="20577"/>
         <pc:sldMkLst>
           <pc:docMk/>
           <pc:sldMk cId="549327490" sldId="270"/>
@@ -1831,15 +1121,23 @@
           </ac:spMkLst>
         </pc:spChg>
         <pc:spChg chg="mod">
-          <ac:chgData name="Kun Suo" userId="41c30799-3a2b-4880-86a3-8488be07954a" providerId="ADAL" clId="{01B90814-4EBE-5562-8795-CE1E7277191D}" dt="2026-06-05T02:42:59.532" v="1137"/>
+          <ac:chgData name="Kun Suo" userId="41c30799-3a2b-4880-86a3-8488be07954a" providerId="ADAL" clId="{01B90814-4EBE-5562-8795-CE1E7277191D}" dt="2026-06-12T15:51:06.701" v="1415" actId="20577"/>
           <ac:spMkLst>
             <pc:docMk/>
             <pc:sldMk cId="549327490" sldId="270"/>
             <ac:spMk id="5" creationId="{FC806B46-BCBF-ECFB-7AA4-0ED81C8B77A2}"/>
           </ac:spMkLst>
         </pc:spChg>
+        <pc:spChg chg="add del mod">
+          <ac:chgData name="Kun Suo" userId="41c30799-3a2b-4880-86a3-8488be07954a" providerId="ADAL" clId="{01B90814-4EBE-5562-8795-CE1E7277191D}" dt="2026-06-12T15:50:23.137" v="1412"/>
+          <ac:spMkLst>
+            <pc:docMk/>
+            <pc:sldMk cId="549327490" sldId="270"/>
+            <ac:spMk id="8" creationId="{94F501AF-31DB-E004-AB0E-CD22C821B188}"/>
+          </ac:spMkLst>
+        </pc:spChg>
         <pc:spChg chg="add mod">
-          <ac:chgData name="Kun Suo" userId="41c30799-3a2b-4880-86a3-8488be07954a" providerId="ADAL" clId="{01B90814-4EBE-5562-8795-CE1E7277191D}" dt="2026-06-05T02:38:24.212" v="1089" actId="1037"/>
+          <ac:chgData name="Kun Suo" userId="41c30799-3a2b-4880-86a3-8488be07954a" providerId="ADAL" clId="{01B90814-4EBE-5562-8795-CE1E7277191D}" dt="2026-06-12T15:50:09.408" v="1405" actId="1036"/>
           <ac:spMkLst>
             <pc:docMk/>
             <pc:sldMk cId="549327490" sldId="270"/>
@@ -1847,7 +1145,7 @@
           </ac:spMkLst>
         </pc:spChg>
         <pc:spChg chg="add mod">
-          <ac:chgData name="Kun Suo" userId="41c30799-3a2b-4880-86a3-8488be07954a" providerId="ADAL" clId="{01B90814-4EBE-5562-8795-CE1E7277191D}" dt="2026-06-05T02:38:24.212" v="1089" actId="1037"/>
+          <ac:chgData name="Kun Suo" userId="41c30799-3a2b-4880-86a3-8488be07954a" providerId="ADAL" clId="{01B90814-4EBE-5562-8795-CE1E7277191D}" dt="2026-06-12T15:50:09.408" v="1405" actId="1036"/>
           <ac:spMkLst>
             <pc:docMk/>
             <pc:sldMk cId="549327490" sldId="270"/>
@@ -1855,7 +1153,7 @@
           </ac:spMkLst>
         </pc:spChg>
         <pc:spChg chg="add mod">
-          <ac:chgData name="Kun Suo" userId="41c30799-3a2b-4880-86a3-8488be07954a" providerId="ADAL" clId="{01B90814-4EBE-5562-8795-CE1E7277191D}" dt="2026-06-05T02:38:24.212" v="1089" actId="1037"/>
+          <ac:chgData name="Kun Suo" userId="41c30799-3a2b-4880-86a3-8488be07954a" providerId="ADAL" clId="{01B90814-4EBE-5562-8795-CE1E7277191D}" dt="2026-06-12T15:50:09.408" v="1405" actId="1036"/>
           <ac:spMkLst>
             <pc:docMk/>
             <pc:sldMk cId="549327490" sldId="270"/>
@@ -1863,7 +1161,7 @@
           </ac:spMkLst>
         </pc:spChg>
         <pc:spChg chg="add mod">
-          <ac:chgData name="Kun Suo" userId="41c30799-3a2b-4880-86a3-8488be07954a" providerId="ADAL" clId="{01B90814-4EBE-5562-8795-CE1E7277191D}" dt="2026-06-05T02:39:28.022" v="1103" actId="1076"/>
+          <ac:chgData name="Kun Suo" userId="41c30799-3a2b-4880-86a3-8488be07954a" providerId="ADAL" clId="{01B90814-4EBE-5562-8795-CE1E7277191D}" dt="2026-06-12T15:50:09.408" v="1405" actId="1036"/>
           <ac:spMkLst>
             <pc:docMk/>
             <pc:sldMk cId="549327490" sldId="270"/>
@@ -1871,7 +1169,7 @@
           </ac:spMkLst>
         </pc:spChg>
         <pc:spChg chg="add mod">
-          <ac:chgData name="Kun Suo" userId="41c30799-3a2b-4880-86a3-8488be07954a" providerId="ADAL" clId="{01B90814-4EBE-5562-8795-CE1E7277191D}" dt="2026-06-05T02:39:28.022" v="1103" actId="1076"/>
+          <ac:chgData name="Kun Suo" userId="41c30799-3a2b-4880-86a3-8488be07954a" providerId="ADAL" clId="{01B90814-4EBE-5562-8795-CE1E7277191D}" dt="2026-06-12T15:50:09.408" v="1405" actId="1036"/>
           <ac:spMkLst>
             <pc:docMk/>
             <pc:sldMk cId="549327490" sldId="270"/>
@@ -1879,7 +1177,7 @@
           </ac:spMkLst>
         </pc:spChg>
         <pc:spChg chg="add mod">
-          <ac:chgData name="Kun Suo" userId="41c30799-3a2b-4880-86a3-8488be07954a" providerId="ADAL" clId="{01B90814-4EBE-5562-8795-CE1E7277191D}" dt="2026-06-05T02:39:17.748" v="1100" actId="1076"/>
+          <ac:chgData name="Kun Suo" userId="41c30799-3a2b-4880-86a3-8488be07954a" providerId="ADAL" clId="{01B90814-4EBE-5562-8795-CE1E7277191D}" dt="2026-06-12T15:50:09.408" v="1405" actId="1036"/>
           <ac:spMkLst>
             <pc:docMk/>
             <pc:sldMk cId="549327490" sldId="270"/>
@@ -1887,7 +1185,7 @@
           </ac:spMkLst>
         </pc:spChg>
         <pc:spChg chg="add mod">
-          <ac:chgData name="Kun Suo" userId="41c30799-3a2b-4880-86a3-8488be07954a" providerId="ADAL" clId="{01B90814-4EBE-5562-8795-CE1E7277191D}" dt="2026-06-05T02:39:33.301" v="1104"/>
+          <ac:chgData name="Kun Suo" userId="41c30799-3a2b-4880-86a3-8488be07954a" providerId="ADAL" clId="{01B90814-4EBE-5562-8795-CE1E7277191D}" dt="2026-06-12T15:50:09.408" v="1405" actId="1036"/>
           <ac:spMkLst>
             <pc:docMk/>
             <pc:sldMk cId="549327490" sldId="270"/>
@@ -1895,7 +1193,7 @@
           </ac:spMkLst>
         </pc:spChg>
         <pc:spChg chg="add mod">
-          <ac:chgData name="Kun Suo" userId="41c30799-3a2b-4880-86a3-8488be07954a" providerId="ADAL" clId="{01B90814-4EBE-5562-8795-CE1E7277191D}" dt="2026-06-05T02:39:23.844" v="1102" actId="1076"/>
+          <ac:chgData name="Kun Suo" userId="41c30799-3a2b-4880-86a3-8488be07954a" providerId="ADAL" clId="{01B90814-4EBE-5562-8795-CE1E7277191D}" dt="2026-06-12T15:50:09.408" v="1405" actId="1036"/>
           <ac:spMkLst>
             <pc:docMk/>
             <pc:sldMk cId="549327490" sldId="270"/>
@@ -1903,7 +1201,7 @@
           </ac:spMkLst>
         </pc:spChg>
         <pc:spChg chg="add mod">
-          <ac:chgData name="Kun Suo" userId="41c30799-3a2b-4880-86a3-8488be07954a" providerId="ADAL" clId="{01B90814-4EBE-5562-8795-CE1E7277191D}" dt="2026-06-05T02:39:40.379" v="1105"/>
+          <ac:chgData name="Kun Suo" userId="41c30799-3a2b-4880-86a3-8488be07954a" providerId="ADAL" clId="{01B90814-4EBE-5562-8795-CE1E7277191D}" dt="2026-06-12T15:50:09.408" v="1405" actId="1036"/>
           <ac:spMkLst>
             <pc:docMk/>
             <pc:sldMk cId="549327490" sldId="270"/>
@@ -1918,12 +1216,12 @@
             <ac:picMk id="4" creationId="{32A0FD9B-654F-73C9-EBAD-87217A9F9F6C}"/>
           </ac:picMkLst>
         </pc:picChg>
-        <pc:picChg chg="del">
-          <ac:chgData name="Kun Suo" userId="41c30799-3a2b-4880-86a3-8488be07954a" providerId="ADAL" clId="{01B90814-4EBE-5562-8795-CE1E7277191D}" dt="2026-06-05T02:37:02.120" v="1064" actId="478"/>
+        <pc:picChg chg="add mod">
+          <ac:chgData name="Kun Suo" userId="41c30799-3a2b-4880-86a3-8488be07954a" providerId="ADAL" clId="{01B90814-4EBE-5562-8795-CE1E7277191D}" dt="2026-06-12T15:50:20.238" v="1410" actId="1076"/>
           <ac:picMkLst>
             <pc:docMk/>
             <pc:sldMk cId="549327490" sldId="270"/>
-            <ac:picMk id="6" creationId="{7CC49005-210A-63CC-02B8-AEF0B215E307}"/>
+            <ac:picMk id="6" creationId="{0EF2430F-2878-BDC8-4C63-3FDC6D5E01F2}"/>
           </ac:picMkLst>
         </pc:picChg>
         <pc:picChg chg="mod">
@@ -1932,14 +1230,6 @@
             <pc:docMk/>
             <pc:sldMk cId="549327490" sldId="270"/>
             <ac:picMk id="7" creationId="{9FBC982F-F7BF-CE0A-E484-E09F51CBFEB0}"/>
-          </ac:picMkLst>
-        </pc:picChg>
-        <pc:picChg chg="del">
-          <ac:chgData name="Kun Suo" userId="41c30799-3a2b-4880-86a3-8488be07954a" providerId="ADAL" clId="{01B90814-4EBE-5562-8795-CE1E7277191D}" dt="2026-06-05T02:37:22.888" v="1071" actId="478"/>
-          <ac:picMkLst>
-            <pc:docMk/>
-            <pc:sldMk cId="549327490" sldId="270"/>
-            <ac:picMk id="8" creationId="{BF72C6D4-5134-044E-435C-F5B4776CE126}"/>
           </ac:picMkLst>
         </pc:picChg>
       </pc:sldChg>
@@ -2005,33 +1295,9 @@
             <ac:picMk id="4" creationId="{8655D16D-95DB-4A68-1AF3-0D8574648607}"/>
           </ac:picMkLst>
         </pc:picChg>
-        <pc:picChg chg="del">
-          <ac:chgData name="Kun Suo" userId="41c30799-3a2b-4880-86a3-8488be07954a" providerId="ADAL" clId="{01B90814-4EBE-5562-8795-CE1E7277191D}" dt="2026-06-05T02:28:39.978" v="966" actId="478"/>
-          <ac:picMkLst>
-            <pc:docMk/>
-            <pc:sldMk cId="623897273" sldId="271"/>
-            <ac:picMk id="6" creationId="{18C5754B-9121-8ABE-CE4E-11730031A3FF}"/>
-          </ac:picMkLst>
-        </pc:picChg>
-        <pc:picChg chg="del">
-          <ac:chgData name="Kun Suo" userId="41c30799-3a2b-4880-86a3-8488be07954a" providerId="ADAL" clId="{01B90814-4EBE-5562-8795-CE1E7277191D}" dt="2026-06-05T02:28:51.121" v="972" actId="478"/>
-          <ac:picMkLst>
-            <pc:docMk/>
-            <pc:sldMk cId="623897273" sldId="271"/>
-            <ac:picMk id="7" creationId="{26E592AD-BCEF-DB96-1B5F-032DD10BD2AF}"/>
-          </ac:picMkLst>
-        </pc:picChg>
-        <pc:picChg chg="del">
-          <ac:chgData name="Kun Suo" userId="41c30799-3a2b-4880-86a3-8488be07954a" providerId="ADAL" clId="{01B90814-4EBE-5562-8795-CE1E7277191D}" dt="2026-06-05T02:28:51.121" v="972" actId="478"/>
-          <ac:picMkLst>
-            <pc:docMk/>
-            <pc:sldMk cId="623897273" sldId="271"/>
-            <ac:picMk id="8" creationId="{C5C5E587-961A-1DB0-F231-B648BCE9796F}"/>
-          </ac:picMkLst>
-        </pc:picChg>
       </pc:sldChg>
       <pc:sldChg chg="addSp delSp modSp add mod">
-        <pc:chgData name="Kun Suo" userId="41c30799-3a2b-4880-86a3-8488be07954a" providerId="ADAL" clId="{01B90814-4EBE-5562-8795-CE1E7277191D}" dt="2026-06-05T02:45:55.510" v="1173" actId="114"/>
+        <pc:chgData name="Kun Suo" userId="41c30799-3a2b-4880-86a3-8488be07954a" providerId="ADAL" clId="{01B90814-4EBE-5562-8795-CE1E7277191D}" dt="2026-06-12T15:52:04.285" v="1422" actId="1035"/>
         <pc:sldMkLst>
           <pc:docMk/>
           <pc:sldMk cId="503111776" sldId="272"/>
@@ -2045,31 +1311,15 @@
           </ac:spMkLst>
         </pc:spChg>
         <pc:spChg chg="mod">
-          <ac:chgData name="Kun Suo" userId="41c30799-3a2b-4880-86a3-8488be07954a" providerId="ADAL" clId="{01B90814-4EBE-5562-8795-CE1E7277191D}" dt="2026-06-05T02:42:38.703" v="1136" actId="14100"/>
+          <ac:chgData name="Kun Suo" userId="41c30799-3a2b-4880-86a3-8488be07954a" providerId="ADAL" clId="{01B90814-4EBE-5562-8795-CE1E7277191D}" dt="2026-06-12T15:51:54.752" v="1417" actId="20577"/>
           <ac:spMkLst>
             <pc:docMk/>
             <pc:sldMk cId="503111776" sldId="272"/>
             <ac:spMk id="5" creationId="{FD15EA18-ABA5-31AE-F8EB-E3BE665D48B9}"/>
           </ac:spMkLst>
         </pc:spChg>
-        <pc:spChg chg="add del mod">
-          <ac:chgData name="Kun Suo" userId="41c30799-3a2b-4880-86a3-8488be07954a" providerId="ADAL" clId="{01B90814-4EBE-5562-8795-CE1E7277191D}" dt="2026-06-05T02:42:23.507" v="1134"/>
-          <ac:spMkLst>
-            <pc:docMk/>
-            <pc:sldMk cId="503111776" sldId="272"/>
-            <ac:spMk id="10" creationId="{D9189A0E-A78B-9635-A0DE-2F43FA10E71C}"/>
-          </ac:spMkLst>
-        </pc:spChg>
         <pc:spChg chg="add mod">
-          <ac:chgData name="Kun Suo" userId="41c30799-3a2b-4880-86a3-8488be07954a" providerId="ADAL" clId="{01B90814-4EBE-5562-8795-CE1E7277191D}" dt="2026-06-05T02:43:12.146" v="1138"/>
-          <ac:spMkLst>
-            <pc:docMk/>
-            <pc:sldMk cId="503111776" sldId="272"/>
-            <ac:spMk id="11" creationId="{540FB7E4-6816-34F8-C1FA-6C9399821645}"/>
-          </ac:spMkLst>
-        </pc:spChg>
-        <pc:spChg chg="add mod">
-          <ac:chgData name="Kun Suo" userId="41c30799-3a2b-4880-86a3-8488be07954a" providerId="ADAL" clId="{01B90814-4EBE-5562-8795-CE1E7277191D}" dt="2026-06-05T02:45:00.803" v="1159" actId="1076"/>
+          <ac:chgData name="Kun Suo" userId="41c30799-3a2b-4880-86a3-8488be07954a" providerId="ADAL" clId="{01B90814-4EBE-5562-8795-CE1E7277191D}" dt="2026-06-12T15:51:58.910" v="1418" actId="1076"/>
           <ac:spMkLst>
             <pc:docMk/>
             <pc:sldMk cId="503111776" sldId="272"/>
@@ -2077,7 +1327,7 @@
           </ac:spMkLst>
         </pc:spChg>
         <pc:spChg chg="add mod">
-          <ac:chgData name="Kun Suo" userId="41c30799-3a2b-4880-86a3-8488be07954a" providerId="ADAL" clId="{01B90814-4EBE-5562-8795-CE1E7277191D}" dt="2026-06-05T02:45:00.803" v="1159" actId="1076"/>
+          <ac:chgData name="Kun Suo" userId="41c30799-3a2b-4880-86a3-8488be07954a" providerId="ADAL" clId="{01B90814-4EBE-5562-8795-CE1E7277191D}" dt="2026-06-12T15:51:58.910" v="1418" actId="1076"/>
           <ac:spMkLst>
             <pc:docMk/>
             <pc:sldMk cId="503111776" sldId="272"/>
@@ -2085,23 +1335,23 @@
           </ac:spMkLst>
         </pc:spChg>
         <pc:spChg chg="add mod">
-          <ac:chgData name="Kun Suo" userId="41c30799-3a2b-4880-86a3-8488be07954a" providerId="ADAL" clId="{01B90814-4EBE-5562-8795-CE1E7277191D}" dt="2026-06-05T02:45:55.510" v="1173" actId="114"/>
+          <ac:chgData name="Kun Suo" userId="41c30799-3a2b-4880-86a3-8488be07954a" providerId="ADAL" clId="{01B90814-4EBE-5562-8795-CE1E7277191D}" dt="2026-06-12T15:51:58.910" v="1418" actId="1076"/>
           <ac:spMkLst>
             <pc:docMk/>
             <pc:sldMk cId="503111776" sldId="272"/>
             <ac:spMk id="14" creationId="{9C5D8018-E227-A45E-979A-967AC67A3D77}"/>
           </ac:spMkLst>
         </pc:spChg>
-        <pc:picChg chg="del">
-          <ac:chgData name="Kun Suo" userId="41c30799-3a2b-4880-86a3-8488be07954a" providerId="ADAL" clId="{01B90814-4EBE-5562-8795-CE1E7277191D}" dt="2026-06-05T02:41:31.006" v="1126" actId="478"/>
+        <pc:picChg chg="mod">
+          <ac:chgData name="Kun Suo" userId="41c30799-3a2b-4880-86a3-8488be07954a" providerId="ADAL" clId="{01B90814-4EBE-5562-8795-CE1E7277191D}" dt="2026-06-12T15:52:04.285" v="1422" actId="1035"/>
           <ac:picMkLst>
             <pc:docMk/>
             <pc:sldMk cId="503111776" sldId="272"/>
-            <ac:picMk id="6" creationId="{795A3255-79B9-89A8-9894-50B63224D1C1}"/>
+            <ac:picMk id="7" creationId="{4E12D409-FD92-7600-290E-F13620CF5311}"/>
           </ac:picMkLst>
         </pc:picChg>
         <pc:picChg chg="mod">
-          <ac:chgData name="Kun Suo" userId="41c30799-3a2b-4880-86a3-8488be07954a" providerId="ADAL" clId="{01B90814-4EBE-5562-8795-CE1E7277191D}" dt="2026-06-05T02:42:18.725" v="1130" actId="1076"/>
+          <ac:chgData name="Kun Suo" userId="41c30799-3a2b-4880-86a3-8488be07954a" providerId="ADAL" clId="{01B90814-4EBE-5562-8795-CE1E7277191D}" dt="2026-06-12T15:52:04.285" v="1422" actId="1035"/>
           <ac:picMkLst>
             <pc:docMk/>
             <pc:sldMk cId="503111776" sldId="272"/>
@@ -2109,7 +1359,7 @@
           </ac:picMkLst>
         </pc:picChg>
         <pc:picChg chg="add mod">
-          <ac:chgData name="Kun Suo" userId="41c30799-3a2b-4880-86a3-8488be07954a" providerId="ADAL" clId="{01B90814-4EBE-5562-8795-CE1E7277191D}" dt="2026-06-05T02:42:26.887" v="1135" actId="1076"/>
+          <ac:chgData name="Kun Suo" userId="41c30799-3a2b-4880-86a3-8488be07954a" providerId="ADAL" clId="{01B90814-4EBE-5562-8795-CE1E7277191D}" dt="2026-06-12T15:52:04.285" v="1422" actId="1035"/>
           <ac:picMkLst>
             <pc:docMk/>
             <pc:sldMk cId="503111776" sldId="272"/>
@@ -2179,25 +1429,9 @@
             <ac:spMk id="13" creationId="{3131DD64-6F18-04DF-9C88-92C68AD86B97}"/>
           </ac:spMkLst>
         </pc:spChg>
-        <pc:picChg chg="del">
-          <ac:chgData name="Kun Suo" userId="41c30799-3a2b-4880-86a3-8488be07954a" providerId="ADAL" clId="{01B90814-4EBE-5562-8795-CE1E7277191D}" dt="2026-06-05T02:47:35.698" v="1180" actId="478"/>
-          <ac:picMkLst>
-            <pc:docMk/>
-            <pc:sldMk cId="1973776024" sldId="273"/>
-            <ac:picMk id="6" creationId="{00DCB29B-AD36-A578-D772-9AA57D090B90}"/>
-          </ac:picMkLst>
-        </pc:picChg>
-        <pc:picChg chg="del">
-          <ac:chgData name="Kun Suo" userId="41c30799-3a2b-4880-86a3-8488be07954a" providerId="ADAL" clId="{01B90814-4EBE-5562-8795-CE1E7277191D}" dt="2026-06-05T02:48:10.474" v="1186" actId="478"/>
-          <ac:picMkLst>
-            <pc:docMk/>
-            <pc:sldMk cId="1973776024" sldId="273"/>
-            <ac:picMk id="8" creationId="{D52989E9-AC1E-80EE-93E5-77776D383C6F}"/>
-          </ac:picMkLst>
-        </pc:picChg>
       </pc:sldChg>
       <pc:sldChg chg="addSp delSp modSp add mod">
-        <pc:chgData name="Kun Suo" userId="41c30799-3a2b-4880-86a3-8488be07954a" providerId="ADAL" clId="{01B90814-4EBE-5562-8795-CE1E7277191D}" dt="2026-06-05T02:58:57.602" v="1264"/>
+        <pc:chgData name="Kun Suo" userId="41c30799-3a2b-4880-86a3-8488be07954a" providerId="ADAL" clId="{01B90814-4EBE-5562-8795-CE1E7277191D}" dt="2026-06-12T16:14:36.966" v="1469" actId="1076"/>
         <pc:sldMkLst>
           <pc:docMk/>
           <pc:sldMk cId="3426632272" sldId="274"/>
@@ -2266,6 +1500,14 @@
             <ac:spMk id="14" creationId="{573E9402-CDF7-E767-61B6-62484689D143}"/>
           </ac:spMkLst>
         </pc:spChg>
+        <pc:spChg chg="add mod">
+          <ac:chgData name="Kun Suo" userId="41c30799-3a2b-4880-86a3-8488be07954a" providerId="ADAL" clId="{01B90814-4EBE-5562-8795-CE1E7277191D}" dt="2026-06-12T16:12:20.661" v="1466" actId="1076"/>
+          <ac:spMkLst>
+            <pc:docMk/>
+            <pc:sldMk cId="3426632272" sldId="274"/>
+            <ac:spMk id="15" creationId="{FC88A944-5C71-1EE4-045A-E6C7A888B4A7}"/>
+          </ac:spMkLst>
+        </pc:spChg>
         <pc:picChg chg="mod">
           <ac:chgData name="Kun Suo" userId="41c30799-3a2b-4880-86a3-8488be07954a" providerId="ADAL" clId="{01B90814-4EBE-5562-8795-CE1E7277191D}" dt="2026-06-05T02:52:01.884" v="1217" actId="1035"/>
           <ac:picMkLst>
@@ -2274,20 +1516,12 @@
             <ac:picMk id="4" creationId="{C01D83E9-010C-D3C5-D29A-4FC8073EE79F}"/>
           </ac:picMkLst>
         </pc:picChg>
-        <pc:picChg chg="del">
-          <ac:chgData name="Kun Suo" userId="41c30799-3a2b-4880-86a3-8488be07954a" providerId="ADAL" clId="{01B90814-4EBE-5562-8795-CE1E7277191D}" dt="2026-06-05T02:52:16.891" v="1220" actId="478"/>
+        <pc:picChg chg="add mod">
+          <ac:chgData name="Kun Suo" userId="41c30799-3a2b-4880-86a3-8488be07954a" providerId="ADAL" clId="{01B90814-4EBE-5562-8795-CE1E7277191D}" dt="2026-06-12T16:14:36.966" v="1469" actId="1076"/>
           <ac:picMkLst>
             <pc:docMk/>
             <pc:sldMk cId="3426632272" sldId="274"/>
-            <ac:picMk id="6" creationId="{7896F080-8442-A317-10A7-11048B5FC41F}"/>
-          </ac:picMkLst>
-        </pc:picChg>
-        <pc:picChg chg="del">
-          <ac:chgData name="Kun Suo" userId="41c30799-3a2b-4880-86a3-8488be07954a" providerId="ADAL" clId="{01B90814-4EBE-5562-8795-CE1E7277191D}" dt="2026-06-05T02:52:16.891" v="1220" actId="478"/>
-          <ac:picMkLst>
-            <pc:docMk/>
-            <pc:sldMk cId="3426632272" sldId="274"/>
-            <ac:picMk id="7" creationId="{205FBAA7-9144-50F2-0BD3-C45F56C4D5F8}"/>
+            <ac:picMk id="6" creationId="{E723B6C5-821D-5164-161D-2E0BBFF787BD}"/>
           </ac:picMkLst>
         </pc:picChg>
         <pc:picChg chg="mod">
@@ -2313,14 +1547,6 @@
             <ac:spMk id="3" creationId="{AC63398E-BB0F-0E5A-FDA8-8EEE58B07883}"/>
           </ac:spMkLst>
         </pc:spChg>
-        <pc:spChg chg="del">
-          <ac:chgData name="Kun Suo" userId="41c30799-3a2b-4880-86a3-8488be07954a" providerId="ADAL" clId="{01B90814-4EBE-5562-8795-CE1E7277191D}" dt="2026-06-05T03:01:05.883" v="1272" actId="478"/>
-          <ac:spMkLst>
-            <pc:docMk/>
-            <pc:sldMk cId="3749832535" sldId="275"/>
-            <ac:spMk id="5" creationId="{8BACB60C-F161-BD7D-0179-2157D095BCD6}"/>
-          </ac:spMkLst>
-        </pc:spChg>
         <pc:spChg chg="add mod">
           <ac:chgData name="Kun Suo" userId="41c30799-3a2b-4880-86a3-8488be07954a" providerId="ADAL" clId="{01B90814-4EBE-5562-8795-CE1E7277191D}" dt="2026-06-05T03:03:15.164" v="1323" actId="14100"/>
           <ac:spMkLst>
@@ -2337,42 +1563,94 @@
             <ac:graphicFrameMk id="9" creationId="{CDC5D14A-A006-BE88-A56F-CCFA18D6ECC2}"/>
           </ac:graphicFrameMkLst>
         </pc:graphicFrameChg>
-        <pc:picChg chg="del">
-          <ac:chgData name="Kun Suo" userId="41c30799-3a2b-4880-86a3-8488be07954a" providerId="ADAL" clId="{01B90814-4EBE-5562-8795-CE1E7277191D}" dt="2026-06-05T03:01:05.883" v="1272" actId="478"/>
-          <ac:picMkLst>
-            <pc:docMk/>
-            <pc:sldMk cId="3749832535" sldId="275"/>
-            <ac:picMk id="4" creationId="{D7B2F9AF-38E1-D060-47A5-D3FB40AF82E5}"/>
-          </ac:picMkLst>
-        </pc:picChg>
-        <pc:picChg chg="del">
-          <ac:chgData name="Kun Suo" userId="41c30799-3a2b-4880-86a3-8488be07954a" providerId="ADAL" clId="{01B90814-4EBE-5562-8795-CE1E7277191D}" dt="2026-06-05T03:01:05.883" v="1272" actId="478"/>
-          <ac:picMkLst>
-            <pc:docMk/>
-            <pc:sldMk cId="3749832535" sldId="275"/>
-            <ac:picMk id="6" creationId="{B48031B7-E4C8-2FF8-03A8-91267EE11AC0}"/>
-          </ac:picMkLst>
-        </pc:picChg>
-        <pc:picChg chg="del">
-          <ac:chgData name="Kun Suo" userId="41c30799-3a2b-4880-86a3-8488be07954a" providerId="ADAL" clId="{01B90814-4EBE-5562-8795-CE1E7277191D}" dt="2026-06-05T03:01:05.883" v="1272" actId="478"/>
-          <ac:picMkLst>
-            <pc:docMk/>
-            <pc:sldMk cId="3749832535" sldId="275"/>
-            <ac:picMk id="7" creationId="{11A4915C-DB6E-8337-D179-194C4EEBF4F9}"/>
-          </ac:picMkLst>
-        </pc:picChg>
-        <pc:picChg chg="del">
-          <ac:chgData name="Kun Suo" userId="41c30799-3a2b-4880-86a3-8488be07954a" providerId="ADAL" clId="{01B90814-4EBE-5562-8795-CE1E7277191D}" dt="2026-06-05T03:01:05.883" v="1272" actId="478"/>
-          <ac:picMkLst>
-            <pc:docMk/>
-            <pc:sldMk cId="3749832535" sldId="275"/>
-            <ac:picMk id="8" creationId="{180BB637-D8D5-8604-DB1E-EB156060C201}"/>
-          </ac:picMkLst>
-        </pc:picChg>
       </pc:sldChg>
     </pc:docChg>
   </pc:docChgLst>
 </pc:chgInfo>
+</file>
+
+<file path=ppt/ink/ink1.xml><?xml version="1.0" encoding="utf-8"?>
+<inkml:ink xmlns:inkml="http://www.w3.org/2003/InkML">
+  <inkml:definitions>
+    <inkml:context xml:id="ctx0">
+      <inkml:inkSource xml:id="inkSrc0">
+        <inkml:traceFormat>
+          <inkml:channel name="X" type="integer" min="-2.14748E9" max="2.14748E9" units="cm"/>
+          <inkml:channel name="Y" type="integer" min="-2.14748E9" max="2.14748E9" units="cm"/>
+          <inkml:channel name="F" type="integer" max="32767" units="dev"/>
+        </inkml:traceFormat>
+        <inkml:channelProperties>
+          <inkml:channelProperty channel="X" name="resolution" value="1000" units="1/cm"/>
+          <inkml:channelProperty channel="Y" name="resolution" value="1000" units="1/cm"/>
+          <inkml:channelProperty channel="F" name="resolution" value="0" units="1/dev"/>
+        </inkml:channelProperties>
+      </inkml:inkSource>
+      <inkml:timestamp xml:id="ts0" timeString="2026-06-12T15:11:03.533"/>
+    </inkml:context>
+    <inkml:brush xml:id="br0">
+      <inkml:brushProperty name="width" value="0.025" units="cm"/>
+      <inkml:brushProperty name="height" value="0.025" units="cm"/>
+      <inkml:brushProperty name="color" value="#E71224"/>
+    </inkml:brush>
+  </inkml:definitions>
+  <inkml:trace contextRef="#ctx0" brushRef="#br0">1 5 24575,'0'-2'0,"0"0"0</inkml:trace>
+</inkml:ink>
+</file>
+
+<file path=ppt/ink/ink2.xml><?xml version="1.0" encoding="utf-8"?>
+<inkml:ink xmlns:inkml="http://www.w3.org/2003/InkML">
+  <inkml:definitions>
+    <inkml:context xml:id="ctx0">
+      <inkml:inkSource xml:id="inkSrc0">
+        <inkml:traceFormat>
+          <inkml:channel name="X" type="integer" min="-2.14748E9" max="2.14748E9" units="cm"/>
+          <inkml:channel name="Y" type="integer" min="-2.14748E9" max="2.14748E9" units="cm"/>
+          <inkml:channel name="F" type="integer" max="32767" units="dev"/>
+        </inkml:traceFormat>
+        <inkml:channelProperties>
+          <inkml:channelProperty channel="X" name="resolution" value="1000" units="1/cm"/>
+          <inkml:channelProperty channel="Y" name="resolution" value="1000" units="1/cm"/>
+          <inkml:channelProperty channel="F" name="resolution" value="0" units="1/dev"/>
+        </inkml:channelProperties>
+      </inkml:inkSource>
+      <inkml:timestamp xml:id="ts0" timeString="2026-06-12T15:11:33.999"/>
+    </inkml:context>
+    <inkml:brush xml:id="br0">
+      <inkml:brushProperty name="width" value="0.025" units="cm"/>
+      <inkml:brushProperty name="height" value="0.025" units="cm"/>
+      <inkml:brushProperty name="color" value="#33CCFF"/>
+    </inkml:brush>
+  </inkml:definitions>
+  <inkml:trace contextRef="#ctx0" brushRef="#br0">1 5 24575,'0'-2'0,"0"0"0</inkml:trace>
+</inkml:ink>
+</file>
+
+<file path=ppt/ink/ink3.xml><?xml version="1.0" encoding="utf-8"?>
+<inkml:ink xmlns:inkml="http://www.w3.org/2003/InkML">
+  <inkml:definitions>
+    <inkml:context xml:id="ctx0">
+      <inkml:inkSource xml:id="inkSrc0">
+        <inkml:traceFormat>
+          <inkml:channel name="X" type="integer" min="-2.14748E9" max="2.14748E9" units="cm"/>
+          <inkml:channel name="Y" type="integer" min="-2.14748E9" max="2.14748E9" units="cm"/>
+          <inkml:channel name="F" type="integer" max="32767" units="dev"/>
+        </inkml:traceFormat>
+        <inkml:channelProperties>
+          <inkml:channelProperty channel="X" name="resolution" value="1000" units="1/cm"/>
+          <inkml:channelProperty channel="Y" name="resolution" value="1000" units="1/cm"/>
+          <inkml:channelProperty channel="F" name="resolution" value="0" units="1/dev"/>
+        </inkml:channelProperties>
+      </inkml:inkSource>
+      <inkml:timestamp xml:id="ts0" timeString="2026-06-12T15:11:34.495"/>
+    </inkml:context>
+    <inkml:brush xml:id="br0">
+      <inkml:brushProperty name="width" value="0.025" units="cm"/>
+      <inkml:brushProperty name="height" value="0.025" units="cm"/>
+      <inkml:brushProperty name="color" value="#33CCFF"/>
+    </inkml:brush>
+  </inkml:definitions>
+  <inkml:trace contextRef="#ctx0" brushRef="#br0">0 0 24575,'0'0'0</inkml:trace>
+</inkml:ink>
 </file>
 
 <file path=ppt/notesMasters/notesMaster1.xml><?xml version="1.0" encoding="utf-8"?>
@@ -2457,7 +1735,7 @@
           <a:p>
             <a:fld id="{275434A6-721E-8B46-8226-4B207A2DE40C}" type="datetimeFigureOut">
               <a:rPr lang="en-US" smtClean="0"/>
-              <a:t>6/4/26</a:t>
+              <a:t>6/12/26</a:t>
             </a:fld>
             <a:endParaRPr lang="en-US"/>
           </a:p>
@@ -2769,8 +2047,55 @@
           <a:lstStyle/>
           <a:p>
             <a:r>
+              <a:rPr lang="en-US" sz="1200" b="0" i="0" u="none" strike="noStrike" kern="1200" dirty="0">
+                <a:solidFill>
+                  <a:schemeClr val="tx1"/>
+                </a:solidFill>
+                <a:effectLst/>
+                <a:latin typeface="+mn-lt"/>
+                <a:ea typeface="+mn-ea"/>
+                <a:cs typeface="+mn-cs"/>
+              </a:rPr>
+              <a:t>square brackets</a:t>
+            </a:r>
+            <a:r>
+              <a:rPr lang="zh-CN" altLang="en-US" sz="1200" b="0" i="0" u="none" strike="noStrike" kern="1200" dirty="0">
+                <a:solidFill>
+                  <a:schemeClr val="tx1"/>
+                </a:solidFill>
+                <a:effectLst/>
+                <a:latin typeface="+mn-lt"/>
+                <a:ea typeface="+mn-ea"/>
+                <a:cs typeface="+mn-cs"/>
+              </a:rPr>
+              <a:t> </a:t>
+            </a:r>
+            <a:r>
               <a:rPr lang="zh-CN" altLang="en-US" dirty="0"/>
-              <a:t>公理语义学</a:t>
+              <a:t>方括号</a:t>
+            </a:r>
+            <a:endParaRPr lang="en-US" dirty="0"/>
+          </a:p>
+          <a:p>
+            <a:r>
+              <a:rPr lang="en-US" dirty="0"/>
+              <a:t>curly brackets</a:t>
+            </a:r>
+            <a:r>
+              <a:rPr lang="zh-CN" altLang="en-US" dirty="0"/>
+              <a:t> </a:t>
+            </a:r>
+            <a:r>
+              <a:rPr lang="en-US" sz="1200" b="0" i="0" u="none" strike="noStrike" kern="1200" dirty="0" err="1">
+                <a:solidFill>
+                  <a:schemeClr val="tx1"/>
+                </a:solidFill>
+                <a:effectLst/>
+                <a:latin typeface="+mn-lt"/>
+                <a:ea typeface="+mn-ea"/>
+                <a:cs typeface="+mn-cs"/>
+              </a:rPr>
+              <a:t>花括号</a:t>
             </a:r>
             <a:endParaRPr lang="en-US" dirty="0"/>
           </a:p>
@@ -2793,7 +2118,7 @@
           <a:p>
             <a:fld id="{FC1473EE-AF0F-8541-A3FA-B715EDFA03B2}" type="slidenum">
               <a:rPr lang="en-US" smtClean="0"/>
-              <a:t>18</a:t>
+              <a:t>12</a:t>
             </a:fld>
             <a:endParaRPr lang="en-US"/>
           </a:p>
@@ -2802,7 +2127,7 @@
     </p:spTree>
     <p:extLst>
       <p:ext uri="{BB962C8B-B14F-4D97-AF65-F5344CB8AC3E}">
-        <p14:creationId xmlns:p14="http://schemas.microsoft.com/office/powerpoint/2010/main" val="758658917"/>
+        <p14:creationId xmlns:p14="http://schemas.microsoft.com/office/powerpoint/2010/main" val="1555884239"/>
       </p:ext>
     </p:extLst>
   </p:cSld>
@@ -2840,6 +2165,204 @@
           </p:nvPr>
         </p:nvSpPr>
         <p:spPr/>
+      </p:sp>
+      <p:sp>
+        <p:nvSpPr>
+          <p:cNvPr id="3" name="Notes Placeholder 2"/>
+          <p:cNvSpPr>
+            <a:spLocks noGrp="1"/>
+          </p:cNvSpPr>
+          <p:nvPr>
+            <p:ph type="body" idx="1"/>
+          </p:nvPr>
+        </p:nvSpPr>
+        <p:spPr/>
+        <p:txBody>
+          <a:bodyPr/>
+          <a:lstStyle/>
+          <a:p>
+            <a:r>
+              <a:rPr lang="en-US" sz="1200" b="0" i="0" u="none" strike="noStrike" kern="1200" dirty="0" err="1">
+                <a:solidFill>
+                  <a:schemeClr val="tx1"/>
+                </a:solidFill>
+                <a:effectLst/>
+                <a:latin typeface="+mn-lt"/>
+                <a:ea typeface="+mn-ea"/>
+                <a:cs typeface="+mn-cs"/>
+              </a:rPr>
+              <a:t>属性语法</a:t>
+            </a:r>
+            <a:endParaRPr lang="en-US" dirty="0"/>
+          </a:p>
+        </p:txBody>
+      </p:sp>
+      <p:sp>
+        <p:nvSpPr>
+          <p:cNvPr id="4" name="Slide Number Placeholder 3"/>
+          <p:cNvSpPr>
+            <a:spLocks noGrp="1"/>
+          </p:cNvSpPr>
+          <p:nvPr>
+            <p:ph type="sldNum" sz="quarter" idx="5"/>
+          </p:nvPr>
+        </p:nvSpPr>
+        <p:spPr/>
+        <p:txBody>
+          <a:bodyPr/>
+          <a:lstStyle/>
+          <a:p>
+            <a:fld id="{FC1473EE-AF0F-8541-A3FA-B715EDFA03B2}" type="slidenum">
+              <a:rPr lang="en-US" smtClean="0"/>
+              <a:t>14</a:t>
+            </a:fld>
+            <a:endParaRPr lang="en-US"/>
+          </a:p>
+        </p:txBody>
+      </p:sp>
+    </p:spTree>
+    <p:extLst>
+      <p:ext uri="{BB962C8B-B14F-4D97-AF65-F5344CB8AC3E}">
+        <p14:creationId xmlns:p14="http://schemas.microsoft.com/office/powerpoint/2010/main" val="3387951377"/>
+      </p:ext>
+    </p:extLst>
+  </p:cSld>
+  <p:clrMapOvr>
+    <a:masterClrMapping/>
+  </p:clrMapOvr>
+</p:notes>
+</file>
+
+<file path=ppt/notesSlides/notesSlide3.xml><?xml version="1.0" encoding="utf-8"?>
+<p:notes xmlns:a="http://schemas.openxmlformats.org/drawingml/2006/main" xmlns:r="http://schemas.openxmlformats.org/officeDocument/2006/relationships" xmlns:p="http://schemas.openxmlformats.org/presentationml/2006/main">
+  <p:cSld>
+    <p:spTree>
+      <p:nvGrpSpPr>
+        <p:cNvPr id="1" name=""/>
+        <p:cNvGrpSpPr/>
+        <p:nvPr/>
+      </p:nvGrpSpPr>
+      <p:grpSpPr>
+        <a:xfrm>
+          <a:off x="0" y="0"/>
+          <a:ext cx="0" cy="0"/>
+          <a:chOff x="0" y="0"/>
+          <a:chExt cx="0" cy="0"/>
+        </a:xfrm>
+      </p:grpSpPr>
+      <p:sp>
+        <p:nvSpPr>
+          <p:cNvPr id="2" name="Slide Image Placeholder 1"/>
+          <p:cNvSpPr>
+            <a:spLocks noGrp="1" noRot="1" noChangeAspect="1"/>
+          </p:cNvSpPr>
+          <p:nvPr>
+            <p:ph type="sldImg"/>
+          </p:nvPr>
+        </p:nvSpPr>
+        <p:spPr/>
+        <p:txBody>
+          <a:bodyPr/>
+          <a:lstStyle/>
+          <a:p>
+            <a:endParaRPr lang="en-US"/>
+          </a:p>
+        </p:txBody>
+      </p:sp>
+      <p:sp>
+        <p:nvSpPr>
+          <p:cNvPr id="3" name="Notes Placeholder 2"/>
+          <p:cNvSpPr>
+            <a:spLocks noGrp="1"/>
+          </p:cNvSpPr>
+          <p:nvPr>
+            <p:ph type="body" idx="1"/>
+          </p:nvPr>
+        </p:nvSpPr>
+        <p:spPr/>
+        <p:txBody>
+          <a:bodyPr/>
+          <a:lstStyle/>
+          <a:p>
+            <a:r>
+              <a:rPr lang="zh-CN" altLang="en-US" dirty="0"/>
+              <a:t>公理语义学</a:t>
+            </a:r>
+            <a:endParaRPr lang="en-US" dirty="0"/>
+          </a:p>
+        </p:txBody>
+      </p:sp>
+      <p:sp>
+        <p:nvSpPr>
+          <p:cNvPr id="4" name="Slide Number Placeholder 3"/>
+          <p:cNvSpPr>
+            <a:spLocks noGrp="1"/>
+          </p:cNvSpPr>
+          <p:nvPr>
+            <p:ph type="sldNum" sz="quarter" idx="5"/>
+          </p:nvPr>
+        </p:nvSpPr>
+        <p:spPr/>
+        <p:txBody>
+          <a:bodyPr/>
+          <a:lstStyle/>
+          <a:p>
+            <a:fld id="{FC1473EE-AF0F-8541-A3FA-B715EDFA03B2}" type="slidenum">
+              <a:rPr lang="en-US" smtClean="0"/>
+              <a:t>18</a:t>
+            </a:fld>
+            <a:endParaRPr lang="en-US"/>
+          </a:p>
+        </p:txBody>
+      </p:sp>
+    </p:spTree>
+    <p:extLst>
+      <p:ext uri="{BB962C8B-B14F-4D97-AF65-F5344CB8AC3E}">
+        <p14:creationId xmlns:p14="http://schemas.microsoft.com/office/powerpoint/2010/main" val="758658917"/>
+      </p:ext>
+    </p:extLst>
+  </p:cSld>
+  <p:clrMapOvr>
+    <a:masterClrMapping/>
+  </p:clrMapOvr>
+</p:notes>
+</file>
+
+<file path=ppt/notesSlides/notesSlide4.xml><?xml version="1.0" encoding="utf-8"?>
+<p:notes xmlns:a="http://schemas.openxmlformats.org/drawingml/2006/main" xmlns:r="http://schemas.openxmlformats.org/officeDocument/2006/relationships" xmlns:p="http://schemas.openxmlformats.org/presentationml/2006/main">
+  <p:cSld>
+    <p:spTree>
+      <p:nvGrpSpPr>
+        <p:cNvPr id="1" name=""/>
+        <p:cNvGrpSpPr/>
+        <p:nvPr/>
+      </p:nvGrpSpPr>
+      <p:grpSpPr>
+        <a:xfrm>
+          <a:off x="0" y="0"/>
+          <a:ext cx="0" cy="0"/>
+          <a:chOff x="0" y="0"/>
+          <a:chExt cx="0" cy="0"/>
+        </a:xfrm>
+      </p:grpSpPr>
+      <p:sp>
+        <p:nvSpPr>
+          <p:cNvPr id="2" name="Slide Image Placeholder 1"/>
+          <p:cNvSpPr>
+            <a:spLocks noGrp="1" noRot="1" noChangeAspect="1"/>
+          </p:cNvSpPr>
+          <p:nvPr>
+            <p:ph type="sldImg"/>
+          </p:nvPr>
+        </p:nvSpPr>
+        <p:spPr/>
+        <p:txBody>
+          <a:bodyPr/>
+          <a:lstStyle/>
+          <a:p>
+            <a:endParaRPr lang="en-US"/>
+          </a:p>
+        </p:txBody>
       </p:sp>
       <p:sp>
         <p:nvSpPr>
@@ -6477,17 +6000,14 @@
                 </a:solidFill>
                 <a:latin typeface="Courier New" panose="02070309020205020404" pitchFamily="49" charset="0"/>
               </a:rPr>
-              <a:t>&lt;</a:t>
-            </a:r>
-            <a:r>
-              <a:rPr lang="en-US" altLang="en-US" sz="900" dirty="0" err="1">
-                <a:solidFill>
-                  <a:schemeClr val="bg1"/>
-                </a:solidFill>
-                <a:latin typeface="Courier New" panose="02070309020205020404" pitchFamily="49" charset="0"/>
-              </a:rPr>
-              <a:t>if_stmt</a:t>
-            </a:r>
+              <a:t>&lt;if_stmt&gt; → if (&lt;logic_expr&gt;) &lt;stmt&gt;</a:t>
+            </a:r>
+          </a:p>
+          <a:p>
+            <a:pPr algn="l" eaLnBrk="1" hangingPunct="1">
+              <a:buFontTx/>
+              <a:buNone/>
+            </a:pPr>
             <a:r>
               <a:rPr lang="en-US" altLang="en-US" sz="900" dirty="0">
                 <a:solidFill>
@@ -6495,112 +6015,7 @@
                 </a:solidFill>
                 <a:latin typeface="Courier New" panose="02070309020205020404" pitchFamily="49" charset="0"/>
               </a:rPr>
-              <a:t>&gt; → if (&lt;</a:t>
-            </a:r>
-            <a:r>
-              <a:rPr lang="en-US" altLang="en-US" sz="900" dirty="0" err="1">
-                <a:solidFill>
-                  <a:schemeClr val="bg1"/>
-                </a:solidFill>
-                <a:latin typeface="Courier New" panose="02070309020205020404" pitchFamily="49" charset="0"/>
-              </a:rPr>
-              <a:t>logic_expr</a:t>
-            </a:r>
-            <a:r>
-              <a:rPr lang="en-US" altLang="en-US" sz="900" dirty="0">
-                <a:solidFill>
-                  <a:schemeClr val="bg1"/>
-                </a:solidFill>
-                <a:latin typeface="Courier New" panose="02070309020205020404" pitchFamily="49" charset="0"/>
-              </a:rPr>
-              <a:t>&gt;) &lt;</a:t>
-            </a:r>
-            <a:r>
-              <a:rPr lang="en-US" altLang="en-US" sz="900" dirty="0" err="1">
-                <a:solidFill>
-                  <a:schemeClr val="bg1"/>
-                </a:solidFill>
-                <a:latin typeface="Courier New" panose="02070309020205020404" pitchFamily="49" charset="0"/>
-              </a:rPr>
-              <a:t>stmt</a:t>
-            </a:r>
-            <a:r>
-              <a:rPr lang="en-US" altLang="en-US" sz="900" dirty="0">
-                <a:solidFill>
-                  <a:schemeClr val="bg1"/>
-                </a:solidFill>
-                <a:latin typeface="Courier New" panose="02070309020205020404" pitchFamily="49" charset="0"/>
-              </a:rPr>
-              <a:t>&gt;</a:t>
-            </a:r>
-          </a:p>
-          <a:p>
-            <a:pPr algn="l" eaLnBrk="1" hangingPunct="1">
-              <a:buFontTx/>
-              <a:buNone/>
-            </a:pPr>
-            <a:r>
-              <a:rPr lang="en-US" altLang="en-US" sz="900" dirty="0">
-                <a:solidFill>
-                  <a:schemeClr val="bg1"/>
-                </a:solidFill>
-                <a:latin typeface="Courier New" panose="02070309020205020404" pitchFamily="49" charset="0"/>
-              </a:rPr>
-              <a:t>          | if (&lt;</a:t>
-            </a:r>
-            <a:r>
-              <a:rPr lang="en-US" altLang="en-US" sz="900" dirty="0" err="1">
-                <a:solidFill>
-                  <a:schemeClr val="bg1"/>
-                </a:solidFill>
-                <a:latin typeface="Courier New" panose="02070309020205020404" pitchFamily="49" charset="0"/>
-              </a:rPr>
-              <a:t>logic_expr</a:t>
-            </a:r>
-            <a:r>
-              <a:rPr lang="en-US" altLang="en-US" sz="900" dirty="0">
-                <a:solidFill>
-                  <a:schemeClr val="bg1"/>
-                </a:solidFill>
-                <a:latin typeface="Courier New" panose="02070309020205020404" pitchFamily="49" charset="0"/>
-              </a:rPr>
-              <a:t>&gt;) &lt;</a:t>
-            </a:r>
-            <a:r>
-              <a:rPr lang="en-US" altLang="en-US" sz="900" dirty="0" err="1">
-                <a:solidFill>
-                  <a:schemeClr val="bg1"/>
-                </a:solidFill>
-                <a:latin typeface="Courier New" panose="02070309020205020404" pitchFamily="49" charset="0"/>
-              </a:rPr>
-              <a:t>stmt</a:t>
-            </a:r>
-            <a:r>
-              <a:rPr lang="en-US" altLang="en-US" sz="900" dirty="0">
-                <a:solidFill>
-                  <a:schemeClr val="bg1"/>
-                </a:solidFill>
-                <a:latin typeface="Courier New" panose="02070309020205020404" pitchFamily="49" charset="0"/>
-              </a:rPr>
-              <a:t>&gt; else &lt;</a:t>
-            </a:r>
-            <a:r>
-              <a:rPr lang="en-US" altLang="en-US" sz="900" dirty="0" err="1">
-                <a:solidFill>
-                  <a:schemeClr val="bg1"/>
-                </a:solidFill>
-                <a:latin typeface="Courier New" panose="02070309020205020404" pitchFamily="49" charset="0"/>
-              </a:rPr>
-              <a:t>stmt</a:t>
-            </a:r>
-            <a:r>
-              <a:rPr lang="en-US" altLang="en-US" sz="900" dirty="0">
-                <a:solidFill>
-                  <a:schemeClr val="bg1"/>
-                </a:solidFill>
-                <a:latin typeface="Courier New" panose="02070309020205020404" pitchFamily="49" charset="0"/>
-              </a:rPr>
-              <a:t>&gt;</a:t>
+              <a:t>          | if (&lt;logic_expr&gt;) &lt;stmt&gt; else &lt;stmt&gt;</a:t>
             </a:r>
           </a:p>
         </p:txBody>
@@ -7641,7 +7056,7 @@
           <p:nvPr/>
         </p:nvPicPr>
         <p:blipFill>
-          <a:blip r:embed="rId2" cstate="print"/>
+          <a:blip r:embed="rId3" cstate="print"/>
           <a:stretch>
             <a:fillRect/>
           </a:stretch>
@@ -7887,12 +7302,12 @@
                         <a:buNone/>
                       </a:pPr>
                       <a:r>
-                        <a:rPr lang="en-US" sz="800">
+                        <a:rPr lang="en-US" sz="800" dirty="0">
                           <a:latin typeface="Courier New" panose="02070309020205020404" pitchFamily="49" charset="0"/>
                         </a:rPr>
                         <a:t>[ ]</a:t>
                       </a:r>
-                      <a:endParaRPr lang="en-US" sz="800"/>
+                      <a:endParaRPr lang="en-US" sz="800" dirty="0"/>
                     </a:p>
                   </a:txBody>
                   <a:tcPr anchor="ctr">
@@ -8120,12 +7535,12 @@
                         <a:buNone/>
                       </a:pPr>
                       <a:r>
-                        <a:rPr lang="en-US" sz="800">
+                        <a:rPr lang="en-US" sz="800" dirty="0">
                           <a:latin typeface="Courier New" panose="02070309020205020404" pitchFamily="49" charset="0"/>
                         </a:rPr>
                         <a:t>{ }</a:t>
                       </a:r>
-                      <a:endParaRPr lang="en-US" sz="800"/>
+                      <a:endParaRPr lang="en-US" sz="800" dirty="0"/>
                     </a:p>
                   </a:txBody>
                   <a:tcPr anchor="ctr">
@@ -9280,7 +8695,7 @@
           <p:nvPr/>
         </p:nvPicPr>
         <p:blipFill>
-          <a:blip r:embed="rId2" cstate="print"/>
+          <a:blip r:embed="rId3" cstate="print"/>
           <a:stretch>
             <a:fillRect/>
           </a:stretch>
@@ -9793,14 +9208,14 @@
           <p:nvPr>
             <p:extLst>
               <p:ext uri="{D42A27DB-BD31-4B8C-83A1-F6EECF244321}">
-                <p14:modId xmlns:p14="http://schemas.microsoft.com/office/powerpoint/2010/main" val="2335844806"/>
+                <p14:modId xmlns:p14="http://schemas.microsoft.com/office/powerpoint/2010/main" val="3925097539"/>
               </p:ext>
             </p:extLst>
           </p:nvPr>
         </p:nvGraphicFramePr>
         <p:xfrm>
-          <a:off x="247650" y="587375"/>
-          <a:ext cx="4114800" cy="1933901"/>
+          <a:off x="247650" y="587376"/>
+          <a:ext cx="4114799" cy="1714483"/>
         </p:xfrm>
         <a:graphic>
           <a:graphicData uri="http://schemas.openxmlformats.org/drawingml/2006/table">
@@ -9814,14 +9229,21 @@
                     </a:ext>
                   </a:extLst>
                 </a:gridCol>
-                <a:gridCol w="1600200">
+                <a:gridCol w="1219200">
                   <a:extLst>
                     <a:ext uri="{9D8B030D-6E8A-4147-A177-3AD203B41FA5}">
                       <a16:colId xmlns:a16="http://schemas.microsoft.com/office/drawing/2014/main" val="3154016264"/>
                     </a:ext>
                   </a:extLst>
                 </a:gridCol>
-                <a:gridCol w="1676400">
+                <a:gridCol w="1143000">
+                  <a:extLst>
+                    <a:ext uri="{9D8B030D-6E8A-4147-A177-3AD203B41FA5}">
+                      <a16:colId xmlns:a16="http://schemas.microsoft.com/office/drawing/2014/main" val="3147437387"/>
+                    </a:ext>
+                  </a:extLst>
+                </a:gridCol>
+                <a:gridCol w="914399">
                   <a:extLst>
                     <a:ext uri="{9D8B030D-6E8A-4147-A177-3AD203B41FA5}">
                       <a16:colId xmlns:a16="http://schemas.microsoft.com/office/drawing/2014/main" val="1027550231"/>
@@ -9829,7 +9251,7 @@
                   </a:extLst>
                 </a:gridCol>
               </a:tblGrid>
-              <a:tr h="208692">
+              <a:tr h="175578">
                 <a:tc>
                   <a:txBody>
                     <a:bodyPr/>
@@ -9963,6 +9385,64 @@
                       </a:pPr>
                       <a:r>
                         <a:rPr lang="en-US" sz="1050" b="1" dirty="0"/>
+                        <a:t>Focus</a:t>
+                      </a:r>
+                    </a:p>
+                  </a:txBody>
+                  <a:tcPr marL="52173" marR="52173" marT="26086" marB="26086" anchor="ctr">
+                    <a:lnL w="12700" cap="flat" cmpd="sng" algn="ctr">
+                      <a:solidFill>
+                        <a:schemeClr val="tx1"/>
+                      </a:solidFill>
+                      <a:prstDash val="solid"/>
+                      <a:round/>
+                      <a:headEnd type="none" w="med" len="med"/>
+                      <a:tailEnd type="none" w="med" len="med"/>
+                    </a:lnL>
+                    <a:lnR w="12700" cap="flat" cmpd="sng" algn="ctr">
+                      <a:solidFill>
+                        <a:schemeClr val="tx1"/>
+                      </a:solidFill>
+                      <a:prstDash val="solid"/>
+                      <a:round/>
+                      <a:headEnd type="none" w="med" len="med"/>
+                      <a:tailEnd type="none" w="med" len="med"/>
+                    </a:lnR>
+                    <a:lnT w="12700" cap="flat" cmpd="sng" algn="ctr">
+                      <a:solidFill>
+                        <a:schemeClr val="tx1"/>
+                      </a:solidFill>
+                      <a:prstDash val="solid"/>
+                      <a:round/>
+                      <a:headEnd type="none" w="med" len="med"/>
+                      <a:tailEnd type="none" w="med" len="med"/>
+                    </a:lnT>
+                    <a:lnB w="12700" cap="flat" cmpd="sng" algn="ctr">
+                      <a:solidFill>
+                        <a:schemeClr val="tx1"/>
+                      </a:solidFill>
+                      <a:prstDash val="solid"/>
+                      <a:round/>
+                      <a:headEnd type="none" w="med" len="med"/>
+                      <a:tailEnd type="none" w="med" len="med"/>
+                    </a:lnB>
+                    <a:solidFill>
+                      <a:schemeClr val="bg1">
+                        <a:lumMod val="75000"/>
+                      </a:schemeClr>
+                    </a:solidFill>
+                  </a:tcPr>
+                </a:tc>
+                <a:tc>
+                  <a:txBody>
+                    <a:bodyPr/>
+                    <a:lstStyle/>
+                    <a:p>
+                      <a:pPr>
+                        <a:buNone/>
+                      </a:pPr>
+                      <a:r>
+                        <a:rPr lang="en-US" sz="1050" b="1" dirty="0"/>
                         <a:t>Best use</a:t>
                       </a:r>
                     </a:p>
@@ -10017,7 +9497,7 @@
                   </a:ext>
                 </a:extLst>
               </a:tr>
-              <a:tr h="521730">
+              <a:tr h="431704">
                 <a:tc>
                   <a:txBody>
                     <a:bodyPr/>
@@ -10027,7 +9507,7 @@
                         <a:buNone/>
                       </a:pPr>
                       <a:r>
-                        <a:rPr lang="en-US" sz="1000"/>
+                        <a:rPr lang="en-US" sz="1000" dirty="0"/>
                         <a:t>Operational semantics</a:t>
                       </a:r>
                     </a:p>
@@ -10136,6 +9616,60 @@
                       </a:pPr>
                       <a:r>
                         <a:rPr lang="en-US" sz="1000" dirty="0"/>
+                        <a:t> How does it run?</a:t>
+                      </a:r>
+                    </a:p>
+                  </a:txBody>
+                  <a:tcPr marL="52173" marR="52173" marT="26086" marB="26086" anchor="ctr">
+                    <a:lnL w="12700" cap="flat" cmpd="sng" algn="ctr">
+                      <a:solidFill>
+                        <a:schemeClr val="tx1"/>
+                      </a:solidFill>
+                      <a:prstDash val="solid"/>
+                      <a:round/>
+                      <a:headEnd type="none" w="med" len="med"/>
+                      <a:tailEnd type="none" w="med" len="med"/>
+                    </a:lnL>
+                    <a:lnR w="12700" cap="flat" cmpd="sng" algn="ctr">
+                      <a:solidFill>
+                        <a:schemeClr val="tx1"/>
+                      </a:solidFill>
+                      <a:prstDash val="solid"/>
+                      <a:round/>
+                      <a:headEnd type="none" w="med" len="med"/>
+                      <a:tailEnd type="none" w="med" len="med"/>
+                    </a:lnR>
+                    <a:lnT w="12700" cap="flat" cmpd="sng" algn="ctr">
+                      <a:solidFill>
+                        <a:schemeClr val="tx1"/>
+                      </a:solidFill>
+                      <a:prstDash val="solid"/>
+                      <a:round/>
+                      <a:headEnd type="none" w="med" len="med"/>
+                      <a:tailEnd type="none" w="med" len="med"/>
+                    </a:lnT>
+                    <a:lnB w="12700" cap="flat" cmpd="sng" algn="ctr">
+                      <a:solidFill>
+                        <a:schemeClr val="tx1"/>
+                      </a:solidFill>
+                      <a:prstDash val="solid"/>
+                      <a:round/>
+                      <a:headEnd type="none" w="med" len="med"/>
+                      <a:tailEnd type="none" w="med" len="med"/>
+                    </a:lnB>
+                    <a:noFill/>
+                  </a:tcPr>
+                </a:tc>
+                <a:tc>
+                  <a:txBody>
+                    <a:bodyPr/>
+                    <a:lstStyle/>
+                    <a:p>
+                      <a:pPr>
+                        <a:buNone/>
+                      </a:pPr>
+                      <a:r>
+                        <a:rPr lang="en-US" sz="1000" dirty="0"/>
                         <a:t>teaching, manuals</a:t>
                       </a:r>
                     </a:p>
@@ -10186,7 +9720,7 @@
                   </a:ext>
                 </a:extLst>
               </a:tr>
-              <a:tr h="678249">
+              <a:tr h="561215">
                 <a:tc>
                   <a:txBody>
                     <a:bodyPr/>
@@ -10196,7 +9730,7 @@
                         <a:buNone/>
                       </a:pPr>
                       <a:r>
-                        <a:rPr lang="en-US" sz="1000"/>
+                        <a:rPr lang="en-US" sz="1000" dirty="0"/>
                         <a:t>Denotational semantics</a:t>
                       </a:r>
                     </a:p>
@@ -10305,6 +9839,60 @@
                       </a:pPr>
                       <a:r>
                         <a:rPr lang="en-US" sz="1000" dirty="0"/>
+                        <a:t>What does it mean?</a:t>
+                      </a:r>
+                    </a:p>
+                  </a:txBody>
+                  <a:tcPr marL="52173" marR="52173" marT="26086" marB="26086" anchor="ctr">
+                    <a:lnL w="12700" cap="flat" cmpd="sng" algn="ctr">
+                      <a:solidFill>
+                        <a:schemeClr val="tx1"/>
+                      </a:solidFill>
+                      <a:prstDash val="solid"/>
+                      <a:round/>
+                      <a:headEnd type="none" w="med" len="med"/>
+                      <a:tailEnd type="none" w="med" len="med"/>
+                    </a:lnL>
+                    <a:lnR w="12700" cap="flat" cmpd="sng" algn="ctr">
+                      <a:solidFill>
+                        <a:schemeClr val="tx1"/>
+                      </a:solidFill>
+                      <a:prstDash val="solid"/>
+                      <a:round/>
+                      <a:headEnd type="none" w="med" len="med"/>
+                      <a:tailEnd type="none" w="med" len="med"/>
+                    </a:lnR>
+                    <a:lnT w="12700" cap="flat" cmpd="sng" algn="ctr">
+                      <a:solidFill>
+                        <a:schemeClr val="tx1"/>
+                      </a:solidFill>
+                      <a:prstDash val="solid"/>
+                      <a:round/>
+                      <a:headEnd type="none" w="med" len="med"/>
+                      <a:tailEnd type="none" w="med" len="med"/>
+                    </a:lnT>
+                    <a:lnB w="12700" cap="flat" cmpd="sng" algn="ctr">
+                      <a:solidFill>
+                        <a:schemeClr val="tx1"/>
+                      </a:solidFill>
+                      <a:prstDash val="solid"/>
+                      <a:round/>
+                      <a:headEnd type="none" w="med" len="med"/>
+                      <a:tailEnd type="none" w="med" len="med"/>
+                    </a:lnB>
+                    <a:noFill/>
+                  </a:tcPr>
+                </a:tc>
+                <a:tc>
+                  <a:txBody>
+                    <a:bodyPr/>
+                    <a:lstStyle/>
+                    <a:p>
+                      <a:pPr>
+                        <a:buNone/>
+                      </a:pPr>
+                      <a:r>
+                        <a:rPr lang="en-US" sz="1000" dirty="0"/>
                         <a:t>rigor, language design</a:t>
                       </a:r>
                     </a:p>
@@ -10355,7 +9943,7 @@
                   </a:ext>
                 </a:extLst>
               </a:tr>
-              <a:tr h="521730">
+              <a:tr h="431704">
                 <a:tc>
                   <a:txBody>
                     <a:bodyPr/>
@@ -10365,7 +9953,7 @@
                         <a:buNone/>
                       </a:pPr>
                       <a:r>
-                        <a:rPr lang="en-US" sz="1000"/>
+                        <a:rPr lang="en-US" sz="1000" dirty="0"/>
                         <a:t>Axiomatic semantics</a:t>
                       </a:r>
                     </a:p>
@@ -10421,6 +10009,60 @@
                       <a:r>
                         <a:rPr lang="en-US" sz="1000" dirty="0"/>
                         <a:t>Meaning is described by logic assertions</a:t>
+                      </a:r>
+                    </a:p>
+                  </a:txBody>
+                  <a:tcPr marL="52173" marR="52173" marT="26086" marB="26086" anchor="ctr">
+                    <a:lnL w="12700" cap="flat" cmpd="sng" algn="ctr">
+                      <a:solidFill>
+                        <a:schemeClr val="tx1"/>
+                      </a:solidFill>
+                      <a:prstDash val="solid"/>
+                      <a:round/>
+                      <a:headEnd type="none" w="med" len="med"/>
+                      <a:tailEnd type="none" w="med" len="med"/>
+                    </a:lnL>
+                    <a:lnR w="12700" cap="flat" cmpd="sng" algn="ctr">
+                      <a:solidFill>
+                        <a:schemeClr val="tx1"/>
+                      </a:solidFill>
+                      <a:prstDash val="solid"/>
+                      <a:round/>
+                      <a:headEnd type="none" w="med" len="med"/>
+                      <a:tailEnd type="none" w="med" len="med"/>
+                    </a:lnR>
+                    <a:lnT w="12700" cap="flat" cmpd="sng" algn="ctr">
+                      <a:solidFill>
+                        <a:schemeClr val="tx1"/>
+                      </a:solidFill>
+                      <a:prstDash val="solid"/>
+                      <a:round/>
+                      <a:headEnd type="none" w="med" len="med"/>
+                      <a:tailEnd type="none" w="med" len="med"/>
+                    </a:lnT>
+                    <a:lnB w="12700" cap="flat" cmpd="sng" algn="ctr">
+                      <a:solidFill>
+                        <a:schemeClr val="tx1"/>
+                      </a:solidFill>
+                      <a:prstDash val="solid"/>
+                      <a:round/>
+                      <a:headEnd type="none" w="med" len="med"/>
+                      <a:tailEnd type="none" w="med" len="med"/>
+                    </a:lnB>
+                    <a:noFill/>
+                  </a:tcPr>
+                </a:tc>
+                <a:tc>
+                  <a:txBody>
+                    <a:bodyPr/>
+                    <a:lstStyle/>
+                    <a:p>
+                      <a:pPr>
+                        <a:buNone/>
+                      </a:pPr>
+                      <a:r>
+                        <a:rPr lang="en-US" sz="1000" dirty="0"/>
+                        <a:t> Why is it correct?</a:t>
                       </a:r>
                     </a:p>
                   </a:txBody>
@@ -10542,7 +10184,7 @@
         </p:nvSpPr>
         <p:spPr>
           <a:xfrm>
-            <a:off x="476250" y="2797175"/>
+            <a:off x="476250" y="2644775"/>
             <a:ext cx="3657600" cy="304800"/>
           </a:xfrm>
           <a:prstGeom prst="roundRect">
@@ -10780,7 +10422,7 @@
         <p:spPr>
           <a:xfrm>
             <a:off x="377532" y="557578"/>
-            <a:ext cx="4037965" cy="860877"/>
+            <a:ext cx="4037965" cy="1296893"/>
           </a:xfrm>
           <a:prstGeom prst="rect">
             <a:avLst/>
@@ -10818,8 +10460,25 @@
               </a:spcBef>
             </a:pPr>
             <a:r>
+              <a:rPr lang="en-US" sz="1100" spc="55" dirty="0">
+                <a:latin typeface="Tahoma"/>
+                <a:cs typeface="Tahoma"/>
+              </a:rPr>
+              <a:t>It’s like writing an "operating manual" for the program.</a:t>
+            </a:r>
+          </a:p>
+          <a:p>
+            <a:pPr marL="38100" marR="446405">
+              <a:lnSpc>
+                <a:spcPct val="125299"/>
+              </a:lnSpc>
+              <a:spcBef>
+                <a:spcPts val="100"/>
+              </a:spcBef>
+            </a:pPr>
+            <a:r>
               <a:rPr lang="en-US" sz="1100" dirty="0"/>
-              <a:t>Good for teaching and language manuals.</a:t>
+              <a:t>Very intuitive; Good for teaching and language manuals.</a:t>
             </a:r>
           </a:p>
           <a:p>
@@ -10883,7 +10542,7 @@
         </p:nvSpPr>
         <p:spPr>
           <a:xfrm>
-            <a:off x="171450" y="1464050"/>
+            <a:off x="171450" y="1880854"/>
             <a:ext cx="1470318" cy="457200"/>
           </a:xfrm>
           <a:prstGeom prst="roundRect">
@@ -10943,7 +10602,7 @@
         </p:nvSpPr>
         <p:spPr>
           <a:xfrm>
-            <a:off x="3061750" y="1464050"/>
+            <a:off x="3061750" y="1880854"/>
             <a:ext cx="1371600" cy="457199"/>
           </a:xfrm>
           <a:prstGeom prst="roundRect">
@@ -11003,7 +10662,7 @@
         </p:nvSpPr>
         <p:spPr>
           <a:xfrm>
-            <a:off x="1818359" y="1464051"/>
+            <a:off x="1818359" y="1880855"/>
             <a:ext cx="1066800" cy="457199"/>
           </a:xfrm>
           <a:prstGeom prst="roundRect">
@@ -11063,7 +10722,7 @@
         </p:nvSpPr>
         <p:spPr>
           <a:xfrm>
-            <a:off x="221919" y="2151772"/>
+            <a:off x="221919" y="2568576"/>
             <a:ext cx="1148299" cy="609599"/>
           </a:xfrm>
           <a:prstGeom prst="roundRect">
@@ -11105,7 +10764,7 @@
         </p:nvSpPr>
         <p:spPr>
           <a:xfrm>
-            <a:off x="314456" y="2248822"/>
+            <a:off x="314456" y="2665626"/>
             <a:ext cx="1285244" cy="415498"/>
           </a:xfrm>
           <a:prstGeom prst="rect">
@@ -11237,7 +10896,7 @@
         </p:nvSpPr>
         <p:spPr>
           <a:xfrm>
-            <a:off x="1730900" y="2151772"/>
+            <a:off x="1730900" y="2568576"/>
             <a:ext cx="1148299" cy="609599"/>
           </a:xfrm>
           <a:prstGeom prst="roundRect">
@@ -11279,7 +10938,7 @@
         </p:nvSpPr>
         <p:spPr>
           <a:xfrm>
-            <a:off x="1823437" y="2248822"/>
+            <a:off x="1823437" y="2665626"/>
             <a:ext cx="1285244" cy="276999"/>
           </a:xfrm>
           <a:prstGeom prst="rect">
@@ -11397,7 +11056,7 @@
         </p:nvSpPr>
         <p:spPr>
           <a:xfrm>
-            <a:off x="3210592" y="2151772"/>
+            <a:off x="3210592" y="2568576"/>
             <a:ext cx="1148299" cy="609599"/>
           </a:xfrm>
           <a:prstGeom prst="roundRect">
@@ -11439,7 +11098,7 @@
         </p:nvSpPr>
         <p:spPr>
           <a:xfrm>
-            <a:off x="3303129" y="2248822"/>
+            <a:off x="3303129" y="2665626"/>
             <a:ext cx="1285244" cy="415498"/>
           </a:xfrm>
           <a:prstGeom prst="rect">
@@ -11557,6 +11216,37 @@
           </a:p>
         </p:txBody>
       </p:sp>
+      <p:pic>
+        <p:nvPicPr>
+          <p:cNvPr id="6" name="object 7">
+            <a:extLst>
+              <a:ext uri="{FF2B5EF4-FFF2-40B4-BE49-F238E27FC236}">
+                <a16:creationId xmlns:a16="http://schemas.microsoft.com/office/drawing/2014/main" id="{0EF2430F-2878-BDC8-4C63-3FDC6D5E01F2}"/>
+              </a:ext>
+              <a:ext uri="{C183D7F6-B498-43B3-948B-1728B52AA6E4}">
+                <adec:decorative xmlns:adec="http://schemas.microsoft.com/office/drawing/2017/decorative" val="1"/>
+              </a:ext>
+            </a:extLst>
+          </p:cNvPr>
+          <p:cNvPicPr/>
+          <p:nvPr/>
+        </p:nvPicPr>
+        <p:blipFill>
+          <a:blip r:embed="rId3" cstate="print"/>
+          <a:stretch>
+            <a:fillRect/>
+          </a:stretch>
+        </p:blipFill>
+        <p:spPr>
+          <a:xfrm>
+            <a:off x="281088" y="1520649"/>
+            <a:ext cx="65265" cy="65265"/>
+          </a:xfrm>
+          <a:prstGeom prst="rect">
+            <a:avLst/>
+          </a:prstGeom>
+        </p:spPr>
+      </p:pic>
     </p:spTree>
     <p:extLst>
       <p:ext uri="{BB962C8B-B14F-4D97-AF65-F5344CB8AC3E}">
@@ -11747,7 +11437,7 @@
         <p:spPr>
           <a:xfrm>
             <a:off x="377532" y="557578"/>
-            <a:ext cx="4365918" cy="1521314"/>
+            <a:ext cx="4365918" cy="1720086"/>
           </a:xfrm>
           <a:prstGeom prst="rect">
             <a:avLst/>
@@ -11772,7 +11462,7 @@
                 <a:latin typeface="Tahoma"/>
                 <a:cs typeface="Tahoma"/>
               </a:rPr>
-              <a:t>[Main idea] Map each language construct to a mathematical object.</a:t>
+              <a:t>[Main idea] It does not concern itself with how the program executes, but only with the mathematical object the program ultimately represents.</a:t>
             </a:r>
           </a:p>
           <a:p>
@@ -11865,7 +11555,7 @@
         </p:blipFill>
         <p:spPr>
           <a:xfrm>
-            <a:off x="281089" y="1104874"/>
+            <a:off x="281089" y="1273175"/>
             <a:ext cx="65265" cy="65265"/>
           </a:xfrm>
           <a:prstGeom prst="rect">
@@ -11896,7 +11586,7 @@
         </p:blipFill>
         <p:spPr>
           <a:xfrm>
-            <a:off x="285172" y="1324757"/>
+            <a:off x="285172" y="1493058"/>
             <a:ext cx="65265" cy="65265"/>
           </a:xfrm>
           <a:prstGeom prst="rect">
@@ -11927,7 +11617,7 @@
         </p:blipFill>
         <p:spPr>
           <a:xfrm>
-            <a:off x="281089" y="1744822"/>
+            <a:off x="281089" y="1913123"/>
             <a:ext cx="65265" cy="65265"/>
           </a:xfrm>
           <a:prstGeom prst="rect">
@@ -11949,7 +11639,7 @@
         </p:nvSpPr>
         <p:spPr>
           <a:xfrm>
-            <a:off x="346354" y="2107467"/>
+            <a:off x="291174" y="2308728"/>
             <a:ext cx="2133600" cy="1099283"/>
           </a:xfrm>
           <a:prstGeom prst="roundRect">
@@ -11991,7 +11681,7 @@
         </p:nvSpPr>
         <p:spPr>
           <a:xfrm>
-            <a:off x="489360" y="2277397"/>
+            <a:off x="434180" y="2478658"/>
             <a:ext cx="1914394" cy="830997"/>
           </a:xfrm>
           <a:prstGeom prst="rect">
@@ -12166,7 +11856,7 @@
         </p:nvSpPr>
         <p:spPr>
           <a:xfrm>
-            <a:off x="2914650" y="2186699"/>
+            <a:off x="2859470" y="2387960"/>
             <a:ext cx="1470318" cy="892213"/>
           </a:xfrm>
           <a:prstGeom prst="wedgeRoundRectCallout">
@@ -13726,6 +13416,80 @@
           </a:p>
         </p:txBody>
       </p:sp>
+      <p:pic>
+        <p:nvPicPr>
+          <p:cNvPr id="6" name="Picture 5">
+            <a:extLst>
+              <a:ext uri="{FF2B5EF4-FFF2-40B4-BE49-F238E27FC236}">
+                <a16:creationId xmlns:a16="http://schemas.microsoft.com/office/drawing/2014/main" id="{E723B6C5-821D-5164-161D-2E0BBFF787BD}"/>
+              </a:ext>
+            </a:extLst>
+          </p:cNvPr>
+          <p:cNvPicPr>
+            <a:picLocks noChangeAspect="1"/>
+          </p:cNvPicPr>
+          <p:nvPr/>
+        </p:nvPicPr>
+        <p:blipFill>
+          <a:blip r:embed="rId5"/>
+          <a:stretch>
+            <a:fillRect/>
+          </a:stretch>
+        </p:blipFill>
+        <p:spPr>
+          <a:xfrm>
+            <a:off x="2060113" y="47711"/>
+            <a:ext cx="778337" cy="506537"/>
+          </a:xfrm>
+          <a:prstGeom prst="rect">
+            <a:avLst/>
+          </a:prstGeom>
+        </p:spPr>
+      </p:pic>
+      <p:sp>
+        <p:nvSpPr>
+          <p:cNvPr id="15" name="TextBox 14">
+            <a:extLst>
+              <a:ext uri="{FF2B5EF4-FFF2-40B4-BE49-F238E27FC236}">
+                <a16:creationId xmlns:a16="http://schemas.microsoft.com/office/drawing/2014/main" id="{FC88A944-5C71-1EE4-045A-E6C7A888B4A7}"/>
+              </a:ext>
+            </a:extLst>
+          </p:cNvPr>
+          <p:cNvSpPr txBox="1"/>
+          <p:nvPr/>
+        </p:nvSpPr>
+        <p:spPr>
+          <a:xfrm>
+            <a:off x="2838450" y="118264"/>
+            <a:ext cx="1323738" cy="261610"/>
+          </a:xfrm>
+          <a:prstGeom prst="rect">
+            <a:avLst/>
+          </a:prstGeom>
+          <a:noFill/>
+        </p:spPr>
+        <p:txBody>
+          <a:bodyPr wrap="square">
+            <a:spAutoFit/>
+          </a:bodyPr>
+          <a:lstStyle/>
+          <a:p>
+            <a:pPr>
+              <a:buNone/>
+            </a:pPr>
+            <a:r>
+              <a:rPr lang="en-US" sz="1100" dirty="0">
+                <a:sym typeface="Wingdings" pitchFamily="2" charset="2"/>
+              </a:rPr>
+              <a:t></a:t>
+            </a:r>
+            <a:r>
+              <a:rPr lang="en-US" sz="1100" dirty="0"/>
+              <a:t> 1 + 2 + ... + n ?</a:t>
+            </a:r>
+          </a:p>
+        </p:txBody>
+      </p:sp>
     </p:spTree>
     <p:extLst>
       <p:ext uri="{BB962C8B-B14F-4D97-AF65-F5344CB8AC3E}">
@@ -14033,7 +13797,7 @@
                         <a:buNone/>
                       </a:pPr>
                       <a:r>
-                        <a:rPr lang="en-US" sz="900"/>
+                        <a:rPr lang="en-US" sz="900" dirty="0"/>
                         <a:t>Logic &amp; Proofs</a:t>
                       </a:r>
                     </a:p>
@@ -14087,7 +13851,7 @@
                         <a:buNone/>
                       </a:pPr>
                       <a:r>
-                        <a:rPr lang="en-US" sz="900"/>
+                        <a:rPr lang="en-US" sz="900" dirty="0"/>
                         <a:t>Program correctness, assertions, axiomatic semantics</a:t>
                       </a:r>
                     </a:p>
@@ -14202,7 +13966,7 @@
                         <a:buNone/>
                       </a:pPr>
                       <a:r>
-                        <a:rPr lang="en-US" sz="900"/>
+                        <a:rPr lang="en-US" sz="900" dirty="0"/>
                         <a:t>Languages as sets of valid strings</a:t>
                       </a:r>
                     </a:p>
@@ -14263,7 +14027,7 @@
                         <a:buNone/>
                       </a:pPr>
                       <a:r>
-                        <a:rPr lang="en-US" sz="900"/>
+                        <a:rPr lang="en-US" sz="900" dirty="0"/>
                         <a:t>Relations &amp; Functions</a:t>
                       </a:r>
                     </a:p>
@@ -14317,7 +14081,7 @@
                         <a:buNone/>
                       </a:pPr>
                       <a:r>
-                        <a:rPr lang="en-US" sz="900"/>
+                        <a:rPr lang="en-US" sz="900" dirty="0"/>
                         <a:t>Semantic mappings, variable lookup, denotational semantics</a:t>
                       </a:r>
                     </a:p>
@@ -14378,7 +14142,7 @@
                         <a:buNone/>
                       </a:pPr>
                       <a:r>
-                        <a:rPr lang="en-US" sz="900"/>
+                        <a:rPr lang="en-US" sz="900" dirty="0"/>
                         <a:t>Sequences &amp; Recursion</a:t>
                       </a:r>
                     </a:p>
@@ -14493,7 +14257,7 @@
                         <a:buNone/>
                       </a:pPr>
                       <a:r>
-                        <a:rPr lang="en-US" sz="900"/>
+                        <a:rPr lang="en-US" sz="900" dirty="0"/>
                         <a:t>Induction</a:t>
                       </a:r>
                     </a:p>
@@ -14547,7 +14311,7 @@
                         <a:buNone/>
                       </a:pPr>
                       <a:r>
-                        <a:rPr lang="en-US" sz="900"/>
+                        <a:rPr lang="en-US" sz="900" dirty="0"/>
                         <a:t>Loop invariants and correctness proofs</a:t>
                       </a:r>
                     </a:p>
@@ -14608,7 +14372,7 @@
                         <a:buNone/>
                       </a:pPr>
                       <a:r>
-                        <a:rPr lang="en-US" sz="900"/>
+                        <a:rPr lang="en-US" sz="900" dirty="0"/>
                         <a:t>Graphs &amp; Trees</a:t>
                       </a:r>
                     </a:p>
@@ -14662,7 +14426,7 @@
                         <a:buNone/>
                       </a:pPr>
                       <a:r>
-                        <a:rPr lang="en-US" sz="900"/>
+                        <a:rPr lang="en-US" sz="900" dirty="0"/>
                         <a:t>Parse trees and syntax trees</a:t>
                       </a:r>
                     </a:p>
@@ -16554,7 +16318,7 @@
           <p:nvPr>
             <p:extLst>
               <p:ext uri="{D42A27DB-BD31-4B8C-83A1-F6EECF244321}">
-                <p14:modId xmlns:p14="http://schemas.microsoft.com/office/powerpoint/2010/main" val="1717042348"/>
+                <p14:modId xmlns:p14="http://schemas.microsoft.com/office/powerpoint/2010/main" val="1063469237"/>
               </p:ext>
             </p:extLst>
           </p:nvPr>
@@ -16953,7 +16717,7 @@
                         <a:buNone/>
                       </a:pPr>
                       <a:r>
-                        <a:rPr lang="en-US" sz="800"/>
+                        <a:rPr lang="en-US" sz="800" dirty="0"/>
                         <a:t>Language</a:t>
                       </a:r>
                     </a:p>
@@ -17122,7 +16886,7 @@
                         <a:buNone/>
                       </a:pPr>
                       <a:r>
-                        <a:rPr lang="en-US" sz="800"/>
+                        <a:rPr lang="en-US" sz="800" dirty="0"/>
                         <a:t>Lexeme</a:t>
                       </a:r>
                     </a:p>
@@ -17176,36 +16940,36 @@
                         <a:buNone/>
                       </a:pPr>
                       <a:r>
-                        <a:rPr lang="en-US" sz="800"/>
+                        <a:rPr lang="en-US" sz="800" dirty="0"/>
                         <a:t>Lowest-level unit, such as </a:t>
                       </a:r>
                       <a:r>
-                        <a:rPr lang="en-US" sz="800">
+                        <a:rPr lang="en-US" sz="800" dirty="0">
                           <a:latin typeface="Courier New" panose="02070309020205020404" pitchFamily="49" charset="0"/>
                         </a:rPr>
                         <a:t>sum</a:t>
                       </a:r>
                       <a:r>
-                        <a:rPr lang="en-US" sz="800"/>
+                        <a:rPr lang="en-US" sz="800" dirty="0"/>
                         <a:t>, </a:t>
                       </a:r>
                       <a:r>
-                        <a:rPr lang="en-US" sz="800">
+                        <a:rPr lang="en-US" sz="800" dirty="0">
                           <a:latin typeface="Courier New" panose="02070309020205020404" pitchFamily="49" charset="0"/>
                         </a:rPr>
                         <a:t>*</a:t>
                       </a:r>
                       <a:r>
-                        <a:rPr lang="en-US" sz="800"/>
+                        <a:rPr lang="en-US" sz="800" dirty="0"/>
                         <a:t>, </a:t>
                       </a:r>
                       <a:r>
-                        <a:rPr lang="en-US" sz="800">
+                        <a:rPr lang="en-US" sz="800" dirty="0">
                           <a:latin typeface="Courier New" panose="02070309020205020404" pitchFamily="49" charset="0"/>
                         </a:rPr>
                         <a:t>begin</a:t>
                       </a:r>
-                      <a:endParaRPr lang="en-US" sz="800"/>
+                      <a:endParaRPr lang="en-US" sz="800" dirty="0"/>
                     </a:p>
                   </a:txBody>
                   <a:tcPr marL="17710" marR="17710" marT="8855" marB="8855" anchor="ctr">
@@ -17257,52 +17021,52 @@
                         <a:buNone/>
                       </a:pPr>
                       <a:r>
-                        <a:rPr lang="en-US" sz="800">
+                        <a:rPr lang="en-US" sz="800" dirty="0">
                           <a:latin typeface="Courier New" panose="02070309020205020404" pitchFamily="49" charset="0"/>
                         </a:rPr>
                         <a:t>sum</a:t>
                       </a:r>
                       <a:r>
-                        <a:rPr lang="en-US" sz="800"/>
+                        <a:rPr lang="en-US" sz="800" dirty="0"/>
                         <a:t>, </a:t>
                       </a:r>
                       <a:r>
-                        <a:rPr lang="en-US" sz="800">
+                        <a:rPr lang="en-US" sz="800" dirty="0">
                           <a:latin typeface="Courier New" panose="02070309020205020404" pitchFamily="49" charset="0"/>
                         </a:rPr>
                         <a:t>*</a:t>
                       </a:r>
                       <a:r>
-                        <a:rPr lang="en-US" sz="800"/>
+                        <a:rPr lang="en-US" sz="800" dirty="0"/>
                         <a:t>, </a:t>
                       </a:r>
                       <a:r>
-                        <a:rPr lang="en-US" sz="800">
+                        <a:rPr lang="en-US" sz="800" dirty="0">
                           <a:latin typeface="Courier New" panose="02070309020205020404" pitchFamily="49" charset="0"/>
                         </a:rPr>
                         <a:t>begin</a:t>
                       </a:r>
                       <a:r>
-                        <a:rPr lang="en-US" sz="800"/>
+                        <a:rPr lang="en-US" sz="800" dirty="0"/>
                         <a:t>, </a:t>
                       </a:r>
                       <a:r>
-                        <a:rPr lang="en-US" sz="800">
+                        <a:rPr lang="en-US" sz="800" dirty="0">
                           <a:latin typeface="Courier New" panose="02070309020205020404" pitchFamily="49" charset="0"/>
                         </a:rPr>
                         <a:t>x</a:t>
                       </a:r>
                       <a:r>
-                        <a:rPr lang="en-US" sz="800"/>
+                        <a:rPr lang="en-US" sz="800" dirty="0"/>
                         <a:t>, </a:t>
                       </a:r>
                       <a:r>
-                        <a:rPr lang="en-US" sz="800">
+                        <a:rPr lang="en-US" sz="800" dirty="0">
                           <a:latin typeface="Courier New" panose="02070309020205020404" pitchFamily="49" charset="0"/>
                         </a:rPr>
                         <a:t>100</a:t>
                       </a:r>
-                      <a:endParaRPr lang="en-US" sz="800"/>
+                      <a:endParaRPr lang="en-US" sz="800" dirty="0"/>
                     </a:p>
                   </a:txBody>
                   <a:tcPr marL="17710" marR="17710" marT="8855" marB="8855" anchor="ctr">
@@ -17361,7 +17125,7 @@
                         <a:buNone/>
                       </a:pPr>
                       <a:r>
-                        <a:rPr lang="en-US" sz="800"/>
+                        <a:rPr lang="en-US" sz="800" dirty="0"/>
                         <a:t>Token</a:t>
                       </a:r>
                     </a:p>
@@ -17415,7 +17179,7 @@
                         <a:buNone/>
                       </a:pPr>
                       <a:r>
-                        <a:rPr lang="en-US" sz="800"/>
+                        <a:rPr lang="en-US" sz="800" dirty="0"/>
                         <a:t>Category of lexemes, such as identifier, operator</a:t>
                       </a:r>
                     </a:p>
@@ -17469,33 +17233,49 @@
                         <a:buNone/>
                       </a:pPr>
                       <a:r>
-                        <a:rPr lang="en-US" sz="800">
+                        <a:rPr lang="en-US" sz="800" dirty="0">
                           <a:latin typeface="Courier New" panose="02070309020205020404" pitchFamily="49" charset="0"/>
                         </a:rPr>
                         <a:t>sum</a:t>
                       </a:r>
                       <a:r>
-                        <a:rPr lang="en-US" sz="800"/>
+                        <a:rPr lang="en-US" sz="800" dirty="0"/>
                         <a:t> → identifier; </a:t>
                       </a:r>
+                    </a:p>
+                    <a:p>
+                      <a:pPr>
+                        <a:buNone/>
+                      </a:pPr>
                       <a:r>
-                        <a:rPr lang="en-US" sz="800">
+                        <a:rPr lang="zh-CN" altLang="en-US" sz="800" dirty="0">
+                          <a:latin typeface="Courier New" panose="02070309020205020404" pitchFamily="49" charset="0"/>
+                        </a:rPr>
+                        <a:t>  </a:t>
+                      </a:r>
+                      <a:r>
+                        <a:rPr lang="en-US" sz="800" dirty="0">
                           <a:latin typeface="Courier New" panose="02070309020205020404" pitchFamily="49" charset="0"/>
                         </a:rPr>
                         <a:t>*</a:t>
                       </a:r>
                       <a:r>
-                        <a:rPr lang="en-US" sz="800"/>
+                        <a:rPr lang="en-US" sz="800" dirty="0"/>
                         <a:t> → operator; </a:t>
                       </a:r>
+                    </a:p>
+                    <a:p>
+                      <a:pPr>
+                        <a:buNone/>
+                      </a:pPr>
                       <a:r>
-                        <a:rPr lang="en-US" sz="800">
+                        <a:rPr lang="en-US" sz="800" dirty="0">
                           <a:latin typeface="Courier New" panose="02070309020205020404" pitchFamily="49" charset="0"/>
                         </a:rPr>
                         <a:t>100</a:t>
                       </a:r>
                       <a:r>
-                        <a:rPr lang="en-US" sz="800"/>
+                        <a:rPr lang="en-US" sz="800" dirty="0"/>
                         <a:t> → integer literal</a:t>
                       </a:r>
                     </a:p>
@@ -17556,7 +17336,7 @@
                         <a:buNone/>
                       </a:pPr>
                       <a:r>
-                        <a:rPr lang="en-US" sz="800"/>
+                        <a:rPr lang="en-US" sz="800" dirty="0"/>
                         <a:t>Recognizer</a:t>
                       </a:r>
                     </a:p>
@@ -17738,7 +17518,7 @@
                         <a:buNone/>
                       </a:pPr>
                       <a:r>
-                        <a:rPr lang="en-US" sz="800"/>
+                        <a:rPr lang="en-US" sz="800" dirty="0"/>
                         <a:t>Generator</a:t>
                       </a:r>
                     </a:p>
@@ -18361,7 +18141,7 @@
         <p:spPr>
           <a:xfrm>
             <a:off x="257020" y="2405708"/>
-            <a:ext cx="1942390" cy="900246"/>
+            <a:ext cx="1514630" cy="900246"/>
           </a:xfrm>
           <a:prstGeom prst="rect">
             <a:avLst/>
@@ -18453,29 +18233,7 @@
                 <a:ea typeface="+mn-ea"/>
                 <a:cs typeface="+mn-cs"/>
               </a:rPr>
-              <a:t>&lt;</a:t>
-            </a:r>
-            <a:r>
-              <a:rPr lang="en-US" sz="800" dirty="0" err="1">
-                <a:solidFill>
-                  <a:schemeClr val="tx1"/>
-                </a:solidFill>
-                <a:latin typeface="Courier New" panose="02070309020205020404" pitchFamily="49" charset="0"/>
-                <a:ea typeface="+mn-ea"/>
-                <a:cs typeface="+mn-cs"/>
-              </a:rPr>
-              <a:t>stmt</a:t>
-            </a:r>
-            <a:r>
-              <a:rPr lang="en-US" sz="800" dirty="0">
-                <a:solidFill>
-                  <a:schemeClr val="tx1"/>
-                </a:solidFill>
-                <a:latin typeface="Courier New" panose="02070309020205020404" pitchFamily="49" charset="0"/>
-                <a:ea typeface="+mn-ea"/>
-                <a:cs typeface="+mn-cs"/>
-              </a:rPr>
-              <a:t>&gt; → &lt;var&gt; = &lt;expr&gt;</a:t>
+              <a:t>&lt;stmt&gt; → &lt;var&gt; = &lt;expr&gt;</a:t>
             </a:r>
           </a:p>
           <a:p>
@@ -18774,18 +18532,11 @@
               <a:buChar char="ü"/>
             </a:pPr>
             <a:r>
-              <a:rPr lang="en-US" sz="1100" spc="55" dirty="0" err="1">
-                <a:latin typeface="Tahoma"/>
-                <a:cs typeface="Tahoma"/>
-              </a:rPr>
-              <a:t>nonterminals</a:t>
-            </a:r>
-            <a:r>
               <a:rPr lang="en-US" sz="1100" spc="55" dirty="0">
                 <a:latin typeface="Tahoma"/>
                 <a:cs typeface="Tahoma"/>
               </a:rPr>
-              <a:t>, such as </a:t>
+              <a:t>non-terminals, such as </a:t>
             </a:r>
             <a:r>
               <a:rPr lang="en-US" sz="800" dirty="0">
@@ -19510,43 +19261,7 @@
                 </a:solidFill>
                 <a:latin typeface="Courier New" panose="02070309020205020404" pitchFamily="49" charset="0"/>
               </a:rPr>
-              <a:t> &lt;</a:t>
-            </a:r>
-            <a:r>
-              <a:rPr lang="en-US" altLang="en-US" sz="600" dirty="0" err="1">
-                <a:solidFill>
-                  <a:schemeClr val="bg1"/>
-                </a:solidFill>
-                <a:latin typeface="Courier New" panose="02070309020205020404" pitchFamily="49" charset="0"/>
-              </a:rPr>
-              <a:t>stmt</a:t>
-            </a:r>
-            <a:r>
-              <a:rPr lang="en-US" altLang="en-US" sz="600" dirty="0">
-                <a:solidFill>
-                  <a:schemeClr val="bg1"/>
-                </a:solidFill>
-                <a:latin typeface="Courier New" panose="02070309020205020404" pitchFamily="49" charset="0"/>
-              </a:rPr>
-              <a:t>&gt; | &lt;</a:t>
-            </a:r>
-            <a:r>
-              <a:rPr lang="en-US" altLang="en-US" sz="600" dirty="0" err="1">
-                <a:solidFill>
-                  <a:schemeClr val="bg1"/>
-                </a:solidFill>
-                <a:latin typeface="Courier New" panose="02070309020205020404" pitchFamily="49" charset="0"/>
-              </a:rPr>
-              <a:t>stmt</a:t>
-            </a:r>
-            <a:r>
-              <a:rPr lang="en-US" altLang="en-US" sz="600" dirty="0">
-                <a:solidFill>
-                  <a:schemeClr val="bg1"/>
-                </a:solidFill>
-                <a:latin typeface="Courier New" panose="02070309020205020404" pitchFamily="49" charset="0"/>
-              </a:rPr>
-              <a:t>&gt; ; &lt;</a:t>
+              <a:t> &lt;stmt&gt; | &lt;stmt&gt; ; &lt;</a:t>
             </a:r>
             <a:r>
               <a:rPr lang="en-US" altLang="en-US" sz="600" dirty="0" err="1">
@@ -19579,25 +19294,7 @@
                 </a:solidFill>
                 <a:latin typeface="Courier New" panose="02070309020205020404" pitchFamily="49" charset="0"/>
               </a:rPr>
-              <a:t>   &lt;</a:t>
-            </a:r>
-            <a:r>
-              <a:rPr lang="en-US" altLang="en-US" sz="600" dirty="0" err="1">
-                <a:solidFill>
-                  <a:schemeClr val="bg1"/>
-                </a:solidFill>
-                <a:latin typeface="Courier New" panose="02070309020205020404" pitchFamily="49" charset="0"/>
-              </a:rPr>
-              <a:t>stmt</a:t>
-            </a:r>
-            <a:r>
-              <a:rPr lang="en-US" altLang="en-US" sz="600" dirty="0">
-                <a:solidFill>
-                  <a:schemeClr val="bg1"/>
-                </a:solidFill>
-                <a:latin typeface="Courier New" panose="02070309020205020404" pitchFamily="49" charset="0"/>
-              </a:rPr>
-              <a:t>&gt; </a:t>
+              <a:t>   &lt;stmt&gt; </a:t>
             </a:r>
             <a:r>
               <a:rPr lang="en-US" altLang="en-US" sz="600" dirty="0">
@@ -19909,25 +19606,7 @@
                 </a:solidFill>
                 <a:latin typeface="Courier New" panose="02070309020205020404" pitchFamily="49" charset="0"/>
               </a:rPr>
-              <a:t>⇒ &lt;</a:t>
-            </a:r>
-            <a:r>
-              <a:rPr lang="en-US" altLang="en-US" sz="600" dirty="0" err="1">
-                <a:solidFill>
-                  <a:schemeClr val="bg1"/>
-                </a:solidFill>
-                <a:latin typeface="Courier New" panose="02070309020205020404" pitchFamily="49" charset="0"/>
-              </a:rPr>
-              <a:t>stmt</a:t>
-            </a:r>
-            <a:r>
-              <a:rPr lang="en-US" altLang="en-US" sz="600" dirty="0">
-                <a:solidFill>
-                  <a:schemeClr val="bg1"/>
-                </a:solidFill>
-                <a:latin typeface="Courier New" panose="02070309020205020404" pitchFamily="49" charset="0"/>
-              </a:rPr>
-              <a:t>&gt;</a:t>
+              <a:t>⇒ &lt;stmt&gt;</a:t>
             </a:r>
           </a:p>
           <a:p>
@@ -20749,6 +20428,16 @@
               </a:rPr>
               <a:t>, We can create two parse tree from this grammar to obtain a string </a:t>
             </a:r>
+          </a:p>
+          <a:p>
+            <a:pPr marL="38100" marR="446405">
+              <a:lnSpc>
+                <a:spcPct val="125299"/>
+              </a:lnSpc>
+              <a:spcBef>
+                <a:spcPts val="100"/>
+              </a:spcBef>
+            </a:pPr>
             <a:r>
               <a:rPr lang="en-US" sz="1000" dirty="0">
                 <a:solidFill>
@@ -20859,6 +20548,159 @@
           </a:extLst>
         </p:spPr>
       </p:pic>
+      <mc:AlternateContent xmlns:mc="http://schemas.openxmlformats.org/markup-compatibility/2006">
+        <mc:Choice xmlns:p14="http://schemas.microsoft.com/office/powerpoint/2010/main" Requires="p14">
+          <p:contentPart p14:bwMode="auto" r:id="rId4">
+            <p14:nvContentPartPr>
+              <p14:cNvPr id="10" name="Ink 9">
+                <a:extLst>
+                  <a:ext uri="{FF2B5EF4-FFF2-40B4-BE49-F238E27FC236}">
+                    <a16:creationId xmlns:a16="http://schemas.microsoft.com/office/drawing/2014/main" id="{88BC1BF6-83D8-FA3C-6BA1-56A4A45E3F49}"/>
+                  </a:ext>
+                </a:extLst>
+              </p14:cNvPr>
+              <p14:cNvContentPartPr/>
+              <p14:nvPr/>
+            </p14:nvContentPartPr>
+            <p14:xfrm>
+              <a:off x="1174856" y="1356868"/>
+              <a:ext cx="360" cy="1800"/>
+            </p14:xfrm>
+          </p:contentPart>
+        </mc:Choice>
+        <mc:Fallback>
+          <p:pic>
+            <p:nvPicPr>
+              <p:cNvPr id="10" name="Ink 9">
+                <a:extLst>
+                  <a:ext uri="{FF2B5EF4-FFF2-40B4-BE49-F238E27FC236}">
+                    <a16:creationId xmlns:a16="http://schemas.microsoft.com/office/drawing/2014/main" id="{88BC1BF6-83D8-FA3C-6BA1-56A4A45E3F49}"/>
+                  </a:ext>
+                </a:extLst>
+              </p:cNvPr>
+              <p:cNvPicPr/>
+              <p:nvPr/>
+            </p:nvPicPr>
+            <p:blipFill>
+              <a:blip r:embed="rId5"/>
+              <a:stretch>
+                <a:fillRect/>
+              </a:stretch>
+            </p:blipFill>
+            <p:spPr>
+              <a:xfrm>
+                <a:off x="1170536" y="1352548"/>
+                <a:ext cx="9000" cy="10440"/>
+              </a:xfrm>
+              <a:prstGeom prst="rect">
+                <a:avLst/>
+              </a:prstGeom>
+            </p:spPr>
+          </p:pic>
+        </mc:Fallback>
+      </mc:AlternateContent>
+      <mc:AlternateContent xmlns:mc="http://schemas.openxmlformats.org/markup-compatibility/2006">
+        <mc:Choice xmlns:p14="http://schemas.microsoft.com/office/powerpoint/2010/main" Requires="p14">
+          <p:contentPart p14:bwMode="auto" r:id="rId6">
+            <p14:nvContentPartPr>
+              <p14:cNvPr id="17" name="Ink 16">
+                <a:extLst>
+                  <a:ext uri="{FF2B5EF4-FFF2-40B4-BE49-F238E27FC236}">
+                    <a16:creationId xmlns:a16="http://schemas.microsoft.com/office/drawing/2014/main" id="{18D30610-E357-E61B-A34B-CE7518F170E3}"/>
+                  </a:ext>
+                </a:extLst>
+              </p14:cNvPr>
+              <p14:cNvContentPartPr/>
+              <p14:nvPr/>
+            </p14:nvContentPartPr>
+            <p14:xfrm>
+              <a:off x="3447536" y="2609668"/>
+              <a:ext cx="360" cy="1800"/>
+            </p14:xfrm>
+          </p:contentPart>
+        </mc:Choice>
+        <mc:Fallback>
+          <p:pic>
+            <p:nvPicPr>
+              <p:cNvPr id="17" name="Ink 16">
+                <a:extLst>
+                  <a:ext uri="{FF2B5EF4-FFF2-40B4-BE49-F238E27FC236}">
+                    <a16:creationId xmlns:a16="http://schemas.microsoft.com/office/drawing/2014/main" id="{18D30610-E357-E61B-A34B-CE7518F170E3}"/>
+                  </a:ext>
+                </a:extLst>
+              </p:cNvPr>
+              <p:cNvPicPr/>
+              <p:nvPr/>
+            </p:nvPicPr>
+            <p:blipFill>
+              <a:blip r:embed="rId7"/>
+              <a:stretch>
+                <a:fillRect/>
+              </a:stretch>
+            </p:blipFill>
+            <p:spPr>
+              <a:xfrm>
+                <a:off x="3443216" y="2605348"/>
+                <a:ext cx="9000" cy="10440"/>
+              </a:xfrm>
+              <a:prstGeom prst="rect">
+                <a:avLst/>
+              </a:prstGeom>
+            </p:spPr>
+          </p:pic>
+        </mc:Fallback>
+      </mc:AlternateContent>
+      <mc:AlternateContent xmlns:mc="http://schemas.openxmlformats.org/markup-compatibility/2006">
+        <mc:Choice xmlns:p14="http://schemas.microsoft.com/office/powerpoint/2010/main" Requires="p14">
+          <p:contentPart p14:bwMode="auto" r:id="rId8">
+            <p14:nvContentPartPr>
+              <p14:cNvPr id="18" name="Ink 17">
+                <a:extLst>
+                  <a:ext uri="{FF2B5EF4-FFF2-40B4-BE49-F238E27FC236}">
+                    <a16:creationId xmlns:a16="http://schemas.microsoft.com/office/drawing/2014/main" id="{7CDB8258-7028-513D-8F41-D01C6755540A}"/>
+                  </a:ext>
+                </a:extLst>
+              </p14:cNvPr>
+              <p14:cNvContentPartPr/>
+              <p14:nvPr/>
+            </p14:nvContentPartPr>
+            <p14:xfrm>
+              <a:off x="3949736" y="2550268"/>
+              <a:ext cx="360" cy="360"/>
+            </p14:xfrm>
+          </p:contentPart>
+        </mc:Choice>
+        <mc:Fallback>
+          <p:pic>
+            <p:nvPicPr>
+              <p:cNvPr id="18" name="Ink 17">
+                <a:extLst>
+                  <a:ext uri="{FF2B5EF4-FFF2-40B4-BE49-F238E27FC236}">
+                    <a16:creationId xmlns:a16="http://schemas.microsoft.com/office/drawing/2014/main" id="{7CDB8258-7028-513D-8F41-D01C6755540A}"/>
+                  </a:ext>
+                </a:extLst>
+              </p:cNvPr>
+              <p:cNvPicPr/>
+              <p:nvPr/>
+            </p:nvPicPr>
+            <p:blipFill>
+              <a:blip r:embed="rId7"/>
+              <a:stretch>
+                <a:fillRect/>
+              </a:stretch>
+            </p:blipFill>
+            <p:spPr>
+              <a:xfrm>
+                <a:off x="3945416" y="2545948"/>
+                <a:ext cx="9000" cy="9000"/>
+              </a:xfrm>
+              <a:prstGeom prst="rect">
+                <a:avLst/>
+              </a:prstGeom>
+            </p:spPr>
+          </p:pic>
+        </mc:Fallback>
+      </mc:AlternateContent>
     </p:spTree>
     <p:extLst>
       <p:ext uri="{BB962C8B-B14F-4D97-AF65-F5344CB8AC3E}">
